--- a/docs/HACKATHON_DEMO.pptx
+++ b/docs/HACKATHON_DEMO.pptx
@@ -510,7 +510,7 @@
           <a:lstStyle/>
           <a:p>
             <a:r>
-              <a:t>1. Open with the incident, then introduce the idea</a:t>
+              <a:t>1. The store is open. A device goes offline.</a:t>
             </a:r>
           </a:p>
           <a:p/>
@@ -521,7 +521,7 @@
           </a:p>
           <a:p>
             <a:r>
-              <a:t>Imagine a store that is open for business when a connected device goes offline. The person investigating needs to know what happened first: a power symptom, a connection issue, or a software change? That question led me to build OpsReplay.</a:t>
+              <a:t>Imagine a store that is open when a connected device goes offline. The person investigating needs to know what happened beforehand: a power symptom, a connection problem, or a device issue? OpsReplay helps reconstruct that sequence.</a:t>
             </a:r>
           </a:p>
           <a:p/>
@@ -532,13 +532,13 @@
           </a:p>
           <a:p>
             <a:r>
-              <a:t>Imagine a small store using connected devices in its operations. The store is open when one device goes offline. I want to know what happened before it stopped responding: was there a power symptom, a connection issue, or a software change worth checking? This is an illustrative scenario, not a customer deployment or interview result. I built this hackathon project solo. The implementation uses a smart-plug simulator, not connected retail hardware.</a:t>
+              <a:t>The retail setting is illustrative, with no connected customer hardware. Do not present firmware, commits or weather as a cause without an established relationship.</a:t>
             </a:r>
           </a:p>
           <a:p/>
           <a:p>
             <a:r>
-              <a:t>Sources: S2: https://docs.pagerduty.com/ai-automation/aiops/recent-changes | S3: https://www.datadoghq.com/blog/bits-ai-sre/ | S5: https://developer.squareup.com/blog/incident-summary-2023-09-07/</a:t>
+              <a:t>Sources: S2: https://docs.pagerduty.com/ai-automation/aiops/recent-changes | S3: https://www.datadoghq.com/blog/bits-ai-sre/</a:t>
             </a:r>
           </a:p>
         </p:txBody>
@@ -608,7 +608,7 @@
           <a:lstStyle/>
           <a:p>
             <a:r>
-              <a:t>2. The problem: reconstructing a sequence across sources</a:t>
+              <a:t>2. The offline alert is only the last clue.</a:t>
             </a:r>
           </a:p>
           <a:p/>
@@ -619,7 +619,7 @@
           </a:p>
           <a:p>
             <a:r>
-              <a:t>Device records show symptoms. Software activity shows changes. When those records are separate, a person has to reconstruct the sequence. Technical outages can disrupt real businesses; Square’s 2023 outage is one public example, although it is not an OpsReplay test case.</a:t>
+              <a:t>The offline alert only shows the last known state. Here are two power readings before the device goes offline. We need the sequence, but events being close in time does not prove a cause. That is the investigation problem this prototype addresses.</a:t>
             </a:r>
           </a:p>
           <a:p/>
@@ -630,13 +630,13 @@
           </a:p>
           <a:p>
             <a:r>
-              <a:t>Investigation requires reading device records and software activity. When those records are separate, a person has to reconstruct the sequence. The GitHub activity labels show record types the adapter can read; they are not evidence that a commit caused the offline event. As real-world context, Square reported a September 2023 outage affecting payment services for sellers [S5]. That illustrates operational impact. OpsReplay was not tested on that incident, and I do not claim fragmented records caused Square’s outage.</a:t>
+              <a:t>Power readings come from the original simulator fixture. The sequence is a fact about the simulated input; causation is unconfirmed.</a:t>
             </a:r>
           </a:p>
           <a:p/>
           <a:p>
             <a:r>
-              <a:t>Sources: S2: https://docs.pagerduty.com/ai-automation/aiops/recent-changes | S3: https://www.datadoghq.com/blog/bits-ai-sre/ | S5: https://developer.squareup.com/blog/incident-summary-2023-09-07/</a:t>
+              <a:t>Sources: S2: https://docs.pagerduty.com/ai-automation/aiops/recent-changes | S3: https://www.datadoghq.com/blog/bits-ai-sre/</a:t>
             </a:r>
           </a:p>
         </p:txBody>
@@ -706,7 +706,7 @@
           <a:lstStyle/>
           <a:p>
             <a:r>
-              <a:t>3. Existing approaches</a:t>
+              <a:t>3. Useful approaches already exist.</a:t>
             </a:r>
           </a:p>
           <a:p/>
@@ -717,7 +717,7 @@
           </a:p>
           <a:p>
             <a:r>
-              <a:t>Useful approaches already exist. We can review records manually. PagerDuty Recent Changes and Datadog Bits Investigation also help with incident context. My experiment is a small workflow bringing device and software evidence together. I have not benchmarked it against those products.</a:t>
+              <a:t>Records can be reviewed manually. PagerDuty adds recent-change context; Datadog offers AI-assisted investigation. OpsReplay explores a small workflow to replay device events and inspect the evidence behind an AI response. There is no competitive benchmark.</a:t>
             </a:r>
           </a:p>
           <a:p/>
@@ -728,13 +728,13 @@
           </a:p>
           <a:p>
             <a:r>
-              <a:t>Manual investigation remains useful: open each source, read the records and reconstruct the sequence. PagerDuty Recent Changes puts changes into incident context [S2]. Datadog Bits Investigation describes AI-assisted investigation with operational context [S3]. The category already exists. My experiment is a small workflow for device and software evidence with visible provenance and limits. This is a functional comparison based on vendor documentation. I have not run a competitive benchmark, compared pricing, or demonstrated superiority.</a:t>
+              <a:t>The comparison uses vendor documentation [S2, S3], not hands-on tests, pricing analysis or evidence of superiority.</a:t>
             </a:r>
           </a:p>
           <a:p/>
           <a:p>
             <a:r>
-              <a:t>Sources: S2: https://docs.pagerduty.com/ai-automation/aiops/recent-changes | S3: https://www.datadoghq.com/blog/bits-ai-sre/ | S5: https://developer.squareup.com/blog/incident-summary-2023-09-07/</a:t>
+              <a:t>Sources: S2: https://docs.pagerduty.com/ai-automation/aiops/recent-changes | S3: https://www.datadoghq.com/blog/bits-ai-sre/</a:t>
             </a:r>
           </a:p>
         </p:txBody>
@@ -804,7 +804,7 @@
           <a:lstStyle/>
           <a:p>
             <a:r>
-              <a:t>4. Explain the OpsReplay flow</a:t>
+              <a:t>4. OpsReplay turns events into an investigation.</a:t>
             </a:r>
           </a:p>
           <a:p/>
@@ -815,7 +815,7 @@
           </a:p>
           <a:p>
             <a:r>
-              <a:t>OpsReplay brings events into a Unified Timeline. A user selects Source and Severity, then investigates with Gemini. The result separates Observed facts from Hypotheses and links back through Evidence chips. AI helps with review; the operator makes the decision.</a:t>
+              <a:t>The verified path sends simulated IoT events into a Unified Timeline, filters them by Source and Severity, and investigates with Gemini. The response contains facts, hypotheses and Evidence chips. A GitHub adapter also exists, but software-to-device mapping is not implemented. GitHub does not explain this incident.</a:t>
             </a:r>
           </a:p>
           <a:p/>
@@ -826,13 +826,13 @@
           </a:p>
           <a:p>
             <a:r>
-              <a:t>OpsReplay brings SIMULATED IoT and public GitHub activity into a Unified Timeline. The user selects Source and Severity, then uses Investigate with AI on the displayed events. Gemini produces Observed facts and Hypotheses (unconfirmed), with Evidence chips referencing events. The server validates the output shape and evidence IDs. Temporal proximity and valid IDs do not establish causation; the operator still reviews the evidence. Derived timeline severity from anomaly rules also differs from the original event severity submitted to AI.</a:t>
+              <a:t>GitHub reads public repository activity without device/deployment dependency mapping. It remains implemented in the app. This diagram shows the verified IoT subset and does not claim a new adapter is active.</a:t>
             </a:r>
           </a:p>
           <a:p/>
           <a:p>
             <a:r>
-              <a:t>Sources: S2: https://docs.pagerduty.com/ai-automation/aiops/recent-changes | S3: https://www.datadoghq.com/blog/bits-ai-sre/ | S5: https://developer.squareup.com/blog/incident-summary-2023-09-07/</a:t>
+              <a:t>Sources: S2: https://docs.pagerduty.com/ai-automation/aiops/recent-changes | S3: https://www.datadoghq.com/blog/bits-ai-sre/</a:t>
             </a:r>
           </a:p>
         </p:txBody>
@@ -902,7 +902,7 @@
           <a:lstStyle/>
           <a:p>
             <a:r>
-              <a:t>5. What I implemented</a:t>
+              <a:t>5. What the prototype implements.</a:t>
             </a:r>
           </a:p>
           <a:p/>
@@ -913,7 +913,7 @@
           </a:p>
           <a:p>
             <a:r>
-              <a:t>For this solo hackathon project, I built six parts: simulator, GitHub adapter, timeline, Gemini adapter, validation and quota. Separate modules give data-source and model changes a clear place to happen. The device data is still simulated.</a:t>
+              <a:t>The prototype implements a simulator, GitHub adapter, timeline, Gemini adapter, validation and quota. Separate modules give new integrations a clear place to happen. GitHub is an additional capability, not a required explanation for every IoT scenario.</a:t>
             </a:r>
           </a:p>
           <a:p/>
@@ -924,13 +924,13 @@
           </a:p>
           <a:p>
             <a:r>
-              <a:t>I built the simulator, public GitHub adapter, timeline and filters, Gemini adapter, output validation, feature gate, and Redis quota. Source adapters separate data acquisition from a shared event format. The Gemini adapter separates provider calls from the view. These boundaries provide places to change data sources or model configuration; a new integration still needs implementation and testing. There is no physical-device adapter, application user account, persistent incident archive, multi-site inventory, or automatic remediation. Protected Preview uses Vercel deployment protection, not application authentication.</a:t>
+              <a:t>The schema currently allows simulator, shelly and github providers, with powerW, voltageV, currentA and energyWh metrics. A shelly enum is not a physical adapter. A new public API requires implementation, contracts, provenance, validation, error handling and tests, not just a changed URL.</a:t>
             </a:r>
           </a:p>
           <a:p/>
           <a:p>
             <a:r>
-              <a:t>Sources: S2: https://docs.pagerduty.com/ai-automation/aiops/recent-changes | S3: https://www.datadoghq.com/blog/bits-ai-sre/ | S5: https://developer.squareup.com/blog/incident-summary-2023-09-07/</a:t>
+              <a:t>Sources: S2: https://docs.pagerduty.com/ai-automation/aiops/recent-changes | S3: https://www.datadoghq.com/blog/bits-ai-sre/</a:t>
             </a:r>
           </a:p>
         </p:txBody>
@@ -1000,7 +1000,7 @@
           <a:lstStyle/>
           <a:p>
             <a:r>
-              <a:t>6. The bounded demo that was actually verified</a:t>
+              <a:t>6. Demo: replay one device going offline.</a:t>
             </a:r>
           </a:p>
           <a:p/>
@@ -1011,7 +1011,7 @@
           </a:p>
           <a:p>
             <a:r>
-              <a:t>The successful verified scenario contains three events from one device: 1850 watts, 1720 watts, then offline. This request used simulated IoT only, with no GitHub events. I am showing saved evidence so the demo needs no additional AI request.</a:t>
+              <a:t>The verified demo contains three simulated events: 1850 watts, 1720 watts, then offline. It uses Source IoT, Severity Critical and Demo Time Alignment OFF. There are no GitHub events in this request. This presentation uses saved evidence.</a:t>
             </a:r>
           </a:p>
           <a:p/>
@@ -1022,13 +1022,13 @@
           </a:p>
           <a:p>
             <a:r>
-              <a:t>Use saved evidence; do not submit another Investigate with AI request. The recorded successful test used Source IoT, Severity Critical and Demo Time Alignment OFF. Its three SIMULATED events from sim-plug-01 are 1850 W / 230 V at 09:01:45 UTC, 1720 W / 230 V at 09:01:50 UTC, then offline at 09:03:00 UTC; the fixture date is 1 January 2025. That AI request contained zero GitHub events. Public GitHub integration is implemented separately; a successful mixed-source AI request has not been demonstrated. Original power-event severity is info; the Critical filter uses derived timeline severity.</a:t>
+              <a:t>Event IDs are sim-0021, sim-0022 and sim-0036, at 09:01:45, 09:01:50 and 09:03:00 UTC. Fixture date: 1 January 2025; device: sim-plug-01; 230 V on both readings. The Critical filter uses derived timeline severity; original power-event severity is info. Do not make another AI request.</a:t>
             </a:r>
           </a:p>
           <a:p/>
           <a:p>
             <a:r>
-              <a:t>Sources: S2: https://docs.pagerduty.com/ai-automation/aiops/recent-changes | S3: https://www.datadoghq.com/blog/bits-ai-sre/ | S5: https://developer.squareup.com/blog/incident-summary-2023-09-07/</a:t>
+              <a:t>Sources: S2: https://docs.pagerduty.com/ai-automation/aiops/recent-changes | S3: https://www.datadoghq.com/blog/bits-ai-sre/</a:t>
             </a:r>
           </a:p>
         </p:txBody>
@@ -1098,7 +1098,7 @@
           <a:lstStyle/>
           <a:p>
             <a:r>
-              <a:t>7. Describe the result precisely</a:t>
+              <a:t>7. The saved AI result is inspectable.</a:t>
             </a:r>
           </a:p>
           <a:p/>
@@ -1109,7 +1109,7 @@
           </a:p>
           <a:p>
             <a:r>
-              <a:t>This is the original result. AI gives facts and a possible device or connection issue, marked low confidence. The cause remains unconfirmed. Evidence IDs were checked against the input. The 1.623-second value measures the provider stage for one request, not an application benchmark.</a:t>
+              <a:t>The original result contains facts and a possible device or connection issue, with low confidence. The root cause remains unconfirmed. Evidence IDs were checked against the input. The 1.623-second value measures the provider stage for one request, not an application benchmark.</a:t>
             </a:r>
           </a:p>
           <a:p/>
@@ -1120,13 +1120,13 @@
           </a:p>
           <a:p>
             <a:r>
-              <a:t>The original screenshot shows a gemini-3.5-flash-lite response generated on 28 October 2026 at 01:11:40 UTC. It includes Observed facts and Hypotheses (unconfirmed), including Device failure or loss of connectivity with low confidence and not a confirmed root cause. The provider-adapter log records HTTP 200, one attempt, three events and durationMs 1623. The 1.623 s value measures the provider stage for one request, not full browser latency, an average, or a competitive benchmark. Evidence IDs were checked against the input; that does not prove every interpretation correct. Only the visible screenshot content was reviewed. It does not directly demonstrate Redis lease release.</a:t>
+              <a:t>The gemini-3.5-flash-lite response was generated on 28 October 2026 at 01:11:40 UTC. Provider-stage log: HTTP 200, attempts 1, eventCount 3, durationMs 1623. Evidence-ID membership is not semantic truth validation. Only visible screenshot content was reviewed; it does not directly demonstrate Redis release.</a:t>
             </a:r>
           </a:p>
           <a:p/>
           <a:p>
             <a:r>
-              <a:t>Sources: S2: https://docs.pagerduty.com/ai-automation/aiops/recent-changes | S3: https://www.datadoghq.com/blog/bits-ai-sre/ | S5: https://developer.squareup.com/blog/incident-summary-2023-09-07/</a:t>
+              <a:t>Sources: S2: https://docs.pagerduty.com/ai-automation/aiops/recent-changes | S3: https://www.datadoghq.com/blog/bits-ai-sre/</a:t>
             </a:r>
           </a:p>
         </p:txBody>
@@ -1196,7 +1196,7 @@
           <a:lstStyle/>
           <a:p>
             <a:r>
-              <a:t>8. Limits and access</a:t>
+              <a:t>8. A prototype with visible boundaries.</a:t>
             </a:r>
           </a:p>
           <a:p/>
@@ -1207,7 +1207,7 @@
           </a:p>
           <a:p>
             <a:r>
-              <a:t>The verified path is a bounded prototype in protected Preview. Real hardware, mixed-source evaluation and controls for public AI access remain future work. Evidence references make the response inspectable; they do not establish the root cause.</a:t>
+              <a:t>The verified path is simulated IoT and one successful AI request in protected Preview. Physical hardware and mapped external context remain future work. Broader public AI access also needs additional access and cost controls.</a:t>
             </a:r>
           </a:p>
           <a:p/>
@@ -1218,13 +1218,13 @@
           </a:p>
           <a:p>
             <a:r>
-              <a:t>This is a working, bounded investigation prototype, not an operations-ready product. The successful live AI test was in protected Preview. Public Production AI remains OFF. Broader access needs work on access boundaries, forwarded-IP trust, negative quota/outage/release verification, and wider evaluation cases. There is no measured time saving, ROI, root-cause accuracy, or customer-scale reliability result. Keep three labels explicit: SIMULATED, unconfirmed and prototype.</a:t>
+              <a:t>Public Production AI remains OFF. Application accounts, persistent incident archives and automatic remediation are not implemented. No customer reliability or ROI is measured. Protected Preview uses deployment protection, not application authentication.</a:t>
             </a:r>
           </a:p>
           <a:p/>
           <a:p>
             <a:r>
-              <a:t>Sources: S2: https://docs.pagerduty.com/ai-automation/aiops/recent-changes | S3: https://www.datadoghq.com/blog/bits-ai-sre/ | S5: https://developer.squareup.com/blog/incident-summary-2023-09-07/</a:t>
+              <a:t>Sources: S2: https://docs.pagerduty.com/ai-automation/aiops/recent-changes | S3: https://www.datadoghq.com/blog/bits-ai-sre/</a:t>
             </a:r>
           </a:p>
         </p:txBody>
@@ -1294,7 +1294,7 @@
           <a:lstStyle/>
           <a:p>
             <a:r>
-              <a:t>9. Next steps and the role of 3D</a:t>
+              <a:t>9. Next: connect the right operational context.</a:t>
             </a:r>
           </a:p>
           <a:p/>
@@ -1305,7 +1305,7 @@
           </a:p>
           <a:p>
             <a:r>
-              <a:t>Next, connect real data and evaluate replay cases with expected results. An optional 3D view could later help locate devices and inspect their status. The purpose stays simple: reconstruct the sequence, check the evidence, then decide what to do.</a:t>
+              <a:t>Next choose context that fits the incident. For an offline device, cloud-service status can help if the device depends on that service. Implement the adapter and dependency mapping, then evaluate replay cases. Real hardware and optional 3D can follow when useful.</a:t>
             </a:r>
           </a:p>
           <a:p/>
@@ -1316,13 +1316,13 @@
           </a:p>
           <a:p>
             <a:r>
-              <a:t>First connect one real data source through a hardware adapter and test the event contract. Then create replay cases with expected facts and evidence for consistent evaluation. An optional 3D view could show device location and status if it helps users investigate. That is a future direction, not an implemented application feature or digital twin. Close with: OpsReplay helps understand what happened before guessing why.</a:t>
+              <a:t>Particle Status API is the researched recommendation for an offline scenario, conditional on device-to-service/component mapping. The current simulator has no Particle dependency. Provider-reported status does not prove a device or local-network failure. ThingSpeak is better for actual IoT telemetry; Open-Meteo fits cooling/energy scenarios with suitable sensors and matching time/location. No new adapter is implemented in this documentation revision.</a:t>
             </a:r>
           </a:p>
           <a:p/>
           <a:p>
             <a:r>
-              <a:t>Sources: S2: https://docs.pagerduty.com/ai-automation/aiops/recent-changes | S3: https://www.datadoghq.com/blog/bits-ai-sre/ | S5: https://developer.squareup.com/blog/incident-summary-2023-09-07/</a:t>
+              <a:t>Sources: S2: https://docs.pagerduty.com/ai-automation/aiops/recent-changes | S3: https://www.datadoghq.com/blog/bits-ai-sre/</a:t>
             </a:r>
           </a:p>
         </p:txBody>
@@ -4454,104 +4454,14 @@
               </a:defRPr>
             </a:pPr>
             <a:r>
-              <a:t>OPSREPLAY / HACKATHON PROTOTYPE</a:t>
-            </a:r>
-          </a:p>
-        </p:txBody>
-      </p:sp>
-      <p:sp>
-        <p:nvSpPr>
-          <p:cNvPr id="5" name="Rounded Rectangle 4"/>
-          <p:cNvSpPr/>
-          <p:nvPr/>
-        </p:nvSpPr>
-        <p:spPr>
-          <a:xfrm>
-            <a:off x="9982200" y="327660"/>
-            <a:ext cx="1714500" cy="335280"/>
-          </a:xfrm>
-          <a:prstGeom prst="roundRect">
-            <a:avLst>
-              <a:gd name="adj" fmla="val 25000"/>
-            </a:avLst>
-          </a:prstGeom>
-          <a:solidFill>
-            <a:srgbClr val="14213B"/>
-          </a:solidFill>
-          <a:ln>
-            <a:noFill/>
-          </a:ln>
-        </p:spPr>
-        <p:style>
-          <a:lnRef idx="1">
-            <a:schemeClr val="accent1"/>
-          </a:lnRef>
-          <a:fillRef idx="3">
-            <a:schemeClr val="accent1"/>
-          </a:fillRef>
-          <a:effectRef idx="2">
-            <a:schemeClr val="accent1"/>
-          </a:effectRef>
-          <a:fontRef idx="minor">
-            <a:schemeClr val="lt1"/>
-          </a:fontRef>
-        </p:style>
-        <p:txBody>
-          <a:bodyPr rtlCol="0" anchor="ctr"/>
-          <a:lstStyle/>
-          <a:p>
-            <a:pPr algn="ctr"/>
-          </a:p>
-        </p:txBody>
-      </p:sp>
-      <p:sp>
-        <p:nvSpPr>
-          <p:cNvPr id="6" name="TextBox 5"/>
-          <p:cNvSpPr txBox="1"/>
-          <p:nvPr/>
-        </p:nvSpPr>
-        <p:spPr>
-          <a:xfrm>
-            <a:off x="10119360" y="388620"/>
-            <a:ext cx="1539240" cy="245745"/>
-          </a:xfrm>
-          <a:prstGeom prst="rect">
-            <a:avLst/>
-          </a:prstGeom>
-          <a:noFill/>
-        </p:spPr>
-        <p:txBody>
-          <a:bodyPr wrap="none" lIns="0" rIns="0" tIns="0" bIns="0">
-            <a:spAutoFit/>
-          </a:bodyPr>
-          <a:lstStyle/>
-          <a:p>
-            <a:pPr>
-              <a:lnSpc>
-                <a:spcPts val="1575"/>
-              </a:lnSpc>
-              <a:spcBef>
-                <a:spcPts val="0"/>
-              </a:spcBef>
-              <a:spcAft>
-                <a:spcPts val="0"/>
-              </a:spcAft>
-              <a:defRPr sz="1260" b="1">
-                <a:solidFill>
-                  <a:srgbClr val="FFFFFF"/>
-                </a:solidFill>
-                <a:latin typeface="DejaVu Sans"/>
-              </a:defRPr>
-            </a:pPr>
-            <a:r>
-              <a:t>SOLO PROJECT</a:t>
-            </a:r>
-          </a:p>
-        </p:txBody>
-      </p:sp>
-      <p:sp>
-        <p:nvSpPr>
-          <p:cNvPr id="7" name="TextBox 6"/>
+              <a:t>OPSREPLAY / INCIDENT REPLAY</a:t>
+            </a:r>
+          </a:p>
+        </p:txBody>
+      </p:sp>
+      <p:sp>
+        <p:nvSpPr>
+          <p:cNvPr id="5" name="TextBox 4"/>
           <p:cNvSpPr txBox="1"/>
           <p:nvPr/>
         </p:nvSpPr>
@@ -4596,7 +4506,7 @@
       </p:sp>
       <p:sp>
         <p:nvSpPr>
-          <p:cNvPr id="8" name="TextBox 7"/>
+          <p:cNvPr id="6" name="TextBox 5"/>
           <p:cNvSpPr txBox="1"/>
           <p:nvPr/>
         </p:nvSpPr>
@@ -4641,7 +4551,7 @@
       </p:sp>
       <p:cxnSp>
         <p:nvCxnSpPr>
-          <p:cNvPr id="9" name="Connector 8"/>
+          <p:cNvPr id="7" name="Connector 6"/>
           <p:cNvCxnSpPr/>
           <p:nvPr/>
         </p:nvCxnSpPr>
@@ -4676,7 +4586,7 @@
       </p:cxnSp>
       <p:sp>
         <p:nvSpPr>
-          <p:cNvPr id="10" name="TextBox 9"/>
+          <p:cNvPr id="8" name="TextBox 7"/>
           <p:cNvSpPr txBox="1"/>
           <p:nvPr/>
         </p:nvSpPr>
@@ -4714,14 +4624,14 @@
               </a:defRPr>
             </a:pPr>
             <a:r>
-              <a:t>SIMULATED IoT · Public GitHub API · Gemini</a:t>
-            </a:r>
-          </a:p>
-        </p:txBody>
-      </p:sp>
-      <p:sp>
-        <p:nvSpPr>
-          <p:cNvPr id="11" name="TextBox 10"/>
+              <a:t>SIMULATED IoT · Replay · Evidence</a:t>
+            </a:r>
+          </a:p>
+        </p:txBody>
+      </p:sp>
+      <p:sp>
+        <p:nvSpPr>
+          <p:cNvPr id="9" name="TextBox 8"/>
           <p:cNvSpPr txBox="1"/>
           <p:nvPr/>
         </p:nvSpPr>
@@ -4766,7 +4676,7 @@
       </p:sp>
       <p:sp>
         <p:nvSpPr>
-          <p:cNvPr id="12" name="Rounded Rectangle 11"/>
+          <p:cNvPr id="10" name="Rounded Rectangle 9"/>
           <p:cNvSpPr/>
           <p:nvPr/>
         </p:nvSpPr>
@@ -4811,7 +4721,7 @@
       </p:sp>
       <p:sp>
         <p:nvSpPr>
-          <p:cNvPr id="13" name="Freeform 12"/>
+          <p:cNvPr id="11" name="Freeform 10"/>
           <p:cNvSpPr/>
           <p:nvPr/>
         </p:nvSpPr>
@@ -4875,7 +4785,7 @@
       </p:sp>
       <p:sp>
         <p:nvSpPr>
-          <p:cNvPr id="14" name="Freeform 13"/>
+          <p:cNvPr id="12" name="Freeform 11"/>
           <p:cNvSpPr/>
           <p:nvPr/>
         </p:nvSpPr>
@@ -4939,7 +4849,7 @@
       </p:sp>
       <p:sp>
         <p:nvSpPr>
-          <p:cNvPr id="15" name="Freeform 14"/>
+          <p:cNvPr id="13" name="Freeform 12"/>
           <p:cNvSpPr/>
           <p:nvPr/>
         </p:nvSpPr>
@@ -5003,7 +4913,7 @@
       </p:sp>
       <p:sp>
         <p:nvSpPr>
-          <p:cNvPr id="16" name="Freeform 15"/>
+          <p:cNvPr id="14" name="Freeform 13"/>
           <p:cNvSpPr/>
           <p:nvPr/>
         </p:nvSpPr>
@@ -5067,7 +4977,7 @@
       </p:sp>
       <p:sp>
         <p:nvSpPr>
-          <p:cNvPr id="17" name="Freeform 16"/>
+          <p:cNvPr id="15" name="Freeform 14"/>
           <p:cNvSpPr/>
           <p:nvPr/>
         </p:nvSpPr>
@@ -5131,7 +5041,7 @@
       </p:sp>
       <p:sp>
         <p:nvSpPr>
-          <p:cNvPr id="18" name="Freeform 17"/>
+          <p:cNvPr id="16" name="Freeform 15"/>
           <p:cNvSpPr/>
           <p:nvPr/>
         </p:nvSpPr>
@@ -5195,7 +5105,7 @@
       </p:sp>
       <p:sp>
         <p:nvSpPr>
-          <p:cNvPr id="19" name="Freeform 18"/>
+          <p:cNvPr id="17" name="Freeform 16"/>
           <p:cNvSpPr/>
           <p:nvPr/>
         </p:nvSpPr>
@@ -5259,7 +5169,7 @@
       </p:sp>
       <p:sp>
         <p:nvSpPr>
-          <p:cNvPr id="20" name="Freeform 19"/>
+          <p:cNvPr id="18" name="Freeform 17"/>
           <p:cNvSpPr/>
           <p:nvPr/>
         </p:nvSpPr>
@@ -5323,7 +5233,7 @@
       </p:sp>
       <p:sp>
         <p:nvSpPr>
-          <p:cNvPr id="21" name="Freeform 20"/>
+          <p:cNvPr id="19" name="Freeform 18"/>
           <p:cNvSpPr/>
           <p:nvPr/>
         </p:nvSpPr>
@@ -5387,7 +5297,7 @@
       </p:sp>
       <p:sp>
         <p:nvSpPr>
-          <p:cNvPr id="22" name="Freeform 21"/>
+          <p:cNvPr id="20" name="Freeform 19"/>
           <p:cNvSpPr/>
           <p:nvPr/>
         </p:nvSpPr>
@@ -5451,7 +5361,7 @@
       </p:sp>
       <p:sp>
         <p:nvSpPr>
-          <p:cNvPr id="23" name="Freeform 22"/>
+          <p:cNvPr id="21" name="Freeform 20"/>
           <p:cNvSpPr/>
           <p:nvPr/>
         </p:nvSpPr>
@@ -5515,7 +5425,7 @@
       </p:sp>
       <p:sp>
         <p:nvSpPr>
-          <p:cNvPr id="24" name="Freeform 23"/>
+          <p:cNvPr id="22" name="Freeform 21"/>
           <p:cNvSpPr/>
           <p:nvPr/>
         </p:nvSpPr>
@@ -5579,7 +5489,7 @@
       </p:sp>
       <p:sp>
         <p:nvSpPr>
-          <p:cNvPr id="25" name="Freeform 24"/>
+          <p:cNvPr id="23" name="Freeform 22"/>
           <p:cNvSpPr/>
           <p:nvPr/>
         </p:nvSpPr>
@@ -5643,7 +5553,7 @@
       </p:sp>
       <p:sp>
         <p:nvSpPr>
-          <p:cNvPr id="26" name="Rounded Rectangle 25"/>
+          <p:cNvPr id="24" name="Rounded Rectangle 23"/>
           <p:cNvSpPr/>
           <p:nvPr/>
         </p:nvSpPr>
@@ -5688,7 +5598,7 @@
       </p:sp>
       <p:sp>
         <p:nvSpPr>
-          <p:cNvPr id="27" name="Oval 26"/>
+          <p:cNvPr id="25" name="Oval 24"/>
           <p:cNvSpPr/>
           <p:nvPr/>
         </p:nvSpPr>
@@ -5731,7 +5641,7 @@
       </p:sp>
       <p:cxnSp>
         <p:nvCxnSpPr>
-          <p:cNvPr id="28" name="Connector 27"/>
+          <p:cNvPr id="26" name="Connector 25"/>
           <p:cNvCxnSpPr/>
           <p:nvPr/>
         </p:nvCxnSpPr>
@@ -5766,7 +5676,7 @@
       </p:cxnSp>
       <p:sp>
         <p:nvSpPr>
-          <p:cNvPr id="29" name="Rounded Rectangle 28"/>
+          <p:cNvPr id="27" name="Rounded Rectangle 26"/>
           <p:cNvSpPr/>
           <p:nvPr/>
         </p:nvSpPr>
@@ -5811,7 +5721,7 @@
       </p:sp>
       <p:sp>
         <p:nvSpPr>
-          <p:cNvPr id="30" name="Oval 29"/>
+          <p:cNvPr id="28" name="Oval 27"/>
           <p:cNvSpPr/>
           <p:nvPr/>
         </p:nvSpPr>
@@ -5854,7 +5764,7 @@
       </p:sp>
       <p:sp>
         <p:nvSpPr>
-          <p:cNvPr id="31" name="Rounded Rectangle 30"/>
+          <p:cNvPr id="29" name="Rounded Rectangle 28"/>
           <p:cNvSpPr/>
           <p:nvPr/>
         </p:nvSpPr>
@@ -5899,7 +5809,7 @@
       </p:sp>
       <p:sp>
         <p:nvSpPr>
-          <p:cNvPr id="32" name="TextBox 31"/>
+          <p:cNvPr id="30" name="TextBox 29"/>
           <p:cNvSpPr txBox="1"/>
           <p:nvPr/>
         </p:nvSpPr>
@@ -5944,7 +5854,7 @@
       </p:sp>
       <p:cxnSp>
         <p:nvCxnSpPr>
-          <p:cNvPr id="33" name="Connector 32"/>
+          <p:cNvPr id="31" name="Connector 30"/>
           <p:cNvCxnSpPr/>
           <p:nvPr/>
         </p:nvCxnSpPr>
@@ -5979,7 +5889,7 @@
       </p:cxnSp>
       <p:sp>
         <p:nvSpPr>
-          <p:cNvPr id="34" name="Rounded Rectangle 33"/>
+          <p:cNvPr id="32" name="Rounded Rectangle 31"/>
           <p:cNvSpPr/>
           <p:nvPr/>
         </p:nvSpPr>
@@ -6024,7 +5934,7 @@
       </p:sp>
       <p:sp>
         <p:nvSpPr>
-          <p:cNvPr id="35" name="TextBox 34"/>
+          <p:cNvPr id="33" name="TextBox 32"/>
           <p:cNvSpPr txBox="1"/>
           <p:nvPr/>
         </p:nvSpPr>
@@ -6069,7 +5979,7 @@
       </p:sp>
       <p:sp>
         <p:nvSpPr>
-          <p:cNvPr id="36" name="Oval 35"/>
+          <p:cNvPr id="34" name="Oval 33"/>
           <p:cNvSpPr/>
           <p:nvPr/>
         </p:nvSpPr>
@@ -6112,7 +6022,7 @@
       </p:sp>
       <p:sp>
         <p:nvSpPr>
-          <p:cNvPr id="37" name="TextBox 36"/>
+          <p:cNvPr id="35" name="TextBox 34"/>
           <p:cNvSpPr txBox="1"/>
           <p:nvPr/>
         </p:nvSpPr>
@@ -6157,7 +6067,7 @@
       </p:sp>
       <p:sp>
         <p:nvSpPr>
-          <p:cNvPr id="38" name="Oval 37"/>
+          <p:cNvPr id="36" name="Oval 35"/>
           <p:cNvSpPr/>
           <p:nvPr/>
         </p:nvSpPr>
@@ -6200,7 +6110,7 @@
       </p:sp>
       <p:sp>
         <p:nvSpPr>
-          <p:cNvPr id="39" name="TextBox 38"/>
+          <p:cNvPr id="37" name="TextBox 36"/>
           <p:cNvSpPr txBox="1"/>
           <p:nvPr/>
         </p:nvSpPr>
@@ -6245,7 +6155,7 @@
       </p:sp>
       <p:sp>
         <p:nvSpPr>
-          <p:cNvPr id="40" name="Oval 39"/>
+          <p:cNvPr id="38" name="Oval 37"/>
           <p:cNvSpPr/>
           <p:nvPr/>
         </p:nvSpPr>
@@ -6288,7 +6198,7 @@
       </p:sp>
       <p:sp>
         <p:nvSpPr>
-          <p:cNvPr id="41" name="TextBox 40"/>
+          <p:cNvPr id="39" name="TextBox 38"/>
           <p:cNvSpPr txBox="1"/>
           <p:nvPr/>
         </p:nvSpPr>
@@ -6326,7 +6236,7 @@
               </a:defRPr>
             </a:pPr>
             <a:r>
-              <a:t>Software?</a:t>
+              <a:t>Device?</a:t>
             </a:r>
           </a:p>
         </p:txBody>
@@ -6475,104 +6385,14 @@
               </a:defRPr>
             </a:pPr>
             <a:r>
-              <a:t>OPSREPLAY / HACKATHON PROTOTYPE</a:t>
-            </a:r>
-          </a:p>
-        </p:txBody>
-      </p:sp>
-      <p:sp>
-        <p:nvSpPr>
-          <p:cNvPr id="5" name="Rounded Rectangle 4"/>
-          <p:cNvSpPr/>
-          <p:nvPr/>
-        </p:nvSpPr>
-        <p:spPr>
-          <a:xfrm>
-            <a:off x="9982200" y="327660"/>
-            <a:ext cx="1714500" cy="335280"/>
-          </a:xfrm>
-          <a:prstGeom prst="roundRect">
-            <a:avLst>
-              <a:gd name="adj" fmla="val 25000"/>
-            </a:avLst>
-          </a:prstGeom>
-          <a:solidFill>
-            <a:srgbClr val="14213B"/>
-          </a:solidFill>
-          <a:ln>
-            <a:noFill/>
-          </a:ln>
-        </p:spPr>
-        <p:style>
-          <a:lnRef idx="1">
-            <a:schemeClr val="accent1"/>
-          </a:lnRef>
-          <a:fillRef idx="3">
-            <a:schemeClr val="accent1"/>
-          </a:fillRef>
-          <a:effectRef idx="2">
-            <a:schemeClr val="accent1"/>
-          </a:effectRef>
-          <a:fontRef idx="minor">
-            <a:schemeClr val="lt1"/>
-          </a:fontRef>
-        </p:style>
-        <p:txBody>
-          <a:bodyPr rtlCol="0" anchor="ctr"/>
-          <a:lstStyle/>
-          <a:p>
-            <a:pPr algn="ctr"/>
-          </a:p>
-        </p:txBody>
-      </p:sp>
-      <p:sp>
-        <p:nvSpPr>
-          <p:cNvPr id="6" name="TextBox 5"/>
-          <p:cNvSpPr txBox="1"/>
-          <p:nvPr/>
-        </p:nvSpPr>
-        <p:spPr>
-          <a:xfrm>
-            <a:off x="10119360" y="388620"/>
-            <a:ext cx="1539240" cy="245745"/>
-          </a:xfrm>
-          <a:prstGeom prst="rect">
-            <a:avLst/>
-          </a:prstGeom>
-          <a:noFill/>
-        </p:spPr>
-        <p:txBody>
-          <a:bodyPr wrap="none" lIns="0" rIns="0" tIns="0" bIns="0">
-            <a:spAutoFit/>
-          </a:bodyPr>
-          <a:lstStyle/>
-          <a:p>
-            <a:pPr>
-              <a:lnSpc>
-                <a:spcPts val="1575"/>
-              </a:lnSpc>
-              <a:spcBef>
-                <a:spcPts val="0"/>
-              </a:spcBef>
-              <a:spcAft>
-                <a:spcPts val="0"/>
-              </a:spcAft>
-              <a:defRPr sz="1260" b="1">
-                <a:solidFill>
-                  <a:srgbClr val="FFFFFF"/>
-                </a:solidFill>
-                <a:latin typeface="DejaVu Sans"/>
-              </a:defRPr>
-            </a:pPr>
-            <a:r>
-              <a:t>SOLO PROJECT</a:t>
-            </a:r>
-          </a:p>
-        </p:txBody>
-      </p:sp>
-      <p:sp>
-        <p:nvSpPr>
-          <p:cNvPr id="7" name="TextBox 6"/>
+              <a:t>OPSREPLAY / INCIDENT REPLAY</a:t>
+            </a:r>
+          </a:p>
+        </p:txBody>
+      </p:sp>
+      <p:sp>
+        <p:nvSpPr>
+          <p:cNvPr id="5" name="TextBox 4"/>
           <p:cNvSpPr txBox="1"/>
           <p:nvPr/>
         </p:nvSpPr>
@@ -6610,14 +6430,14 @@
               </a:defRPr>
             </a:pPr>
             <a:r>
-              <a:t>Two sources. One missing story.</a:t>
-            </a:r>
-          </a:p>
-        </p:txBody>
-      </p:sp>
-      <p:sp>
-        <p:nvSpPr>
-          <p:cNvPr id="8" name="TextBox 7"/>
+              <a:t>The offline alert is only the last clue.</a:t>
+            </a:r>
+          </a:p>
+        </p:txBody>
+      </p:sp>
+      <p:sp>
+        <p:nvSpPr>
+          <p:cNvPr id="6" name="TextBox 5"/>
           <p:cNvSpPr txBox="1"/>
           <p:nvPr/>
         </p:nvSpPr>
@@ -6655,14 +6475,14 @@
               </a:defRPr>
             </a:pPr>
             <a:r>
-              <a:t>Device records and software changes need context.</a:t>
+              <a:t>Reconstruct the sequence before deciding what to check.</a:t>
             </a:r>
           </a:p>
         </p:txBody>
       </p:sp>
       <p:cxnSp>
         <p:nvCxnSpPr>
-          <p:cNvPr id="9" name="Connector 8"/>
+          <p:cNvPr id="7" name="Connector 6"/>
           <p:cNvCxnSpPr/>
           <p:nvPr/>
         </p:nvCxnSpPr>
@@ -6697,7 +6517,7 @@
       </p:cxnSp>
       <p:sp>
         <p:nvSpPr>
-          <p:cNvPr id="10" name="TextBox 9"/>
+          <p:cNvPr id="8" name="TextBox 7"/>
           <p:cNvSpPr txBox="1"/>
           <p:nvPr/>
         </p:nvSpPr>
@@ -6735,14 +6555,14 @@
               </a:defRPr>
             </a:pPr>
             <a:r>
-              <a:t>SIMULATED IoT · Public GitHub API · Gemini</a:t>
-            </a:r>
-          </a:p>
-        </p:txBody>
-      </p:sp>
-      <p:sp>
-        <p:nvSpPr>
-          <p:cNvPr id="11" name="TextBox 10"/>
+              <a:t>SIMULATED IoT · Replay · Evidence</a:t>
+            </a:r>
+          </a:p>
+        </p:txBody>
+      </p:sp>
+      <p:sp>
+        <p:nvSpPr>
+          <p:cNvPr id="9" name="TextBox 8"/>
           <p:cNvSpPr txBox="1"/>
           <p:nvPr/>
         </p:nvSpPr>
@@ -6787,7 +6607,7 @@
       </p:sp>
       <p:sp>
         <p:nvSpPr>
-          <p:cNvPr id="12" name="Rounded Rectangle 11"/>
+          <p:cNvPr id="10" name="Rounded Rectangle 9"/>
           <p:cNvSpPr/>
           <p:nvPr/>
         </p:nvSpPr>
@@ -6830,63 +6650,16 @@
           </a:p>
         </p:txBody>
       </p:sp>
-      <p:sp>
-        <p:nvSpPr>
-          <p:cNvPr id="13" name="Rounded Rectangle 12"/>
-          <p:cNvSpPr/>
-          <p:nvPr/>
-        </p:nvSpPr>
-        <p:spPr>
-          <a:xfrm>
-            <a:off x="731520" y="2133600"/>
-            <a:ext cx="640080" cy="426720"/>
-          </a:xfrm>
-          <a:prstGeom prst="roundRect">
-            <a:avLst>
-              <a:gd name="adj" fmla="val 14285"/>
-            </a:avLst>
-          </a:prstGeom>
-          <a:solidFill>
-            <a:srgbClr val="E9E4FF"/>
-          </a:solidFill>
-          <a:ln w="22860">
-            <a:solidFill>
-              <a:srgbClr val="7051E8"/>
-            </a:solidFill>
-          </a:ln>
-        </p:spPr>
-        <p:style>
-          <a:lnRef idx="1">
-            <a:schemeClr val="accent1"/>
-          </a:lnRef>
-          <a:fillRef idx="3">
-            <a:schemeClr val="accent1"/>
-          </a:fillRef>
-          <a:effectRef idx="2">
-            <a:schemeClr val="accent1"/>
-          </a:effectRef>
-          <a:fontRef idx="minor">
-            <a:schemeClr val="lt1"/>
-          </a:fontRef>
-        </p:style>
-        <p:txBody>
-          <a:bodyPr rtlCol="0" anchor="ctr"/>
-          <a:lstStyle/>
-          <a:p>
-            <a:pPr algn="ctr"/>
-          </a:p>
-        </p:txBody>
-      </p:sp>
       <p:cxnSp>
         <p:nvCxnSpPr>
-          <p:cNvPr id="14" name="Connector 13"/>
+          <p:cNvPr id="11" name="Connector 10"/>
           <p:cNvCxnSpPr/>
           <p:nvPr/>
         </p:nvCxnSpPr>
         <p:spPr>
           <a:xfrm>
-            <a:off x="1051560" y="2560320"/>
-            <a:ext cx="0" cy="121920"/>
+            <a:off x="838200" y="2133600"/>
+            <a:ext cx="0" cy="594360"/>
           </a:xfrm>
           <a:prstGeom prst="line">
             <a:avLst/>
@@ -6912,6 +6685,127 @@
           </a:fontRef>
         </p:style>
       </p:cxnSp>
+      <p:sp>
+        <p:nvSpPr>
+          <p:cNvPr id="12" name="Oval 11"/>
+          <p:cNvSpPr/>
+          <p:nvPr/>
+        </p:nvSpPr>
+        <p:spPr>
+          <a:xfrm>
+            <a:off x="784860" y="2171700"/>
+            <a:ext cx="106680" cy="106680"/>
+          </a:xfrm>
+          <a:prstGeom prst="ellipse">
+            <a:avLst/>
+          </a:prstGeom>
+          <a:solidFill>
+            <a:srgbClr val="7051E8"/>
+          </a:solidFill>
+          <a:ln>
+            <a:noFill/>
+          </a:ln>
+        </p:spPr>
+        <p:style>
+          <a:lnRef idx="1">
+            <a:schemeClr val="accent1"/>
+          </a:lnRef>
+          <a:fillRef idx="3">
+            <a:schemeClr val="accent1"/>
+          </a:fillRef>
+          <a:effectRef idx="2">
+            <a:schemeClr val="accent1"/>
+          </a:effectRef>
+          <a:fontRef idx="minor">
+            <a:schemeClr val="lt1"/>
+          </a:fontRef>
+        </p:style>
+        <p:txBody>
+          <a:bodyPr rtlCol="0" anchor="ctr"/>
+          <a:lstStyle/>
+          <a:p>
+            <a:pPr algn="ctr"/>
+          </a:p>
+        </p:txBody>
+      </p:sp>
+      <p:cxnSp>
+        <p:nvCxnSpPr>
+          <p:cNvPr id="13" name="Connector 12"/>
+          <p:cNvCxnSpPr/>
+          <p:nvPr/>
+        </p:nvCxnSpPr>
+        <p:spPr>
+          <a:xfrm>
+            <a:off x="975360" y="2225040"/>
+            <a:ext cx="350520" cy="0"/>
+          </a:xfrm>
+          <a:prstGeom prst="line">
+            <a:avLst/>
+          </a:prstGeom>
+          <a:ln w="30480">
+            <a:solidFill>
+              <a:srgbClr val="7051E8"/>
+            </a:solidFill>
+          </a:ln>
+        </p:spPr>
+        <p:style>
+          <a:lnRef idx="2">
+            <a:schemeClr val="accent1"/>
+          </a:lnRef>
+          <a:fillRef idx="0">
+            <a:schemeClr val="accent1"/>
+          </a:fillRef>
+          <a:effectRef idx="1">
+            <a:schemeClr val="accent1"/>
+          </a:effectRef>
+          <a:fontRef idx="minor">
+            <a:schemeClr val="tx1"/>
+          </a:fontRef>
+        </p:style>
+      </p:cxnSp>
+      <p:sp>
+        <p:nvSpPr>
+          <p:cNvPr id="14" name="Oval 13"/>
+          <p:cNvSpPr/>
+          <p:nvPr/>
+        </p:nvSpPr>
+        <p:spPr>
+          <a:xfrm>
+            <a:off x="784860" y="2369820"/>
+            <a:ext cx="106680" cy="106680"/>
+          </a:xfrm>
+          <a:prstGeom prst="ellipse">
+            <a:avLst/>
+          </a:prstGeom>
+          <a:solidFill>
+            <a:srgbClr val="7051E8"/>
+          </a:solidFill>
+          <a:ln>
+            <a:noFill/>
+          </a:ln>
+        </p:spPr>
+        <p:style>
+          <a:lnRef idx="1">
+            <a:schemeClr val="accent1"/>
+          </a:lnRef>
+          <a:fillRef idx="3">
+            <a:schemeClr val="accent1"/>
+          </a:fillRef>
+          <a:effectRef idx="2">
+            <a:schemeClr val="accent1"/>
+          </a:effectRef>
+          <a:fontRef idx="minor">
+            <a:schemeClr val="lt1"/>
+          </a:fontRef>
+        </p:style>
+        <p:txBody>
+          <a:bodyPr rtlCol="0" anchor="ctr"/>
+          <a:lstStyle/>
+          <a:p>
+            <a:pPr algn="ctr"/>
+          </a:p>
+        </p:txBody>
+      </p:sp>
       <p:cxnSp>
         <p:nvCxnSpPr>
           <p:cNvPr id="15" name="Connector 14"/>
@@ -6920,8 +6814,8 @@
         </p:nvCxnSpPr>
         <p:spPr>
           <a:xfrm>
-            <a:off x="868680" y="2682240"/>
-            <a:ext cx="365760" cy="0"/>
+            <a:off x="975360" y="2423160"/>
+            <a:ext cx="350520" cy="0"/>
           </a:xfrm>
           <a:prstGeom prst="line">
             <a:avLst/>
@@ -6947,16 +6841,59 @@
           </a:fontRef>
         </p:style>
       </p:cxnSp>
+      <p:sp>
+        <p:nvSpPr>
+          <p:cNvPr id="16" name="Oval 15"/>
+          <p:cNvSpPr/>
+          <p:nvPr/>
+        </p:nvSpPr>
+        <p:spPr>
+          <a:xfrm>
+            <a:off x="784860" y="2583180"/>
+            <a:ext cx="106680" cy="106680"/>
+          </a:xfrm>
+          <a:prstGeom prst="ellipse">
+            <a:avLst/>
+          </a:prstGeom>
+          <a:solidFill>
+            <a:srgbClr val="7051E8"/>
+          </a:solidFill>
+          <a:ln>
+            <a:noFill/>
+          </a:ln>
+        </p:spPr>
+        <p:style>
+          <a:lnRef idx="1">
+            <a:schemeClr val="accent1"/>
+          </a:lnRef>
+          <a:fillRef idx="3">
+            <a:schemeClr val="accent1"/>
+          </a:fillRef>
+          <a:effectRef idx="2">
+            <a:schemeClr val="accent1"/>
+          </a:effectRef>
+          <a:fontRef idx="minor">
+            <a:schemeClr val="lt1"/>
+          </a:fontRef>
+        </p:style>
+        <p:txBody>
+          <a:bodyPr rtlCol="0" anchor="ctr"/>
+          <a:lstStyle/>
+          <a:p>
+            <a:pPr algn="ctr"/>
+          </a:p>
+        </p:txBody>
+      </p:sp>
       <p:cxnSp>
         <p:nvCxnSpPr>
-          <p:cNvPr id="16" name="Connector 15"/>
+          <p:cNvPr id="17" name="Connector 16"/>
           <p:cNvCxnSpPr/>
           <p:nvPr/>
         </p:nvCxnSpPr>
         <p:spPr>
           <a:xfrm>
-            <a:off x="876300" y="2331720"/>
-            <a:ext cx="114299" cy="0"/>
+            <a:off x="975360" y="2636520"/>
+            <a:ext cx="350520" cy="0"/>
           </a:xfrm>
           <a:prstGeom prst="line">
             <a:avLst/>
@@ -6982,114 +6919,9 @@
           </a:fontRef>
         </p:style>
       </p:cxnSp>
-      <p:cxnSp>
-        <p:nvCxnSpPr>
-          <p:cNvPr id="17" name="Connector 16"/>
-          <p:cNvCxnSpPr/>
-          <p:nvPr/>
-        </p:nvCxnSpPr>
-        <p:spPr>
-          <a:xfrm flipV="1">
-            <a:off x="990599" y="2232660"/>
-            <a:ext cx="68581" cy="99060"/>
-          </a:xfrm>
-          <a:prstGeom prst="line">
-            <a:avLst/>
-          </a:prstGeom>
-          <a:ln w="30480">
-            <a:solidFill>
-              <a:srgbClr val="7051E8"/>
-            </a:solidFill>
-          </a:ln>
-        </p:spPr>
-        <p:style>
-          <a:lnRef idx="2">
-            <a:schemeClr val="accent1"/>
-          </a:lnRef>
-          <a:fillRef idx="0">
-            <a:schemeClr val="accent1"/>
-          </a:fillRef>
-          <a:effectRef idx="1">
-            <a:schemeClr val="accent1"/>
-          </a:effectRef>
-          <a:fontRef idx="minor">
-            <a:schemeClr val="tx1"/>
-          </a:fontRef>
-        </p:style>
-      </p:cxnSp>
-      <p:cxnSp>
-        <p:nvCxnSpPr>
-          <p:cNvPr id="18" name="Connector 17"/>
-          <p:cNvCxnSpPr/>
-          <p:nvPr/>
-        </p:nvCxnSpPr>
-        <p:spPr>
-          <a:xfrm>
-            <a:off x="1059180" y="2232660"/>
-            <a:ext cx="83820" cy="205740"/>
-          </a:xfrm>
-          <a:prstGeom prst="line">
-            <a:avLst/>
-          </a:prstGeom>
-          <a:ln w="30480">
-            <a:solidFill>
-              <a:srgbClr val="7051E8"/>
-            </a:solidFill>
-          </a:ln>
-        </p:spPr>
-        <p:style>
-          <a:lnRef idx="2">
-            <a:schemeClr val="accent1"/>
-          </a:lnRef>
-          <a:fillRef idx="0">
-            <a:schemeClr val="accent1"/>
-          </a:fillRef>
-          <a:effectRef idx="1">
-            <a:schemeClr val="accent1"/>
-          </a:effectRef>
-          <a:fontRef idx="minor">
-            <a:schemeClr val="tx1"/>
-          </a:fontRef>
-        </p:style>
-      </p:cxnSp>
-      <p:cxnSp>
-        <p:nvCxnSpPr>
-          <p:cNvPr id="19" name="Connector 18"/>
-          <p:cNvCxnSpPr/>
-          <p:nvPr/>
-        </p:nvCxnSpPr>
-        <p:spPr>
-          <a:xfrm flipV="1">
-            <a:off x="1143000" y="2324100"/>
-            <a:ext cx="99060" cy="114300"/>
-          </a:xfrm>
-          <a:prstGeom prst="line">
-            <a:avLst/>
-          </a:prstGeom>
-          <a:ln w="30480">
-            <a:solidFill>
-              <a:srgbClr val="7051E8"/>
-            </a:solidFill>
-          </a:ln>
-        </p:spPr>
-        <p:style>
-          <a:lnRef idx="2">
-            <a:schemeClr val="accent1"/>
-          </a:lnRef>
-          <a:fillRef idx="0">
-            <a:schemeClr val="accent1"/>
-          </a:fillRef>
-          <a:effectRef idx="1">
-            <a:schemeClr val="accent1"/>
-          </a:effectRef>
-          <a:fontRef idx="minor">
-            <a:schemeClr val="tx1"/>
-          </a:fontRef>
-        </p:style>
-      </p:cxnSp>
-      <p:sp>
-        <p:nvSpPr>
-          <p:cNvPr id="20" name="TextBox 19"/>
+      <p:sp>
+        <p:nvSpPr>
+          <p:cNvPr id="18" name="TextBox 17"/>
           <p:cNvSpPr txBox="1"/>
           <p:nvPr/>
         </p:nvSpPr>
@@ -7127,14 +6959,14 @@
               </a:defRPr>
             </a:pPr>
             <a:r>
-              <a:t>Device telemetry</a:t>
-            </a:r>
-          </a:p>
-        </p:txBody>
-      </p:sp>
-      <p:sp>
-        <p:nvSpPr>
-          <p:cNvPr id="21" name="Rounded Rectangle 20"/>
+              <a:t>Before the alert</a:t>
+            </a:r>
+          </a:p>
+        </p:txBody>
+      </p:sp>
+      <p:sp>
+        <p:nvSpPr>
+          <p:cNvPr id="19" name="Rounded Rectangle 18"/>
           <p:cNvSpPr/>
           <p:nvPr/>
         </p:nvSpPr>
@@ -7179,7 +7011,7 @@
       </p:sp>
       <p:sp>
         <p:nvSpPr>
-          <p:cNvPr id="22" name="TextBox 21"/>
+          <p:cNvPr id="20" name="TextBox 19"/>
           <p:cNvSpPr txBox="1"/>
           <p:nvPr/>
         </p:nvSpPr>
@@ -7224,7 +7056,7 @@
       </p:sp>
       <p:sp>
         <p:nvSpPr>
-          <p:cNvPr id="23" name="Rounded Rectangle 22"/>
+          <p:cNvPr id="21" name="Rounded Rectangle 20"/>
           <p:cNvSpPr/>
           <p:nvPr/>
         </p:nvSpPr>
@@ -7269,7 +7101,7 @@
       </p:sp>
       <p:sp>
         <p:nvSpPr>
-          <p:cNvPr id="24" name="TextBox 23"/>
+          <p:cNvPr id="22" name="TextBox 21"/>
           <p:cNvSpPr txBox="1"/>
           <p:nvPr/>
         </p:nvSpPr>
@@ -7314,7 +7146,7 @@
       </p:sp>
       <p:sp>
         <p:nvSpPr>
-          <p:cNvPr id="25" name="Rounded Rectangle 24"/>
+          <p:cNvPr id="23" name="Rounded Rectangle 22"/>
           <p:cNvSpPr/>
           <p:nvPr/>
         </p:nvSpPr>
@@ -7359,7 +7191,7 @@
       </p:sp>
       <p:sp>
         <p:nvSpPr>
-          <p:cNvPr id="26" name="TextBox 25"/>
+          <p:cNvPr id="24" name="TextBox 23"/>
           <p:cNvSpPr txBox="1"/>
           <p:nvPr/>
         </p:nvSpPr>
@@ -7397,14 +7229,14 @@
               </a:defRPr>
             </a:pPr>
             <a:r>
-              <a:t>09:03:00 offline</a:t>
-            </a:r>
-          </a:p>
-        </p:txBody>
-      </p:sp>
-      <p:sp>
-        <p:nvSpPr>
-          <p:cNvPr id="27" name="Rounded Rectangle 26"/>
+              <a:t>Device: sim-plug-01</a:t>
+            </a:r>
+          </a:p>
+        </p:txBody>
+      </p:sp>
+      <p:sp>
+        <p:nvSpPr>
+          <p:cNvPr id="25" name="Rounded Rectangle 24"/>
           <p:cNvSpPr/>
           <p:nvPr/>
         </p:nvSpPr>
@@ -7449,17 +7281,19 @@
       </p:sp>
       <p:sp>
         <p:nvSpPr>
-          <p:cNvPr id="28" name="Oval 27"/>
+          <p:cNvPr id="26" name="Rounded Rectangle 25"/>
           <p:cNvSpPr/>
           <p:nvPr/>
         </p:nvSpPr>
         <p:spPr>
           <a:xfrm>
-            <a:off x="7254240" y="2179320"/>
-            <a:ext cx="472440" cy="472440"/>
-          </a:xfrm>
-          <a:prstGeom prst="ellipse">
-            <a:avLst/>
+            <a:off x="7185660" y="2133600"/>
+            <a:ext cx="640080" cy="426720"/>
+          </a:xfrm>
+          <a:prstGeom prst="roundRect">
+            <a:avLst>
+              <a:gd name="adj" fmla="val 14285"/>
+            </a:avLst>
           </a:prstGeom>
           <a:solidFill>
             <a:srgbClr val="E9E4FF"/>
@@ -7494,14 +7328,84 @@
       </p:sp>
       <p:cxnSp>
         <p:nvCxnSpPr>
+          <p:cNvPr id="27" name="Connector 26"/>
+          <p:cNvCxnSpPr/>
+          <p:nvPr/>
+        </p:nvCxnSpPr>
+        <p:spPr>
+          <a:xfrm>
+            <a:off x="7505700" y="2560320"/>
+            <a:ext cx="0" cy="121920"/>
+          </a:xfrm>
+          <a:prstGeom prst="line">
+            <a:avLst/>
+          </a:prstGeom>
+          <a:ln w="30480">
+            <a:solidFill>
+              <a:srgbClr val="7051E8"/>
+            </a:solidFill>
+          </a:ln>
+        </p:spPr>
+        <p:style>
+          <a:lnRef idx="2">
+            <a:schemeClr val="accent1"/>
+          </a:lnRef>
+          <a:fillRef idx="0">
+            <a:schemeClr val="accent1"/>
+          </a:fillRef>
+          <a:effectRef idx="1">
+            <a:schemeClr val="accent1"/>
+          </a:effectRef>
+          <a:fontRef idx="minor">
+            <a:schemeClr val="tx1"/>
+          </a:fontRef>
+        </p:style>
+      </p:cxnSp>
+      <p:cxnSp>
+        <p:nvCxnSpPr>
+          <p:cNvPr id="28" name="Connector 27"/>
+          <p:cNvCxnSpPr/>
+          <p:nvPr/>
+        </p:nvCxnSpPr>
+        <p:spPr>
+          <a:xfrm>
+            <a:off x="7322820" y="2682240"/>
+            <a:ext cx="365760" cy="0"/>
+          </a:xfrm>
+          <a:prstGeom prst="line">
+            <a:avLst/>
+          </a:prstGeom>
+          <a:ln w="30480">
+            <a:solidFill>
+              <a:srgbClr val="7051E8"/>
+            </a:solidFill>
+          </a:ln>
+        </p:spPr>
+        <p:style>
+          <a:lnRef idx="2">
+            <a:schemeClr val="accent1"/>
+          </a:lnRef>
+          <a:fillRef idx="0">
+            <a:schemeClr val="accent1"/>
+          </a:fillRef>
+          <a:effectRef idx="1">
+            <a:schemeClr val="accent1"/>
+          </a:effectRef>
+          <a:fontRef idx="minor">
+            <a:schemeClr val="tx1"/>
+          </a:fontRef>
+        </p:style>
+      </p:cxnSp>
+      <p:cxnSp>
+        <p:nvCxnSpPr>
           <p:cNvPr id="29" name="Connector 28"/>
           <p:cNvCxnSpPr/>
           <p:nvPr/>
         </p:nvCxnSpPr>
         <p:spPr>
-          <a:xfrm flipH="1" flipV="1">
-            <a:off x="7315200" y="2133600"/>
-            <a:ext cx="22860" cy="129540"/>
+          <a:xfrm>
+            <a:off x="7330440" y="2331720"/>
+            <a:ext cx="114300" cy="0"/>
           </a:xfrm>
           <a:prstGeom prst="line">
             <a:avLst/>
@@ -7534,9 +7438,9 @@
           <p:nvPr/>
         </p:nvCxnSpPr>
         <p:spPr>
-          <a:xfrm>
-            <a:off x="7315200" y="2133600"/>
-            <a:ext cx="129540" cy="68580"/>
+          <a:xfrm flipV="1">
+            <a:off x="7444740" y="2232660"/>
+            <a:ext cx="68580" cy="99060"/>
           </a:xfrm>
           <a:prstGeom prst="line">
             <a:avLst/>
@@ -7569,9 +7473,9 @@
           <p:nvPr/>
         </p:nvCxnSpPr>
         <p:spPr>
-          <a:xfrm flipV="1">
-            <a:off x="7551420" y="2133600"/>
-            <a:ext cx="129540" cy="68580"/>
+          <a:xfrm>
+            <a:off x="7513320" y="2232660"/>
+            <a:ext cx="83820" cy="205740"/>
           </a:xfrm>
           <a:prstGeom prst="line">
             <a:avLst/>
@@ -7604,9 +7508,9 @@
           <p:nvPr/>
         </p:nvCxnSpPr>
         <p:spPr>
-          <a:xfrm flipH="1">
-            <a:off x="7658100" y="2133600"/>
-            <a:ext cx="22860" cy="129540"/>
+          <a:xfrm flipV="1">
+            <a:off x="7597140" y="2324100"/>
+            <a:ext cx="99059" cy="114300"/>
           </a:xfrm>
           <a:prstGeom prst="line">
             <a:avLst/>
@@ -7632,44 +7536,9 @@
           </a:fontRef>
         </p:style>
       </p:cxnSp>
-      <p:cxnSp>
-        <p:nvCxnSpPr>
-          <p:cNvPr id="33" name="Connector 32"/>
-          <p:cNvCxnSpPr/>
-          <p:nvPr/>
-        </p:nvCxnSpPr>
-        <p:spPr>
-          <a:xfrm>
-            <a:off x="7490460" y="2636520"/>
-            <a:ext cx="0" cy="106680"/>
-          </a:xfrm>
-          <a:prstGeom prst="line">
-            <a:avLst/>
-          </a:prstGeom>
-          <a:ln w="30480">
-            <a:solidFill>
-              <a:srgbClr val="7051E8"/>
-            </a:solidFill>
-          </a:ln>
-        </p:spPr>
-        <p:style>
-          <a:lnRef idx="2">
-            <a:schemeClr val="accent1"/>
-          </a:lnRef>
-          <a:fillRef idx="0">
-            <a:schemeClr val="accent1"/>
-          </a:fillRef>
-          <a:effectRef idx="1">
-            <a:schemeClr val="accent1"/>
-          </a:effectRef>
-          <a:fontRef idx="minor">
-            <a:schemeClr val="tx1"/>
-          </a:fontRef>
-        </p:style>
-      </p:cxnSp>
-      <p:sp>
-        <p:nvSpPr>
-          <p:cNvPr id="34" name="TextBox 33"/>
+      <p:sp>
+        <p:nvSpPr>
+          <p:cNvPr id="33" name="TextBox 32"/>
           <p:cNvSpPr txBox="1"/>
           <p:nvPr/>
         </p:nvSpPr>
@@ -7707,14 +7576,14 @@
               </a:defRPr>
             </a:pPr>
             <a:r>
-              <a:t>GitHub activity</a:t>
-            </a:r>
-          </a:p>
-        </p:txBody>
-      </p:sp>
-      <p:sp>
-        <p:nvSpPr>
-          <p:cNvPr id="35" name="Rounded Rectangle 34"/>
+              <a:t>The latest alert</a:t>
+            </a:r>
+          </a:p>
+        </p:txBody>
+      </p:sp>
+      <p:sp>
+        <p:nvSpPr>
+          <p:cNvPr id="34" name="Rounded Rectangle 33"/>
           <p:cNvSpPr/>
           <p:nvPr/>
         </p:nvSpPr>
@@ -7729,7 +7598,7 @@
             </a:avLst>
           </a:prstGeom>
           <a:solidFill>
-            <a:srgbClr val="E9E4FF"/>
+            <a:srgbClr val="FFF0D7"/>
           </a:solidFill>
           <a:ln>
             <a:noFill/>
@@ -7759,7 +7628,7 @@
       </p:sp>
       <p:sp>
         <p:nvSpPr>
-          <p:cNvPr id="36" name="TextBox 35"/>
+          <p:cNvPr id="35" name="TextBox 34"/>
           <p:cNvSpPr txBox="1"/>
           <p:nvPr/>
         </p:nvSpPr>
@@ -7797,14 +7666,14 @@
               </a:defRPr>
             </a:pPr>
             <a:r>
-              <a:t>Commit</a:t>
-            </a:r>
-          </a:p>
-        </p:txBody>
-      </p:sp>
-      <p:sp>
-        <p:nvSpPr>
-          <p:cNvPr id="37" name="Rounded Rectangle 36"/>
+              <a:t>09:03:00 offline</a:t>
+            </a:r>
+          </a:p>
+        </p:txBody>
+      </p:sp>
+      <p:sp>
+        <p:nvSpPr>
+          <p:cNvPr id="36" name="Rounded Rectangle 35"/>
           <p:cNvSpPr/>
           <p:nvPr/>
         </p:nvSpPr>
@@ -7819,7 +7688,7 @@
             </a:avLst>
           </a:prstGeom>
           <a:solidFill>
-            <a:srgbClr val="E9E4FF"/>
+            <a:srgbClr val="FFF0D7"/>
           </a:solidFill>
           <a:ln>
             <a:noFill/>
@@ -7849,7 +7718,7 @@
       </p:sp>
       <p:sp>
         <p:nvSpPr>
-          <p:cNvPr id="38" name="TextBox 37"/>
+          <p:cNvPr id="37" name="TextBox 36"/>
           <p:cNvSpPr txBox="1"/>
           <p:nvPr/>
         </p:nvSpPr>
@@ -7887,14 +7756,14 @@
               </a:defRPr>
             </a:pPr>
             <a:r>
-              <a:t>Pull request</a:t>
-            </a:r>
-          </a:p>
-        </p:txBody>
-      </p:sp>
-      <p:sp>
-        <p:nvSpPr>
-          <p:cNvPr id="39" name="Rounded Rectangle 38"/>
+              <a:t>Cause: unconfirmed</a:t>
+            </a:r>
+          </a:p>
+        </p:txBody>
+      </p:sp>
+      <p:sp>
+        <p:nvSpPr>
+          <p:cNvPr id="38" name="Rounded Rectangle 37"/>
           <p:cNvSpPr/>
           <p:nvPr/>
         </p:nvSpPr>
@@ -7909,7 +7778,7 @@
             </a:avLst>
           </a:prstGeom>
           <a:solidFill>
-            <a:srgbClr val="E9E4FF"/>
+            <a:srgbClr val="FFF0D7"/>
           </a:solidFill>
           <a:ln>
             <a:noFill/>
@@ -7939,7 +7808,7 @@
       </p:sp>
       <p:sp>
         <p:nvSpPr>
-          <p:cNvPr id="40" name="TextBox 39"/>
+          <p:cNvPr id="39" name="TextBox 38"/>
           <p:cNvSpPr txBox="1"/>
           <p:nvPr/>
         </p:nvSpPr>
@@ -7977,14 +7846,14 @@
               </a:defRPr>
             </a:pPr>
             <a:r>
-              <a:t>Workflow run</a:t>
-            </a:r>
-          </a:p>
-        </p:txBody>
-      </p:sp>
-      <p:sp>
-        <p:nvSpPr>
-          <p:cNvPr id="41" name="Oval 40"/>
+              <a:t>What evidence is missing?</a:t>
+            </a:r>
+          </a:p>
+        </p:txBody>
+      </p:sp>
+      <p:sp>
+        <p:nvSpPr>
+          <p:cNvPr id="40" name="Oval 39"/>
           <p:cNvSpPr/>
           <p:nvPr/>
         </p:nvSpPr>
@@ -8027,7 +7896,7 @@
       </p:sp>
       <p:sp>
         <p:nvSpPr>
-          <p:cNvPr id="42" name="TextBox 41"/>
+          <p:cNvPr id="41" name="TextBox 40"/>
           <p:cNvSpPr txBox="1"/>
           <p:nvPr/>
         </p:nvSpPr>
@@ -8072,7 +7941,7 @@
       </p:sp>
       <p:cxnSp>
         <p:nvCxnSpPr>
-          <p:cNvPr id="43" name="Connector 42"/>
+          <p:cNvPr id="42" name="Connector 41"/>
           <p:cNvCxnSpPr/>
           <p:nvPr/>
         </p:nvCxnSpPr>
@@ -8107,7 +7976,7 @@
       </p:cxnSp>
       <p:cxnSp>
         <p:nvCxnSpPr>
-          <p:cNvPr id="44" name="Connector 43"/>
+          <p:cNvPr id="43" name="Connector 42"/>
           <p:cNvCxnSpPr/>
           <p:nvPr/>
         </p:nvCxnSpPr>
@@ -8142,7 +8011,7 @@
       </p:cxnSp>
       <p:sp>
         <p:nvSpPr>
-          <p:cNvPr id="45" name="Rounded Rectangle 44"/>
+          <p:cNvPr id="44" name="Rounded Rectangle 43"/>
           <p:cNvSpPr/>
           <p:nvPr/>
         </p:nvSpPr>
@@ -8157,7 +8026,7 @@
             </a:avLst>
           </a:prstGeom>
           <a:solidFill>
-            <a:srgbClr val="FFF0D7"/>
+            <a:srgbClr val="14213B"/>
           </a:solidFill>
           <a:ln>
             <a:noFill/>
@@ -8187,14 +8056,14 @@
       </p:sp>
       <p:sp>
         <p:nvSpPr>
-          <p:cNvPr id="46" name="TextBox 45"/>
+          <p:cNvPr id="45" name="TextBox 44"/>
           <p:cNvSpPr txBox="1"/>
           <p:nvPr/>
         </p:nvSpPr>
         <p:spPr>
           <a:xfrm>
             <a:off x="701040" y="5440680"/>
-            <a:ext cx="10835640" cy="283845"/>
+            <a:ext cx="10835640" cy="321945"/>
           </a:xfrm>
           <a:prstGeom prst="rect">
             <a:avLst/>
@@ -8209,7 +8078,7 @@
           <a:p>
             <a:pPr>
               <a:lnSpc>
-                <a:spcPts val="1875"/>
+                <a:spcPts val="2175"/>
               </a:lnSpc>
               <a:spcBef>
                 <a:spcPts val="0"/>
@@ -8217,15 +8086,15 @@
               <a:spcAft>
                 <a:spcPts val="0"/>
               </a:spcAft>
-              <a:defRPr sz="1500" b="1">
+              <a:defRPr sz="1739" b="1">
                 <a:solidFill>
-                  <a:srgbClr val="AE6515"/>
+                  <a:srgbClr val="FFFFFF"/>
                 </a:solidFill>
                 <a:latin typeface="DejaVu Sans"/>
               </a:defRPr>
             </a:pPr>
             <a:r>
-              <a:t>Real-world context: Square’s September 2023 outage disrupted seller services. [S5]</a:t>
+              <a:t>An event sequence helps investigation. Timing alone does not prove the cause.</a:t>
             </a:r>
           </a:p>
         </p:txBody>
@@ -8374,104 +8243,14 @@
               </a:defRPr>
             </a:pPr>
             <a:r>
-              <a:t>OPSREPLAY / HACKATHON PROTOTYPE</a:t>
-            </a:r>
-          </a:p>
-        </p:txBody>
-      </p:sp>
-      <p:sp>
-        <p:nvSpPr>
-          <p:cNvPr id="5" name="Rounded Rectangle 4"/>
-          <p:cNvSpPr/>
-          <p:nvPr/>
-        </p:nvSpPr>
-        <p:spPr>
-          <a:xfrm>
-            <a:off x="9982200" y="327660"/>
-            <a:ext cx="1714500" cy="335280"/>
-          </a:xfrm>
-          <a:prstGeom prst="roundRect">
-            <a:avLst>
-              <a:gd name="adj" fmla="val 25000"/>
-            </a:avLst>
-          </a:prstGeom>
-          <a:solidFill>
-            <a:srgbClr val="14213B"/>
-          </a:solidFill>
-          <a:ln>
-            <a:noFill/>
-          </a:ln>
-        </p:spPr>
-        <p:style>
-          <a:lnRef idx="1">
-            <a:schemeClr val="accent1"/>
-          </a:lnRef>
-          <a:fillRef idx="3">
-            <a:schemeClr val="accent1"/>
-          </a:fillRef>
-          <a:effectRef idx="2">
-            <a:schemeClr val="accent1"/>
-          </a:effectRef>
-          <a:fontRef idx="minor">
-            <a:schemeClr val="lt1"/>
-          </a:fontRef>
-        </p:style>
-        <p:txBody>
-          <a:bodyPr rtlCol="0" anchor="ctr"/>
-          <a:lstStyle/>
-          <a:p>
-            <a:pPr algn="ctr"/>
-          </a:p>
-        </p:txBody>
-      </p:sp>
-      <p:sp>
-        <p:nvSpPr>
-          <p:cNvPr id="6" name="TextBox 5"/>
-          <p:cNvSpPr txBox="1"/>
-          <p:nvPr/>
-        </p:nvSpPr>
-        <p:spPr>
-          <a:xfrm>
-            <a:off x="10119360" y="388620"/>
-            <a:ext cx="1539240" cy="245745"/>
-          </a:xfrm>
-          <a:prstGeom prst="rect">
-            <a:avLst/>
-          </a:prstGeom>
-          <a:noFill/>
-        </p:spPr>
-        <p:txBody>
-          <a:bodyPr wrap="none" lIns="0" rIns="0" tIns="0" bIns="0">
-            <a:spAutoFit/>
-          </a:bodyPr>
-          <a:lstStyle/>
-          <a:p>
-            <a:pPr>
-              <a:lnSpc>
-                <a:spcPts val="1575"/>
-              </a:lnSpc>
-              <a:spcBef>
-                <a:spcPts val="0"/>
-              </a:spcBef>
-              <a:spcAft>
-                <a:spcPts val="0"/>
-              </a:spcAft>
-              <a:defRPr sz="1260" b="1">
-                <a:solidFill>
-                  <a:srgbClr val="FFFFFF"/>
-                </a:solidFill>
-                <a:latin typeface="DejaVu Sans"/>
-              </a:defRPr>
-            </a:pPr>
-            <a:r>
-              <a:t>SOLO PROJECT</a:t>
-            </a:r>
-          </a:p>
-        </p:txBody>
-      </p:sp>
-      <p:sp>
-        <p:nvSpPr>
-          <p:cNvPr id="7" name="TextBox 6"/>
+              <a:t>OPSREPLAY / INCIDENT REPLAY</a:t>
+            </a:r>
+          </a:p>
+        </p:txBody>
+      </p:sp>
+      <p:sp>
+        <p:nvSpPr>
+          <p:cNvPr id="5" name="TextBox 4"/>
           <p:cNvSpPr txBox="1"/>
           <p:nvPr/>
         </p:nvSpPr>
@@ -8516,7 +8295,7 @@
       </p:sp>
       <p:sp>
         <p:nvSpPr>
-          <p:cNvPr id="8" name="TextBox 7"/>
+          <p:cNvPr id="6" name="TextBox 5"/>
           <p:cNvSpPr txBox="1"/>
           <p:nvPr/>
         </p:nvSpPr>
@@ -8561,7 +8340,7 @@
       </p:sp>
       <p:cxnSp>
         <p:nvCxnSpPr>
-          <p:cNvPr id="9" name="Connector 8"/>
+          <p:cNvPr id="7" name="Connector 6"/>
           <p:cNvCxnSpPr/>
           <p:nvPr/>
         </p:nvCxnSpPr>
@@ -8596,7 +8375,7 @@
       </p:cxnSp>
       <p:sp>
         <p:nvSpPr>
-          <p:cNvPr id="10" name="TextBox 9"/>
+          <p:cNvPr id="8" name="TextBox 7"/>
           <p:cNvSpPr txBox="1"/>
           <p:nvPr/>
         </p:nvSpPr>
@@ -8634,14 +8413,14 @@
               </a:defRPr>
             </a:pPr>
             <a:r>
-              <a:t>SIMULATED IoT · Public GitHub API · Gemini</a:t>
-            </a:r>
-          </a:p>
-        </p:txBody>
-      </p:sp>
-      <p:sp>
-        <p:nvSpPr>
-          <p:cNvPr id="11" name="TextBox 10"/>
+              <a:t>SIMULATED IoT · Replay · Evidence</a:t>
+            </a:r>
+          </a:p>
+        </p:txBody>
+      </p:sp>
+      <p:sp>
+        <p:nvSpPr>
+          <p:cNvPr id="9" name="TextBox 8"/>
           <p:cNvSpPr txBox="1"/>
           <p:nvPr/>
         </p:nvSpPr>
@@ -8686,7 +8465,7 @@
       </p:sp>
       <p:sp>
         <p:nvSpPr>
-          <p:cNvPr id="12" name="Rounded Rectangle 11"/>
+          <p:cNvPr id="10" name="Rounded Rectangle 9"/>
           <p:cNvSpPr/>
           <p:nvPr/>
         </p:nvSpPr>
@@ -8731,7 +8510,7 @@
       </p:sp>
       <p:sp>
         <p:nvSpPr>
-          <p:cNvPr id="13" name="Rounded Rectangle 12"/>
+          <p:cNvPr id="11" name="Rounded Rectangle 10"/>
           <p:cNvSpPr/>
           <p:nvPr/>
         </p:nvSpPr>
@@ -8776,7 +8555,7 @@
       </p:sp>
       <p:sp>
         <p:nvSpPr>
-          <p:cNvPr id="14" name="TextBox 13"/>
+          <p:cNvPr id="12" name="TextBox 11"/>
           <p:cNvSpPr txBox="1"/>
           <p:nvPr/>
         </p:nvSpPr>
@@ -8821,7 +8600,7 @@
       </p:sp>
       <p:sp>
         <p:nvSpPr>
-          <p:cNvPr id="15" name="Oval 14"/>
+          <p:cNvPr id="13" name="Oval 12"/>
           <p:cNvSpPr/>
           <p:nvPr/>
         </p:nvSpPr>
@@ -8866,7 +8645,7 @@
       </p:sp>
       <p:cxnSp>
         <p:nvCxnSpPr>
-          <p:cNvPr id="16" name="Connector 15"/>
+          <p:cNvPr id="14" name="Connector 13"/>
           <p:cNvCxnSpPr/>
           <p:nvPr/>
         </p:nvCxnSpPr>
@@ -8901,7 +8680,7 @@
       </p:cxnSp>
       <p:sp>
         <p:nvSpPr>
-          <p:cNvPr id="17" name="TextBox 16"/>
+          <p:cNvPr id="15" name="TextBox 14"/>
           <p:cNvSpPr txBox="1"/>
           <p:nvPr/>
         </p:nvSpPr>
@@ -8946,7 +8725,7 @@
       </p:sp>
       <p:sp>
         <p:nvSpPr>
-          <p:cNvPr id="18" name="TextBox 17"/>
+          <p:cNvPr id="16" name="TextBox 15"/>
           <p:cNvSpPr txBox="1"/>
           <p:nvPr/>
         </p:nvSpPr>
@@ -8991,7 +8770,7 @@
       </p:sp>
       <p:sp>
         <p:nvSpPr>
-          <p:cNvPr id="19" name="TextBox 18"/>
+          <p:cNvPr id="17" name="TextBox 16"/>
           <p:cNvSpPr txBox="1"/>
           <p:nvPr/>
         </p:nvSpPr>
@@ -9036,7 +8815,7 @@
       </p:sp>
       <p:sp>
         <p:nvSpPr>
-          <p:cNvPr id="20" name="Rounded Rectangle 19"/>
+          <p:cNvPr id="18" name="Rounded Rectangle 17"/>
           <p:cNvSpPr/>
           <p:nvPr/>
         </p:nvSpPr>
@@ -9081,7 +8860,7 @@
       </p:sp>
       <p:sp>
         <p:nvSpPr>
-          <p:cNvPr id="21" name="Rounded Rectangle 20"/>
+          <p:cNvPr id="19" name="Rounded Rectangle 18"/>
           <p:cNvSpPr/>
           <p:nvPr/>
         </p:nvSpPr>
@@ -9126,7 +8905,7 @@
       </p:sp>
       <p:sp>
         <p:nvSpPr>
-          <p:cNvPr id="22" name="TextBox 21"/>
+          <p:cNvPr id="20" name="TextBox 19"/>
           <p:cNvSpPr txBox="1"/>
           <p:nvPr/>
         </p:nvSpPr>
@@ -9171,7 +8950,7 @@
       </p:sp>
       <p:cxnSp>
         <p:nvCxnSpPr>
-          <p:cNvPr id="23" name="Connector 22"/>
+          <p:cNvPr id="21" name="Connector 20"/>
           <p:cNvCxnSpPr/>
           <p:nvPr/>
         </p:nvCxnSpPr>
@@ -9206,7 +8985,7 @@
       </p:cxnSp>
       <p:sp>
         <p:nvSpPr>
-          <p:cNvPr id="24" name="Oval 23"/>
+          <p:cNvPr id="22" name="Oval 21"/>
           <p:cNvSpPr/>
           <p:nvPr/>
         </p:nvSpPr>
@@ -9249,7 +9028,7 @@
       </p:sp>
       <p:cxnSp>
         <p:nvCxnSpPr>
-          <p:cNvPr id="25" name="Connector 24"/>
+          <p:cNvPr id="23" name="Connector 22"/>
           <p:cNvCxnSpPr/>
           <p:nvPr/>
         </p:nvCxnSpPr>
@@ -9284,7 +9063,7 @@
       </p:cxnSp>
       <p:sp>
         <p:nvSpPr>
-          <p:cNvPr id="26" name="Oval 25"/>
+          <p:cNvPr id="24" name="Oval 23"/>
           <p:cNvSpPr/>
           <p:nvPr/>
         </p:nvSpPr>
@@ -9327,7 +9106,7 @@
       </p:sp>
       <p:cxnSp>
         <p:nvCxnSpPr>
-          <p:cNvPr id="27" name="Connector 26"/>
+          <p:cNvPr id="25" name="Connector 24"/>
           <p:cNvCxnSpPr/>
           <p:nvPr/>
         </p:nvCxnSpPr>
@@ -9362,7 +9141,7 @@
       </p:cxnSp>
       <p:sp>
         <p:nvSpPr>
-          <p:cNvPr id="28" name="Oval 27"/>
+          <p:cNvPr id="26" name="Oval 25"/>
           <p:cNvSpPr/>
           <p:nvPr/>
         </p:nvSpPr>
@@ -9405,7 +9184,7 @@
       </p:sp>
       <p:cxnSp>
         <p:nvCxnSpPr>
-          <p:cNvPr id="29" name="Connector 28"/>
+          <p:cNvPr id="27" name="Connector 26"/>
           <p:cNvCxnSpPr/>
           <p:nvPr/>
         </p:nvCxnSpPr>
@@ -9440,7 +9219,7 @@
       </p:cxnSp>
       <p:sp>
         <p:nvSpPr>
-          <p:cNvPr id="30" name="TextBox 29"/>
+          <p:cNvPr id="28" name="TextBox 27"/>
           <p:cNvSpPr txBox="1"/>
           <p:nvPr/>
         </p:nvSpPr>
@@ -9485,7 +9264,7 @@
       </p:sp>
       <p:sp>
         <p:nvSpPr>
-          <p:cNvPr id="31" name="TextBox 30"/>
+          <p:cNvPr id="29" name="TextBox 28"/>
           <p:cNvSpPr txBox="1"/>
           <p:nvPr/>
         </p:nvSpPr>
@@ -9530,7 +9309,7 @@
       </p:sp>
       <p:sp>
         <p:nvSpPr>
-          <p:cNvPr id="32" name="TextBox 31"/>
+          <p:cNvPr id="30" name="TextBox 29"/>
           <p:cNvSpPr txBox="1"/>
           <p:nvPr/>
         </p:nvSpPr>
@@ -9575,7 +9354,7 @@
       </p:sp>
       <p:sp>
         <p:nvSpPr>
-          <p:cNvPr id="33" name="Rounded Rectangle 32"/>
+          <p:cNvPr id="31" name="Rounded Rectangle 30"/>
           <p:cNvSpPr/>
           <p:nvPr/>
         </p:nvSpPr>
@@ -9620,7 +9399,7 @@
       </p:sp>
       <p:sp>
         <p:nvSpPr>
-          <p:cNvPr id="34" name="Rounded Rectangle 33"/>
+          <p:cNvPr id="32" name="Rounded Rectangle 31"/>
           <p:cNvSpPr/>
           <p:nvPr/>
         </p:nvSpPr>
@@ -9665,7 +9444,7 @@
       </p:sp>
       <p:sp>
         <p:nvSpPr>
-          <p:cNvPr id="35" name="TextBox 34"/>
+          <p:cNvPr id="33" name="TextBox 32"/>
           <p:cNvSpPr txBox="1"/>
           <p:nvPr/>
         </p:nvSpPr>
@@ -9710,7 +9489,7 @@
       </p:sp>
       <p:sp>
         <p:nvSpPr>
-          <p:cNvPr id="36" name="Rounded Rectangle 35"/>
+          <p:cNvPr id="34" name="Rounded Rectangle 33"/>
           <p:cNvSpPr/>
           <p:nvPr/>
         </p:nvSpPr>
@@ -9757,14 +9536,84 @@
       </p:sp>
       <p:cxnSp>
         <p:nvCxnSpPr>
+          <p:cNvPr id="35" name="Connector 34"/>
+          <p:cNvCxnSpPr/>
+          <p:nvPr/>
+        </p:nvCxnSpPr>
+        <p:spPr>
+          <a:xfrm>
+            <a:off x="8557260" y="2675382"/>
+            <a:ext cx="0" cy="78867"/>
+          </a:xfrm>
+          <a:prstGeom prst="line">
+            <a:avLst/>
+          </a:prstGeom>
+          <a:ln w="35052">
+            <a:solidFill>
+              <a:srgbClr val="7051E8"/>
+            </a:solidFill>
+          </a:ln>
+        </p:spPr>
+        <p:style>
+          <a:lnRef idx="2">
+            <a:schemeClr val="accent1"/>
+          </a:lnRef>
+          <a:fillRef idx="0">
+            <a:schemeClr val="accent1"/>
+          </a:fillRef>
+          <a:effectRef idx="1">
+            <a:schemeClr val="accent1"/>
+          </a:effectRef>
+          <a:fontRef idx="minor">
+            <a:schemeClr val="tx1"/>
+          </a:fontRef>
+        </p:style>
+      </p:cxnSp>
+      <p:cxnSp>
+        <p:nvCxnSpPr>
+          <p:cNvPr id="36" name="Connector 35"/>
+          <p:cNvCxnSpPr/>
+          <p:nvPr/>
+        </p:nvCxnSpPr>
+        <p:spPr>
+          <a:xfrm>
+            <a:off x="8557260" y="3323844"/>
+            <a:ext cx="0" cy="87630"/>
+          </a:xfrm>
+          <a:prstGeom prst="line">
+            <a:avLst/>
+          </a:prstGeom>
+          <a:ln w="35052">
+            <a:solidFill>
+              <a:srgbClr val="7051E8"/>
+            </a:solidFill>
+          </a:ln>
+        </p:spPr>
+        <p:style>
+          <a:lnRef idx="2">
+            <a:schemeClr val="accent1"/>
+          </a:lnRef>
+          <a:fillRef idx="0">
+            <a:schemeClr val="accent1"/>
+          </a:fillRef>
+          <a:effectRef idx="1">
+            <a:schemeClr val="accent1"/>
+          </a:effectRef>
+          <a:fontRef idx="minor">
+            <a:schemeClr val="tx1"/>
+          </a:fontRef>
+        </p:style>
+      </p:cxnSp>
+      <p:cxnSp>
+        <p:nvCxnSpPr>
           <p:cNvPr id="37" name="Connector 36"/>
           <p:cNvCxnSpPr/>
           <p:nvPr/>
         </p:nvCxnSpPr>
         <p:spPr>
           <a:xfrm>
-            <a:off x="8557260" y="2675382"/>
-            <a:ext cx="0" cy="78867"/>
+            <a:off x="8355710" y="2903220"/>
+            <a:ext cx="96394" cy="0"/>
           </a:xfrm>
           <a:prstGeom prst="line">
             <a:avLst/>
@@ -9798,8 +9647,8 @@
         </p:nvCxnSpPr>
         <p:spPr>
           <a:xfrm>
-            <a:off x="8557260" y="3323844"/>
-            <a:ext cx="0" cy="87630"/>
+            <a:off x="9012935" y="2903220"/>
+            <a:ext cx="96394" cy="0"/>
           </a:xfrm>
           <a:prstGeom prst="line">
             <a:avLst/>
@@ -9833,8 +9682,8 @@
         </p:nvCxnSpPr>
         <p:spPr>
           <a:xfrm>
-            <a:off x="8355710" y="2903220"/>
-            <a:ext cx="96394" cy="0"/>
+            <a:off x="8732520" y="2675382"/>
+            <a:ext cx="0" cy="78867"/>
           </a:xfrm>
           <a:prstGeom prst="line">
             <a:avLst/>
@@ -9868,8 +9717,8 @@
         </p:nvCxnSpPr>
         <p:spPr>
           <a:xfrm>
-            <a:off x="9012935" y="2903220"/>
-            <a:ext cx="96394" cy="0"/>
+            <a:off x="8732520" y="3323844"/>
+            <a:ext cx="0" cy="87630"/>
           </a:xfrm>
           <a:prstGeom prst="line">
             <a:avLst/>
@@ -9903,8 +9752,8 @@
         </p:nvCxnSpPr>
         <p:spPr>
           <a:xfrm>
-            <a:off x="8732520" y="2675382"/>
-            <a:ext cx="0" cy="78867"/>
+            <a:off x="8355710" y="3078480"/>
+            <a:ext cx="96394" cy="0"/>
           </a:xfrm>
           <a:prstGeom prst="line">
             <a:avLst/>
@@ -9938,8 +9787,8 @@
         </p:nvCxnSpPr>
         <p:spPr>
           <a:xfrm>
-            <a:off x="8732520" y="3323844"/>
-            <a:ext cx="0" cy="87630"/>
+            <a:off x="9012935" y="3078480"/>
+            <a:ext cx="96394" cy="0"/>
           </a:xfrm>
           <a:prstGeom prst="line">
             <a:avLst/>
@@ -9973,8 +9822,8 @@
         </p:nvCxnSpPr>
         <p:spPr>
           <a:xfrm>
-            <a:off x="8355710" y="3078480"/>
-            <a:ext cx="96394" cy="0"/>
+            <a:off x="8907780" y="2675382"/>
+            <a:ext cx="0" cy="78867"/>
           </a:xfrm>
           <a:prstGeom prst="line">
             <a:avLst/>
@@ -10008,8 +9857,8 @@
         </p:nvCxnSpPr>
         <p:spPr>
           <a:xfrm>
-            <a:off x="9012935" y="3078480"/>
-            <a:ext cx="96394" cy="0"/>
+            <a:off x="8907780" y="3323844"/>
+            <a:ext cx="0" cy="87630"/>
           </a:xfrm>
           <a:prstGeom prst="line">
             <a:avLst/>
@@ -10043,8 +9892,8 @@
         </p:nvCxnSpPr>
         <p:spPr>
           <a:xfrm>
-            <a:off x="8907780" y="2675382"/>
-            <a:ext cx="0" cy="78867"/>
+            <a:off x="8355710" y="3253740"/>
+            <a:ext cx="96394" cy="0"/>
           </a:xfrm>
           <a:prstGeom prst="line">
             <a:avLst/>
@@ -10078,8 +9927,8 @@
         </p:nvCxnSpPr>
         <p:spPr>
           <a:xfrm>
-            <a:off x="8907780" y="3323844"/>
-            <a:ext cx="0" cy="87630"/>
+            <a:off x="9012935" y="3253740"/>
+            <a:ext cx="96394" cy="0"/>
           </a:xfrm>
           <a:prstGeom prst="line">
             <a:avLst/>
@@ -10112,9 +9961,9 @@
           <p:nvPr/>
         </p:nvCxnSpPr>
         <p:spPr>
-          <a:xfrm>
-            <a:off x="8355710" y="3253740"/>
-            <a:ext cx="96394" cy="0"/>
+          <a:xfrm flipV="1">
+            <a:off x="8618601" y="2920746"/>
+            <a:ext cx="113919" cy="192786"/>
           </a:xfrm>
           <a:prstGeom prst="line">
             <a:avLst/>
@@ -10148,8 +9997,8 @@
         </p:nvCxnSpPr>
         <p:spPr>
           <a:xfrm>
-            <a:off x="9012935" y="3253740"/>
-            <a:ext cx="96394" cy="0"/>
+            <a:off x="8732520" y="2920746"/>
+            <a:ext cx="113919" cy="192786"/>
           </a:xfrm>
           <a:prstGeom prst="line">
             <a:avLst/>
@@ -10182,9 +10031,9 @@
           <p:nvPr/>
         </p:nvCxnSpPr>
         <p:spPr>
-          <a:xfrm flipV="1">
-            <a:off x="8618601" y="2920746"/>
-            <a:ext cx="113919" cy="192786"/>
+          <a:xfrm>
+            <a:off x="8653653" y="3052191"/>
+            <a:ext cx="157733" cy="0"/>
           </a:xfrm>
           <a:prstGeom prst="line">
             <a:avLst/>
@@ -10210,79 +10059,9 @@
           </a:fontRef>
         </p:style>
       </p:cxnSp>
-      <p:cxnSp>
-        <p:nvCxnSpPr>
-          <p:cNvPr id="50" name="Connector 49"/>
-          <p:cNvCxnSpPr/>
-          <p:nvPr/>
-        </p:nvCxnSpPr>
-        <p:spPr>
-          <a:xfrm>
-            <a:off x="8732520" y="2920746"/>
-            <a:ext cx="113919" cy="192786"/>
-          </a:xfrm>
-          <a:prstGeom prst="line">
-            <a:avLst/>
-          </a:prstGeom>
-          <a:ln w="35052">
-            <a:solidFill>
-              <a:srgbClr val="7051E8"/>
-            </a:solidFill>
-          </a:ln>
-        </p:spPr>
-        <p:style>
-          <a:lnRef idx="2">
-            <a:schemeClr val="accent1"/>
-          </a:lnRef>
-          <a:fillRef idx="0">
-            <a:schemeClr val="accent1"/>
-          </a:fillRef>
-          <a:effectRef idx="1">
-            <a:schemeClr val="accent1"/>
-          </a:effectRef>
-          <a:fontRef idx="minor">
-            <a:schemeClr val="tx1"/>
-          </a:fontRef>
-        </p:style>
-      </p:cxnSp>
-      <p:cxnSp>
-        <p:nvCxnSpPr>
-          <p:cNvPr id="51" name="Connector 50"/>
-          <p:cNvCxnSpPr/>
-          <p:nvPr/>
-        </p:nvCxnSpPr>
-        <p:spPr>
-          <a:xfrm>
-            <a:off x="8653653" y="3052191"/>
-            <a:ext cx="157733" cy="0"/>
-          </a:xfrm>
-          <a:prstGeom prst="line">
-            <a:avLst/>
-          </a:prstGeom>
-          <a:ln w="35052">
-            <a:solidFill>
-              <a:srgbClr val="7051E8"/>
-            </a:solidFill>
-          </a:ln>
-        </p:spPr>
-        <p:style>
-          <a:lnRef idx="2">
-            <a:schemeClr val="accent1"/>
-          </a:lnRef>
-          <a:fillRef idx="0">
-            <a:schemeClr val="accent1"/>
-          </a:fillRef>
-          <a:effectRef idx="1">
-            <a:schemeClr val="accent1"/>
-          </a:effectRef>
-          <a:fontRef idx="minor">
-            <a:schemeClr val="tx1"/>
-          </a:fontRef>
-        </p:style>
-      </p:cxnSp>
-      <p:sp>
-        <p:nvSpPr>
-          <p:cNvPr id="52" name="TextBox 51"/>
+      <p:sp>
+        <p:nvSpPr>
+          <p:cNvPr id="50" name="TextBox 49"/>
           <p:cNvSpPr txBox="1"/>
           <p:nvPr/>
         </p:nvSpPr>
@@ -10327,7 +10106,7 @@
       </p:sp>
       <p:sp>
         <p:nvSpPr>
-          <p:cNvPr id="53" name="TextBox 52"/>
+          <p:cNvPr id="51" name="TextBox 50"/>
           <p:cNvSpPr txBox="1"/>
           <p:nvPr/>
         </p:nvSpPr>
@@ -10372,7 +10151,7 @@
       </p:sp>
       <p:sp>
         <p:nvSpPr>
-          <p:cNvPr id="54" name="TextBox 53"/>
+          <p:cNvPr id="52" name="TextBox 51"/>
           <p:cNvSpPr txBox="1"/>
           <p:nvPr/>
         </p:nvSpPr>
@@ -10417,7 +10196,7 @@
       </p:sp>
       <p:sp>
         <p:nvSpPr>
-          <p:cNvPr id="55" name="Rounded Rectangle 54"/>
+          <p:cNvPr id="53" name="Rounded Rectangle 52"/>
           <p:cNvSpPr/>
           <p:nvPr/>
         </p:nvSpPr>
@@ -10462,7 +10241,7 @@
       </p:sp>
       <p:sp>
         <p:nvSpPr>
-          <p:cNvPr id="56" name="TextBox 55"/>
+          <p:cNvPr id="54" name="TextBox 53"/>
           <p:cNvSpPr txBox="1"/>
           <p:nvPr/>
         </p:nvSpPr>
@@ -10500,7 +10279,7 @@
               </a:defRPr>
             </a:pPr>
             <a:r>
-              <a:t>My experiment: a small, inspectable workflow for device + software evidence.</a:t>
+              <a:t>OpsReplay: replay device events and inspect the evidence behind an AI response.</a:t>
             </a:r>
           </a:p>
         </p:txBody>
@@ -10649,104 +10428,14 @@
               </a:defRPr>
             </a:pPr>
             <a:r>
-              <a:t>OPSREPLAY / HACKATHON PROTOTYPE</a:t>
-            </a:r>
-          </a:p>
-        </p:txBody>
-      </p:sp>
-      <p:sp>
-        <p:nvSpPr>
-          <p:cNvPr id="5" name="Rounded Rectangle 4"/>
-          <p:cNvSpPr/>
-          <p:nvPr/>
-        </p:nvSpPr>
-        <p:spPr>
-          <a:xfrm>
-            <a:off x="9982200" y="327660"/>
-            <a:ext cx="1714500" cy="335280"/>
-          </a:xfrm>
-          <a:prstGeom prst="roundRect">
-            <a:avLst>
-              <a:gd name="adj" fmla="val 25000"/>
-            </a:avLst>
-          </a:prstGeom>
-          <a:solidFill>
-            <a:srgbClr val="14213B"/>
-          </a:solidFill>
-          <a:ln>
-            <a:noFill/>
-          </a:ln>
-        </p:spPr>
-        <p:style>
-          <a:lnRef idx="1">
-            <a:schemeClr val="accent1"/>
-          </a:lnRef>
-          <a:fillRef idx="3">
-            <a:schemeClr val="accent1"/>
-          </a:fillRef>
-          <a:effectRef idx="2">
-            <a:schemeClr val="accent1"/>
-          </a:effectRef>
-          <a:fontRef idx="minor">
-            <a:schemeClr val="lt1"/>
-          </a:fontRef>
-        </p:style>
-        <p:txBody>
-          <a:bodyPr rtlCol="0" anchor="ctr"/>
-          <a:lstStyle/>
-          <a:p>
-            <a:pPr algn="ctr"/>
-          </a:p>
-        </p:txBody>
-      </p:sp>
-      <p:sp>
-        <p:nvSpPr>
-          <p:cNvPr id="6" name="TextBox 5"/>
-          <p:cNvSpPr txBox="1"/>
-          <p:nvPr/>
-        </p:nvSpPr>
-        <p:spPr>
-          <a:xfrm>
-            <a:off x="10119360" y="388620"/>
-            <a:ext cx="1539240" cy="245745"/>
-          </a:xfrm>
-          <a:prstGeom prst="rect">
-            <a:avLst/>
-          </a:prstGeom>
-          <a:noFill/>
-        </p:spPr>
-        <p:txBody>
-          <a:bodyPr wrap="none" lIns="0" rIns="0" tIns="0" bIns="0">
-            <a:spAutoFit/>
-          </a:bodyPr>
-          <a:lstStyle/>
-          <a:p>
-            <a:pPr>
-              <a:lnSpc>
-                <a:spcPts val="1575"/>
-              </a:lnSpc>
-              <a:spcBef>
-                <a:spcPts val="0"/>
-              </a:spcBef>
-              <a:spcAft>
-                <a:spcPts val="0"/>
-              </a:spcAft>
-              <a:defRPr sz="1260" b="1">
-                <a:solidFill>
-                  <a:srgbClr val="FFFFFF"/>
-                </a:solidFill>
-                <a:latin typeface="DejaVu Sans"/>
-              </a:defRPr>
-            </a:pPr>
-            <a:r>
-              <a:t>SOLO PROJECT</a:t>
-            </a:r>
-          </a:p>
-        </p:txBody>
-      </p:sp>
-      <p:sp>
-        <p:nvSpPr>
-          <p:cNvPr id="7" name="TextBox 6"/>
+              <a:t>OPSREPLAY / INCIDENT REPLAY</a:t>
+            </a:r>
+          </a:p>
+        </p:txBody>
+      </p:sp>
+      <p:sp>
+        <p:nvSpPr>
+          <p:cNvPr id="5" name="TextBox 4"/>
           <p:cNvSpPr txBox="1"/>
           <p:nvPr/>
         </p:nvSpPr>
@@ -10784,14 +10473,14 @@
               </a:defRPr>
             </a:pPr>
             <a:r>
-              <a:t>OpsReplay connects the investigation.</a:t>
-            </a:r>
-          </a:p>
-        </p:txBody>
-      </p:sp>
-      <p:sp>
-        <p:nvSpPr>
-          <p:cNvPr id="8" name="TextBox 7"/>
+              <a:t>OpsReplay turns events into an investigation.</a:t>
+            </a:r>
+          </a:p>
+        </p:txBody>
+      </p:sp>
+      <p:sp>
+        <p:nvSpPr>
+          <p:cNvPr id="6" name="TextBox 5"/>
           <p:cNvSpPr txBox="1"/>
           <p:nvPr/>
         </p:nvSpPr>
@@ -10829,14 +10518,14 @@
               </a:defRPr>
             </a:pPr>
             <a:r>
-              <a:t>Bring records together. Select events. Check the evidence.</a:t>
+              <a:t>The verified demo follows one device through its event history.</a:t>
             </a:r>
           </a:p>
         </p:txBody>
       </p:sp>
       <p:cxnSp>
         <p:nvCxnSpPr>
-          <p:cNvPr id="9" name="Connector 8"/>
+          <p:cNvPr id="7" name="Connector 6"/>
           <p:cNvCxnSpPr/>
           <p:nvPr/>
         </p:nvCxnSpPr>
@@ -10871,7 +10560,7 @@
       </p:cxnSp>
       <p:sp>
         <p:nvSpPr>
-          <p:cNvPr id="10" name="TextBox 9"/>
+          <p:cNvPr id="8" name="TextBox 7"/>
           <p:cNvSpPr txBox="1"/>
           <p:nvPr/>
         </p:nvSpPr>
@@ -10909,14 +10598,14 @@
               </a:defRPr>
             </a:pPr>
             <a:r>
-              <a:t>SIMULATED IoT · Public GitHub API · Gemini</a:t>
-            </a:r>
-          </a:p>
-        </p:txBody>
-      </p:sp>
-      <p:sp>
-        <p:nvSpPr>
-          <p:cNvPr id="11" name="TextBox 10"/>
+              <a:t>SIMULATED IoT · Replay · Evidence</a:t>
+            </a:r>
+          </a:p>
+        </p:txBody>
+      </p:sp>
+      <p:sp>
+        <p:nvSpPr>
+          <p:cNvPr id="9" name="TextBox 8"/>
           <p:cNvSpPr txBox="1"/>
           <p:nvPr/>
         </p:nvSpPr>
@@ -10961,18 +10650,18 @@
       </p:sp>
       <p:sp>
         <p:nvSpPr>
-          <p:cNvPr id="12" name="Rounded Rectangle 11"/>
+          <p:cNvPr id="10" name="Rounded Rectangle 9"/>
           <p:cNvSpPr/>
           <p:nvPr/>
         </p:nvSpPr>
         <p:spPr>
           <a:xfrm>
-            <a:off x="487680" y="2057400"/>
-            <a:ext cx="2651760" cy="1676400"/>
+            <a:off x="487680" y="2156460"/>
+            <a:ext cx="2667000" cy="2667000"/>
           </a:xfrm>
           <a:prstGeom prst="roundRect">
             <a:avLst>
-              <a:gd name="adj" fmla="val 10000"/>
+              <a:gd name="adj" fmla="val 6285"/>
             </a:avLst>
           </a:prstGeom>
           <a:solidFill>
@@ -11006,13 +10695,13 @@
       </p:sp>
       <p:sp>
         <p:nvSpPr>
-          <p:cNvPr id="13" name="Rounded Rectangle 12"/>
+          <p:cNvPr id="11" name="Rounded Rectangle 10"/>
           <p:cNvSpPr/>
           <p:nvPr/>
         </p:nvSpPr>
         <p:spPr>
           <a:xfrm>
-            <a:off x="685800" y="2286000"/>
+            <a:off x="716280" y="2423160"/>
             <a:ext cx="640080" cy="426720"/>
           </a:xfrm>
           <a:prstGeom prst="roundRect">
@@ -11053,14 +10742,84 @@
       </p:sp>
       <p:cxnSp>
         <p:nvCxnSpPr>
+          <p:cNvPr id="12" name="Connector 11"/>
+          <p:cNvCxnSpPr/>
+          <p:nvPr/>
+        </p:nvCxnSpPr>
+        <p:spPr>
+          <a:xfrm>
+            <a:off x="1036320" y="2849880"/>
+            <a:ext cx="0" cy="121920"/>
+          </a:xfrm>
+          <a:prstGeom prst="line">
+            <a:avLst/>
+          </a:prstGeom>
+          <a:ln w="30480">
+            <a:solidFill>
+              <a:srgbClr val="7051E8"/>
+            </a:solidFill>
+          </a:ln>
+        </p:spPr>
+        <p:style>
+          <a:lnRef idx="2">
+            <a:schemeClr val="accent1"/>
+          </a:lnRef>
+          <a:fillRef idx="0">
+            <a:schemeClr val="accent1"/>
+          </a:fillRef>
+          <a:effectRef idx="1">
+            <a:schemeClr val="accent1"/>
+          </a:effectRef>
+          <a:fontRef idx="minor">
+            <a:schemeClr val="tx1"/>
+          </a:fontRef>
+        </p:style>
+      </p:cxnSp>
+      <p:cxnSp>
+        <p:nvCxnSpPr>
+          <p:cNvPr id="13" name="Connector 12"/>
+          <p:cNvCxnSpPr/>
+          <p:nvPr/>
+        </p:nvCxnSpPr>
+        <p:spPr>
+          <a:xfrm>
+            <a:off x="853440" y="2971800"/>
+            <a:ext cx="365760" cy="0"/>
+          </a:xfrm>
+          <a:prstGeom prst="line">
+            <a:avLst/>
+          </a:prstGeom>
+          <a:ln w="30480">
+            <a:solidFill>
+              <a:srgbClr val="7051E8"/>
+            </a:solidFill>
+          </a:ln>
+        </p:spPr>
+        <p:style>
+          <a:lnRef idx="2">
+            <a:schemeClr val="accent1"/>
+          </a:lnRef>
+          <a:fillRef idx="0">
+            <a:schemeClr val="accent1"/>
+          </a:fillRef>
+          <a:effectRef idx="1">
+            <a:schemeClr val="accent1"/>
+          </a:effectRef>
+          <a:fontRef idx="minor">
+            <a:schemeClr val="tx1"/>
+          </a:fontRef>
+        </p:style>
+      </p:cxnSp>
+      <p:cxnSp>
+        <p:nvCxnSpPr>
           <p:cNvPr id="14" name="Connector 13"/>
           <p:cNvCxnSpPr/>
           <p:nvPr/>
         </p:nvCxnSpPr>
         <p:spPr>
           <a:xfrm>
-            <a:off x="1005840" y="2712720"/>
-            <a:ext cx="0" cy="121920"/>
+            <a:off x="861060" y="2621280"/>
+            <a:ext cx="114300" cy="0"/>
           </a:xfrm>
           <a:prstGeom prst="line">
             <a:avLst/>
@@ -11093,9 +10852,9 @@
           <p:nvPr/>
         </p:nvCxnSpPr>
         <p:spPr>
-          <a:xfrm>
-            <a:off x="822960" y="2834640"/>
-            <a:ext cx="365760" cy="0"/>
+          <a:xfrm flipV="1">
+            <a:off x="975360" y="2522220"/>
+            <a:ext cx="68580" cy="99060"/>
           </a:xfrm>
           <a:prstGeom prst="line">
             <a:avLst/>
@@ -11129,8 +10888,8 @@
         </p:nvCxnSpPr>
         <p:spPr>
           <a:xfrm>
-            <a:off x="830580" y="2484120"/>
-            <a:ext cx="114300" cy="0"/>
+            <a:off x="1043940" y="2522220"/>
+            <a:ext cx="83820" cy="205740"/>
           </a:xfrm>
           <a:prstGeom prst="line">
             <a:avLst/>
@@ -11164,8 +10923,8 @@
         </p:nvCxnSpPr>
         <p:spPr>
           <a:xfrm flipV="1">
-            <a:off x="944880" y="2385060"/>
-            <a:ext cx="68580" cy="99060"/>
+            <a:off x="1127760" y="2613660"/>
+            <a:ext cx="99060" cy="114300"/>
           </a:xfrm>
           <a:prstGeom prst="line">
             <a:avLst/>
@@ -11191,86 +10950,16 @@
           </a:fontRef>
         </p:style>
       </p:cxnSp>
-      <p:cxnSp>
-        <p:nvCxnSpPr>
-          <p:cNvPr id="18" name="Connector 17"/>
-          <p:cNvCxnSpPr/>
-          <p:nvPr/>
-        </p:nvCxnSpPr>
-        <p:spPr>
-          <a:xfrm>
-            <a:off x="1013460" y="2385060"/>
-            <a:ext cx="83820" cy="205740"/>
-          </a:xfrm>
-          <a:prstGeom prst="line">
-            <a:avLst/>
-          </a:prstGeom>
-          <a:ln w="30480">
-            <a:solidFill>
-              <a:srgbClr val="7051E8"/>
-            </a:solidFill>
-          </a:ln>
-        </p:spPr>
-        <p:style>
-          <a:lnRef idx="2">
-            <a:schemeClr val="accent1"/>
-          </a:lnRef>
-          <a:fillRef idx="0">
-            <a:schemeClr val="accent1"/>
-          </a:fillRef>
-          <a:effectRef idx="1">
-            <a:schemeClr val="accent1"/>
-          </a:effectRef>
-          <a:fontRef idx="minor">
-            <a:schemeClr val="tx1"/>
-          </a:fontRef>
-        </p:style>
-      </p:cxnSp>
-      <p:cxnSp>
-        <p:nvCxnSpPr>
-          <p:cNvPr id="19" name="Connector 18"/>
-          <p:cNvCxnSpPr/>
-          <p:nvPr/>
-        </p:nvCxnSpPr>
-        <p:spPr>
-          <a:xfrm flipV="1">
-            <a:off x="1097280" y="2476500"/>
-            <a:ext cx="99060" cy="114300"/>
-          </a:xfrm>
-          <a:prstGeom prst="line">
-            <a:avLst/>
-          </a:prstGeom>
-          <a:ln w="30480">
-            <a:solidFill>
-              <a:srgbClr val="7051E8"/>
-            </a:solidFill>
-          </a:ln>
-        </p:spPr>
-        <p:style>
-          <a:lnRef idx="2">
-            <a:schemeClr val="accent1"/>
-          </a:lnRef>
-          <a:fillRef idx="0">
-            <a:schemeClr val="accent1"/>
-          </a:fillRef>
-          <a:effectRef idx="1">
-            <a:schemeClr val="accent1"/>
-          </a:effectRef>
-          <a:fontRef idx="minor">
-            <a:schemeClr val="tx1"/>
-          </a:fontRef>
-        </p:style>
-      </p:cxnSp>
-      <p:sp>
-        <p:nvSpPr>
-          <p:cNvPr id="20" name="TextBox 19"/>
+      <p:sp>
+        <p:nvSpPr>
+          <p:cNvPr id="18" name="TextBox 17"/>
           <p:cNvSpPr txBox="1"/>
           <p:nvPr/>
         </p:nvSpPr>
         <p:spPr>
           <a:xfrm>
-            <a:off x="1524000" y="2392680"/>
-            <a:ext cx="1501140" cy="369570"/>
+            <a:off x="716280" y="3268980"/>
+            <a:ext cx="2339340" cy="379095"/>
           </a:xfrm>
           <a:prstGeom prst="rect">
             <a:avLst/>
@@ -11285,7 +10974,7 @@
           <a:p>
             <a:pPr>
               <a:lnSpc>
-                <a:spcPts val="2550"/>
+                <a:spcPts val="2625"/>
               </a:lnSpc>
               <a:spcBef>
                 <a:spcPts val="0"/>
@@ -11293,7 +10982,7 @@
               <a:spcAft>
                 <a:spcPts val="0"/>
               </a:spcAft>
-              <a:defRPr sz="2039" b="1">
+              <a:defRPr sz="2100" b="1">
                 <a:solidFill>
                   <a:srgbClr val="14213B"/>
                 </a:solidFill>
@@ -11301,21 +10990,21 @@
               </a:defRPr>
             </a:pPr>
             <a:r>
-              <a:t>IoT</a:t>
-            </a:r>
-          </a:p>
-        </p:txBody>
-      </p:sp>
-      <p:sp>
-        <p:nvSpPr>
-          <p:cNvPr id="21" name="Rounded Rectangle 20"/>
+              <a:t>Device events</a:t>
+            </a:r>
+          </a:p>
+        </p:txBody>
+      </p:sp>
+      <p:sp>
+        <p:nvSpPr>
+          <p:cNvPr id="19" name="Rounded Rectangle 18"/>
           <p:cNvSpPr/>
           <p:nvPr/>
         </p:nvSpPr>
         <p:spPr>
           <a:xfrm>
-            <a:off x="685800" y="3116580"/>
-            <a:ext cx="2164080" cy="335280"/>
+            <a:off x="716280" y="4076699"/>
+            <a:ext cx="2209800" cy="335280"/>
           </a:xfrm>
           <a:prstGeom prst="roundRect">
             <a:avLst>
@@ -11353,14 +11042,14 @@
       </p:sp>
       <p:sp>
         <p:nvSpPr>
-          <p:cNvPr id="22" name="TextBox 21"/>
+          <p:cNvPr id="20" name="TextBox 19"/>
           <p:cNvSpPr txBox="1"/>
           <p:nvPr/>
         </p:nvSpPr>
         <p:spPr>
           <a:xfrm>
-            <a:off x="822960" y="3177540"/>
-            <a:ext cx="1988819" cy="245745"/>
+            <a:off x="853440" y="4137660"/>
+            <a:ext cx="2034540" cy="245745"/>
           </a:xfrm>
           <a:prstGeom prst="rect">
             <a:avLst/>
@@ -11398,22 +11087,22 @@
       </p:sp>
       <p:sp>
         <p:nvSpPr>
-          <p:cNvPr id="23" name="Rounded Rectangle 22"/>
+          <p:cNvPr id="21" name="Rounded Rectangle 20"/>
           <p:cNvSpPr/>
           <p:nvPr/>
         </p:nvSpPr>
         <p:spPr>
           <a:xfrm>
-            <a:off x="487680" y="4099560"/>
-            <a:ext cx="2651760" cy="1676400"/>
+            <a:off x="4472940" y="2156460"/>
+            <a:ext cx="3200400" cy="2667000"/>
           </a:xfrm>
           <a:prstGeom prst="roundRect">
             <a:avLst>
-              <a:gd name="adj" fmla="val 10000"/>
+              <a:gd name="adj" fmla="val 6285"/>
             </a:avLst>
           </a:prstGeom>
           <a:solidFill>
-            <a:srgbClr val="FFFFFF"/>
+            <a:srgbClr val="14213B"/>
           </a:solidFill>
           <a:ln>
             <a:noFill/>
@@ -11441,61 +11130,16 @@
           </a:p>
         </p:txBody>
       </p:sp>
-      <p:sp>
-        <p:nvSpPr>
-          <p:cNvPr id="24" name="Oval 23"/>
-          <p:cNvSpPr/>
-          <p:nvPr/>
-        </p:nvSpPr>
-        <p:spPr>
-          <a:xfrm>
-            <a:off x="754380" y="4373880"/>
-            <a:ext cx="472440" cy="472440"/>
-          </a:xfrm>
-          <a:prstGeom prst="ellipse">
-            <a:avLst/>
-          </a:prstGeom>
-          <a:solidFill>
-            <a:srgbClr val="E9E4FF"/>
-          </a:solidFill>
-          <a:ln w="22860">
-            <a:solidFill>
-              <a:srgbClr val="7051E8"/>
-            </a:solidFill>
-          </a:ln>
-        </p:spPr>
-        <p:style>
-          <a:lnRef idx="1">
-            <a:schemeClr val="accent1"/>
-          </a:lnRef>
-          <a:fillRef idx="3">
-            <a:schemeClr val="accent1"/>
-          </a:fillRef>
-          <a:effectRef idx="2">
-            <a:schemeClr val="accent1"/>
-          </a:effectRef>
-          <a:fontRef idx="minor">
-            <a:schemeClr val="lt1"/>
-          </a:fontRef>
-        </p:style>
-        <p:txBody>
-          <a:bodyPr rtlCol="0" anchor="ctr"/>
-          <a:lstStyle/>
-          <a:p>
-            <a:pPr algn="ctr"/>
-          </a:p>
-        </p:txBody>
-      </p:sp>
       <p:cxnSp>
         <p:nvCxnSpPr>
-          <p:cNvPr id="25" name="Connector 24"/>
+          <p:cNvPr id="22" name="Connector 21"/>
           <p:cNvCxnSpPr/>
           <p:nvPr/>
         </p:nvCxnSpPr>
         <p:spPr>
-          <a:xfrm flipH="1" flipV="1">
-            <a:off x="815340" y="4328160"/>
-            <a:ext cx="22860" cy="129540"/>
+          <a:xfrm>
+            <a:off x="4808220" y="2423160"/>
+            <a:ext cx="0" cy="594360"/>
           </a:xfrm>
           <a:prstGeom prst="line">
             <a:avLst/>
@@ -11521,6 +11165,127 @@
           </a:fontRef>
         </p:style>
       </p:cxnSp>
+      <p:sp>
+        <p:nvSpPr>
+          <p:cNvPr id="23" name="Oval 22"/>
+          <p:cNvSpPr/>
+          <p:nvPr/>
+        </p:nvSpPr>
+        <p:spPr>
+          <a:xfrm>
+            <a:off x="4754880" y="2461260"/>
+            <a:ext cx="106680" cy="106680"/>
+          </a:xfrm>
+          <a:prstGeom prst="ellipse">
+            <a:avLst/>
+          </a:prstGeom>
+          <a:solidFill>
+            <a:srgbClr val="7051E8"/>
+          </a:solidFill>
+          <a:ln>
+            <a:noFill/>
+          </a:ln>
+        </p:spPr>
+        <p:style>
+          <a:lnRef idx="1">
+            <a:schemeClr val="accent1"/>
+          </a:lnRef>
+          <a:fillRef idx="3">
+            <a:schemeClr val="accent1"/>
+          </a:fillRef>
+          <a:effectRef idx="2">
+            <a:schemeClr val="accent1"/>
+          </a:effectRef>
+          <a:fontRef idx="minor">
+            <a:schemeClr val="lt1"/>
+          </a:fontRef>
+        </p:style>
+        <p:txBody>
+          <a:bodyPr rtlCol="0" anchor="ctr"/>
+          <a:lstStyle/>
+          <a:p>
+            <a:pPr algn="ctr"/>
+          </a:p>
+        </p:txBody>
+      </p:sp>
+      <p:cxnSp>
+        <p:nvCxnSpPr>
+          <p:cNvPr id="24" name="Connector 23"/>
+          <p:cNvCxnSpPr/>
+          <p:nvPr/>
+        </p:nvCxnSpPr>
+        <p:spPr>
+          <a:xfrm>
+            <a:off x="4945380" y="2514600"/>
+            <a:ext cx="350520" cy="0"/>
+          </a:xfrm>
+          <a:prstGeom prst="line">
+            <a:avLst/>
+          </a:prstGeom>
+          <a:ln w="30480">
+            <a:solidFill>
+              <a:srgbClr val="7051E8"/>
+            </a:solidFill>
+          </a:ln>
+        </p:spPr>
+        <p:style>
+          <a:lnRef idx="2">
+            <a:schemeClr val="accent1"/>
+          </a:lnRef>
+          <a:fillRef idx="0">
+            <a:schemeClr val="accent1"/>
+          </a:fillRef>
+          <a:effectRef idx="1">
+            <a:schemeClr val="accent1"/>
+          </a:effectRef>
+          <a:fontRef idx="minor">
+            <a:schemeClr val="tx1"/>
+          </a:fontRef>
+        </p:style>
+      </p:cxnSp>
+      <p:sp>
+        <p:nvSpPr>
+          <p:cNvPr id="25" name="Oval 24"/>
+          <p:cNvSpPr/>
+          <p:nvPr/>
+        </p:nvSpPr>
+        <p:spPr>
+          <a:xfrm>
+            <a:off x="4754880" y="2659380"/>
+            <a:ext cx="106680" cy="106680"/>
+          </a:xfrm>
+          <a:prstGeom prst="ellipse">
+            <a:avLst/>
+          </a:prstGeom>
+          <a:solidFill>
+            <a:srgbClr val="7051E8"/>
+          </a:solidFill>
+          <a:ln>
+            <a:noFill/>
+          </a:ln>
+        </p:spPr>
+        <p:style>
+          <a:lnRef idx="1">
+            <a:schemeClr val="accent1"/>
+          </a:lnRef>
+          <a:fillRef idx="3">
+            <a:schemeClr val="accent1"/>
+          </a:fillRef>
+          <a:effectRef idx="2">
+            <a:schemeClr val="accent1"/>
+          </a:effectRef>
+          <a:fontRef idx="minor">
+            <a:schemeClr val="lt1"/>
+          </a:fontRef>
+        </p:style>
+        <p:txBody>
+          <a:bodyPr rtlCol="0" anchor="ctr"/>
+          <a:lstStyle/>
+          <a:p>
+            <a:pPr algn="ctr"/>
+          </a:p>
+        </p:txBody>
+      </p:sp>
       <p:cxnSp>
         <p:nvCxnSpPr>
           <p:cNvPr id="26" name="Connector 25"/>
@@ -11529,8 +11294,8 @@
         </p:nvCxnSpPr>
         <p:spPr>
           <a:xfrm>
-            <a:off x="815340" y="4328160"/>
-            <a:ext cx="129540" cy="68580"/>
+            <a:off x="4945380" y="2712720"/>
+            <a:ext cx="350520" cy="0"/>
           </a:xfrm>
           <a:prstGeom prst="line">
             <a:avLst/>
@@ -11556,16 +11321,59 @@
           </a:fontRef>
         </p:style>
       </p:cxnSp>
+      <p:sp>
+        <p:nvSpPr>
+          <p:cNvPr id="27" name="Oval 26"/>
+          <p:cNvSpPr/>
+          <p:nvPr/>
+        </p:nvSpPr>
+        <p:spPr>
+          <a:xfrm>
+            <a:off x="4754880" y="2872740"/>
+            <a:ext cx="106680" cy="106680"/>
+          </a:xfrm>
+          <a:prstGeom prst="ellipse">
+            <a:avLst/>
+          </a:prstGeom>
+          <a:solidFill>
+            <a:srgbClr val="7051E8"/>
+          </a:solidFill>
+          <a:ln>
+            <a:noFill/>
+          </a:ln>
+        </p:spPr>
+        <p:style>
+          <a:lnRef idx="1">
+            <a:schemeClr val="accent1"/>
+          </a:lnRef>
+          <a:fillRef idx="3">
+            <a:schemeClr val="accent1"/>
+          </a:fillRef>
+          <a:effectRef idx="2">
+            <a:schemeClr val="accent1"/>
+          </a:effectRef>
+          <a:fontRef idx="minor">
+            <a:schemeClr val="lt1"/>
+          </a:fontRef>
+        </p:style>
+        <p:txBody>
+          <a:bodyPr rtlCol="0" anchor="ctr"/>
+          <a:lstStyle/>
+          <a:p>
+            <a:pPr algn="ctr"/>
+          </a:p>
+        </p:txBody>
+      </p:sp>
       <p:cxnSp>
         <p:nvCxnSpPr>
-          <p:cNvPr id="27" name="Connector 26"/>
+          <p:cNvPr id="28" name="Connector 27"/>
           <p:cNvCxnSpPr/>
           <p:nvPr/>
         </p:nvCxnSpPr>
         <p:spPr>
-          <a:xfrm flipV="1">
-            <a:off x="1051560" y="4328160"/>
-            <a:ext cx="129540" cy="68580"/>
+          <a:xfrm>
+            <a:off x="4945380" y="2926080"/>
+            <a:ext cx="350520" cy="0"/>
           </a:xfrm>
           <a:prstGeom prst="line">
             <a:avLst/>
@@ -11591,86 +11399,16 @@
           </a:fontRef>
         </p:style>
       </p:cxnSp>
-      <p:cxnSp>
-        <p:nvCxnSpPr>
-          <p:cNvPr id="28" name="Connector 27"/>
-          <p:cNvCxnSpPr/>
-          <p:nvPr/>
-        </p:nvCxnSpPr>
-        <p:spPr>
-          <a:xfrm flipH="1">
-            <a:off x="1158240" y="4328160"/>
-            <a:ext cx="22860" cy="129540"/>
-          </a:xfrm>
-          <a:prstGeom prst="line">
-            <a:avLst/>
-          </a:prstGeom>
-          <a:ln w="30480">
-            <a:solidFill>
-              <a:srgbClr val="7051E8"/>
-            </a:solidFill>
-          </a:ln>
-        </p:spPr>
-        <p:style>
-          <a:lnRef idx="2">
-            <a:schemeClr val="accent1"/>
-          </a:lnRef>
-          <a:fillRef idx="0">
-            <a:schemeClr val="accent1"/>
-          </a:fillRef>
-          <a:effectRef idx="1">
-            <a:schemeClr val="accent1"/>
-          </a:effectRef>
-          <a:fontRef idx="minor">
-            <a:schemeClr val="tx1"/>
-          </a:fontRef>
-        </p:style>
-      </p:cxnSp>
-      <p:cxnSp>
-        <p:nvCxnSpPr>
-          <p:cNvPr id="29" name="Connector 28"/>
-          <p:cNvCxnSpPr/>
-          <p:nvPr/>
-        </p:nvCxnSpPr>
-        <p:spPr>
-          <a:xfrm>
-            <a:off x="990599" y="4831080"/>
-            <a:ext cx="0" cy="106680"/>
-          </a:xfrm>
-          <a:prstGeom prst="line">
-            <a:avLst/>
-          </a:prstGeom>
-          <a:ln w="30480">
-            <a:solidFill>
-              <a:srgbClr val="7051E8"/>
-            </a:solidFill>
-          </a:ln>
-        </p:spPr>
-        <p:style>
-          <a:lnRef idx="2">
-            <a:schemeClr val="accent1"/>
-          </a:lnRef>
-          <a:fillRef idx="0">
-            <a:schemeClr val="accent1"/>
-          </a:fillRef>
-          <a:effectRef idx="1">
-            <a:schemeClr val="accent1"/>
-          </a:effectRef>
-          <a:fontRef idx="minor">
-            <a:schemeClr val="tx1"/>
-          </a:fontRef>
-        </p:style>
-      </p:cxnSp>
-      <p:sp>
-        <p:nvSpPr>
-          <p:cNvPr id="30" name="TextBox 29"/>
+      <p:sp>
+        <p:nvSpPr>
+          <p:cNvPr id="29" name="TextBox 28"/>
           <p:cNvSpPr txBox="1"/>
           <p:nvPr/>
         </p:nvSpPr>
         <p:spPr>
           <a:xfrm>
-            <a:off x="1524000" y="4434840"/>
-            <a:ext cx="1501140" cy="369570"/>
+            <a:off x="4701540" y="3268980"/>
+            <a:ext cx="2872740" cy="379095"/>
           </a:xfrm>
           <a:prstGeom prst="rect">
             <a:avLst/>
@@ -11685,7 +11423,7 @@
           <a:p>
             <a:pPr>
               <a:lnSpc>
-                <a:spcPts val="2550"/>
+                <a:spcPts val="2625"/>
               </a:lnSpc>
               <a:spcBef>
                 <a:spcPts val="0"/>
@@ -11693,29 +11431,29 @@
               <a:spcAft>
                 <a:spcPts val="0"/>
               </a:spcAft>
-              <a:defRPr sz="2039" b="1">
+              <a:defRPr sz="2100" b="1">
                 <a:solidFill>
-                  <a:srgbClr val="14213B"/>
+                  <a:srgbClr val="FFFFFF"/>
                 </a:solidFill>
                 <a:latin typeface="DejaVu Sans"/>
               </a:defRPr>
             </a:pPr>
             <a:r>
-              <a:t>GitHub</a:t>
-            </a:r>
-          </a:p>
-        </p:txBody>
-      </p:sp>
-      <p:sp>
-        <p:nvSpPr>
-          <p:cNvPr id="31" name="Rounded Rectangle 30"/>
+              <a:t>Unified Timeline</a:t>
+            </a:r>
+          </a:p>
+        </p:txBody>
+      </p:sp>
+      <p:sp>
+        <p:nvSpPr>
+          <p:cNvPr id="30" name="Rounded Rectangle 29"/>
           <p:cNvSpPr/>
           <p:nvPr/>
         </p:nvSpPr>
         <p:spPr>
           <a:xfrm>
-            <a:off x="685800" y="5158740"/>
-            <a:ext cx="2164080" cy="335280"/>
+            <a:off x="4701540" y="4076699"/>
+            <a:ext cx="2743200" cy="335280"/>
           </a:xfrm>
           <a:prstGeom prst="roundRect">
             <a:avLst>
@@ -11753,14 +11491,14 @@
       </p:sp>
       <p:sp>
         <p:nvSpPr>
-          <p:cNvPr id="32" name="TextBox 31"/>
+          <p:cNvPr id="31" name="TextBox 30"/>
           <p:cNvSpPr txBox="1"/>
           <p:nvPr/>
         </p:nvSpPr>
         <p:spPr>
           <a:xfrm>
-            <a:off x="822960" y="5219700"/>
-            <a:ext cx="1988819" cy="245745"/>
+            <a:off x="4838700" y="4137660"/>
+            <a:ext cx="2567940" cy="245745"/>
           </a:xfrm>
           <a:prstGeom prst="rect">
             <a:avLst/>
@@ -11791,470 +11529,21 @@
               </a:defRPr>
             </a:pPr>
             <a:r>
-              <a:t>PUBLIC API</a:t>
-            </a:r>
-          </a:p>
-        </p:txBody>
-      </p:sp>
-      <p:sp>
-        <p:nvSpPr>
-          <p:cNvPr id="33" name="Rounded Rectangle 32"/>
+              <a:t>Source / Severity</a:t>
+            </a:r>
+          </a:p>
+        </p:txBody>
+      </p:sp>
+      <p:sp>
+        <p:nvSpPr>
+          <p:cNvPr id="32" name="Rounded Rectangle 31"/>
           <p:cNvSpPr/>
           <p:nvPr/>
         </p:nvSpPr>
         <p:spPr>
           <a:xfrm>
-            <a:off x="4015740" y="2636520"/>
-            <a:ext cx="3154680" cy="2667000"/>
-          </a:xfrm>
-          <a:prstGeom prst="roundRect">
-            <a:avLst>
-              <a:gd name="adj" fmla="val 6285"/>
-            </a:avLst>
-          </a:prstGeom>
-          <a:solidFill>
-            <a:srgbClr val="14213B"/>
-          </a:solidFill>
-          <a:ln>
-            <a:noFill/>
-          </a:ln>
-        </p:spPr>
-        <p:style>
-          <a:lnRef idx="1">
-            <a:schemeClr val="accent1"/>
-          </a:lnRef>
-          <a:fillRef idx="3">
-            <a:schemeClr val="accent1"/>
-          </a:fillRef>
-          <a:effectRef idx="2">
-            <a:schemeClr val="accent1"/>
-          </a:effectRef>
-          <a:fontRef idx="minor">
-            <a:schemeClr val="lt1"/>
-          </a:fontRef>
-        </p:style>
-        <p:txBody>
-          <a:bodyPr rtlCol="0" anchor="ctr"/>
-          <a:lstStyle/>
-          <a:p>
-            <a:pPr algn="ctr"/>
-          </a:p>
-        </p:txBody>
-      </p:sp>
-      <p:cxnSp>
-        <p:nvCxnSpPr>
-          <p:cNvPr id="34" name="Connector 33"/>
-          <p:cNvCxnSpPr/>
-          <p:nvPr/>
-        </p:nvCxnSpPr>
-        <p:spPr>
-          <a:xfrm>
-            <a:off x="4407407" y="2903220"/>
-            <a:ext cx="0" cy="653796"/>
-          </a:xfrm>
-          <a:prstGeom prst="line">
-            <a:avLst/>
-          </a:prstGeom>
-          <a:ln w="33528">
-            <a:solidFill>
-              <a:srgbClr val="7051E8"/>
-            </a:solidFill>
-          </a:ln>
-        </p:spPr>
-        <p:style>
-          <a:lnRef idx="2">
-            <a:schemeClr val="accent1"/>
-          </a:lnRef>
-          <a:fillRef idx="0">
-            <a:schemeClr val="accent1"/>
-          </a:fillRef>
-          <a:effectRef idx="1">
-            <a:schemeClr val="accent1"/>
-          </a:effectRef>
-          <a:fontRef idx="minor">
-            <a:schemeClr val="tx1"/>
-          </a:fontRef>
-        </p:style>
-      </p:cxnSp>
-      <p:sp>
-        <p:nvSpPr>
-          <p:cNvPr id="35" name="Oval 34"/>
-          <p:cNvSpPr/>
-          <p:nvPr/>
-        </p:nvSpPr>
-        <p:spPr>
-          <a:xfrm>
-            <a:off x="4348733" y="2945130"/>
-            <a:ext cx="117348" cy="117348"/>
-          </a:xfrm>
-          <a:prstGeom prst="ellipse">
-            <a:avLst/>
-          </a:prstGeom>
-          <a:solidFill>
-            <a:srgbClr val="7051E8"/>
-          </a:solidFill>
-          <a:ln>
-            <a:noFill/>
-          </a:ln>
-        </p:spPr>
-        <p:style>
-          <a:lnRef idx="1">
-            <a:schemeClr val="accent1"/>
-          </a:lnRef>
-          <a:fillRef idx="3">
-            <a:schemeClr val="accent1"/>
-          </a:fillRef>
-          <a:effectRef idx="2">
-            <a:schemeClr val="accent1"/>
-          </a:effectRef>
-          <a:fontRef idx="minor">
-            <a:schemeClr val="lt1"/>
-          </a:fontRef>
-        </p:style>
-        <p:txBody>
-          <a:bodyPr rtlCol="0" anchor="ctr"/>
-          <a:lstStyle/>
-          <a:p>
-            <a:pPr algn="ctr"/>
-          </a:p>
-        </p:txBody>
-      </p:sp>
-      <p:cxnSp>
-        <p:nvCxnSpPr>
-          <p:cNvPr id="36" name="Connector 35"/>
-          <p:cNvCxnSpPr/>
-          <p:nvPr/>
-        </p:nvCxnSpPr>
-        <p:spPr>
-          <a:xfrm>
-            <a:off x="4558284" y="3003803"/>
-            <a:ext cx="385572" cy="0"/>
-          </a:xfrm>
-          <a:prstGeom prst="line">
-            <a:avLst/>
-          </a:prstGeom>
-          <a:ln w="33528">
-            <a:solidFill>
-              <a:srgbClr val="7051E8"/>
-            </a:solidFill>
-          </a:ln>
-        </p:spPr>
-        <p:style>
-          <a:lnRef idx="2">
-            <a:schemeClr val="accent1"/>
-          </a:lnRef>
-          <a:fillRef idx="0">
-            <a:schemeClr val="accent1"/>
-          </a:fillRef>
-          <a:effectRef idx="1">
-            <a:schemeClr val="accent1"/>
-          </a:effectRef>
-          <a:fontRef idx="minor">
-            <a:schemeClr val="tx1"/>
-          </a:fontRef>
-        </p:style>
-      </p:cxnSp>
-      <p:sp>
-        <p:nvSpPr>
-          <p:cNvPr id="37" name="Oval 36"/>
-          <p:cNvSpPr/>
-          <p:nvPr/>
-        </p:nvSpPr>
-        <p:spPr>
-          <a:xfrm>
-            <a:off x="4348733" y="3163062"/>
-            <a:ext cx="117348" cy="117348"/>
-          </a:xfrm>
-          <a:prstGeom prst="ellipse">
-            <a:avLst/>
-          </a:prstGeom>
-          <a:solidFill>
-            <a:srgbClr val="7051E8"/>
-          </a:solidFill>
-          <a:ln>
-            <a:noFill/>
-          </a:ln>
-        </p:spPr>
-        <p:style>
-          <a:lnRef idx="1">
-            <a:schemeClr val="accent1"/>
-          </a:lnRef>
-          <a:fillRef idx="3">
-            <a:schemeClr val="accent1"/>
-          </a:fillRef>
-          <a:effectRef idx="2">
-            <a:schemeClr val="accent1"/>
-          </a:effectRef>
-          <a:fontRef idx="minor">
-            <a:schemeClr val="lt1"/>
-          </a:fontRef>
-        </p:style>
-        <p:txBody>
-          <a:bodyPr rtlCol="0" anchor="ctr"/>
-          <a:lstStyle/>
-          <a:p>
-            <a:pPr algn="ctr"/>
-          </a:p>
-        </p:txBody>
-      </p:sp>
-      <p:cxnSp>
-        <p:nvCxnSpPr>
-          <p:cNvPr id="38" name="Connector 37"/>
-          <p:cNvCxnSpPr/>
-          <p:nvPr/>
-        </p:nvCxnSpPr>
-        <p:spPr>
-          <a:xfrm>
-            <a:off x="4558284" y="3221736"/>
-            <a:ext cx="385572" cy="0"/>
-          </a:xfrm>
-          <a:prstGeom prst="line">
-            <a:avLst/>
-          </a:prstGeom>
-          <a:ln w="33528">
-            <a:solidFill>
-              <a:srgbClr val="7051E8"/>
-            </a:solidFill>
-          </a:ln>
-        </p:spPr>
-        <p:style>
-          <a:lnRef idx="2">
-            <a:schemeClr val="accent1"/>
-          </a:lnRef>
-          <a:fillRef idx="0">
-            <a:schemeClr val="accent1"/>
-          </a:fillRef>
-          <a:effectRef idx="1">
-            <a:schemeClr val="accent1"/>
-          </a:effectRef>
-          <a:fontRef idx="minor">
-            <a:schemeClr val="tx1"/>
-          </a:fontRef>
-        </p:style>
-      </p:cxnSp>
-      <p:sp>
-        <p:nvSpPr>
-          <p:cNvPr id="39" name="Oval 38"/>
-          <p:cNvSpPr/>
-          <p:nvPr/>
-        </p:nvSpPr>
-        <p:spPr>
-          <a:xfrm>
-            <a:off x="4348733" y="3397758"/>
-            <a:ext cx="117348" cy="117348"/>
-          </a:xfrm>
-          <a:prstGeom prst="ellipse">
-            <a:avLst/>
-          </a:prstGeom>
-          <a:solidFill>
-            <a:srgbClr val="7051E8"/>
-          </a:solidFill>
-          <a:ln>
-            <a:noFill/>
-          </a:ln>
-        </p:spPr>
-        <p:style>
-          <a:lnRef idx="1">
-            <a:schemeClr val="accent1"/>
-          </a:lnRef>
-          <a:fillRef idx="3">
-            <a:schemeClr val="accent1"/>
-          </a:fillRef>
-          <a:effectRef idx="2">
-            <a:schemeClr val="accent1"/>
-          </a:effectRef>
-          <a:fontRef idx="minor">
-            <a:schemeClr val="lt1"/>
-          </a:fontRef>
-        </p:style>
-        <p:txBody>
-          <a:bodyPr rtlCol="0" anchor="ctr"/>
-          <a:lstStyle/>
-          <a:p>
-            <a:pPr algn="ctr"/>
-          </a:p>
-        </p:txBody>
-      </p:sp>
-      <p:cxnSp>
-        <p:nvCxnSpPr>
-          <p:cNvPr id="40" name="Connector 39"/>
-          <p:cNvCxnSpPr/>
-          <p:nvPr/>
-        </p:nvCxnSpPr>
-        <p:spPr>
-          <a:xfrm>
-            <a:off x="4558284" y="3456432"/>
-            <a:ext cx="385572" cy="0"/>
-          </a:xfrm>
-          <a:prstGeom prst="line">
-            <a:avLst/>
-          </a:prstGeom>
-          <a:ln w="33528">
-            <a:solidFill>
-              <a:srgbClr val="7051E8"/>
-            </a:solidFill>
-          </a:ln>
-        </p:spPr>
-        <p:style>
-          <a:lnRef idx="2">
-            <a:schemeClr val="accent1"/>
-          </a:lnRef>
-          <a:fillRef idx="0">
-            <a:schemeClr val="accent1"/>
-          </a:fillRef>
-          <a:effectRef idx="1">
-            <a:schemeClr val="accent1"/>
-          </a:effectRef>
-          <a:fontRef idx="minor">
-            <a:schemeClr val="tx1"/>
-          </a:fontRef>
-        </p:style>
-      </p:cxnSp>
-      <p:sp>
-        <p:nvSpPr>
-          <p:cNvPr id="41" name="TextBox 40"/>
-          <p:cNvSpPr txBox="1"/>
-          <p:nvPr/>
-        </p:nvSpPr>
-        <p:spPr>
-          <a:xfrm>
-            <a:off x="4290060" y="3741420"/>
-            <a:ext cx="2682240" cy="388620"/>
-          </a:xfrm>
-          <a:prstGeom prst="rect">
-            <a:avLst/>
-          </a:prstGeom>
-          <a:noFill/>
-        </p:spPr>
-        <p:txBody>
-          <a:bodyPr wrap="none" lIns="0" rIns="0" tIns="0" bIns="0">
-            <a:spAutoFit/>
-          </a:bodyPr>
-          <a:lstStyle/>
-          <a:p>
-            <a:pPr>
-              <a:lnSpc>
-                <a:spcPts val="2700"/>
-              </a:lnSpc>
-              <a:spcBef>
-                <a:spcPts val="0"/>
-              </a:spcBef>
-              <a:spcAft>
-                <a:spcPts val="0"/>
-              </a:spcAft>
-              <a:defRPr sz="2160" b="1">
-                <a:solidFill>
-                  <a:srgbClr val="FFFFFF"/>
-                </a:solidFill>
-                <a:latin typeface="DejaVu Sans"/>
-              </a:defRPr>
-            </a:pPr>
-            <a:r>
-              <a:t>Unified Timeline</a:t>
-            </a:r>
-          </a:p>
-        </p:txBody>
-      </p:sp>
-      <p:sp>
-        <p:nvSpPr>
-          <p:cNvPr id="42" name="Rounded Rectangle 41"/>
-          <p:cNvSpPr/>
-          <p:nvPr/>
-        </p:nvSpPr>
-        <p:spPr>
-          <a:xfrm>
-            <a:off x="4290060" y="4427220"/>
-            <a:ext cx="2606040" cy="335280"/>
-          </a:xfrm>
-          <a:prstGeom prst="roundRect">
-            <a:avLst>
-              <a:gd name="adj" fmla="val 25000"/>
-            </a:avLst>
-          </a:prstGeom>
-          <a:solidFill>
-            <a:srgbClr val="E9E4FF"/>
-          </a:solidFill>
-          <a:ln>
-            <a:noFill/>
-          </a:ln>
-        </p:spPr>
-        <p:style>
-          <a:lnRef idx="1">
-            <a:schemeClr val="accent1"/>
-          </a:lnRef>
-          <a:fillRef idx="3">
-            <a:schemeClr val="accent1"/>
-          </a:fillRef>
-          <a:effectRef idx="2">
-            <a:schemeClr val="accent1"/>
-          </a:effectRef>
-          <a:fontRef idx="minor">
-            <a:schemeClr val="lt1"/>
-          </a:fontRef>
-        </p:style>
-        <p:txBody>
-          <a:bodyPr rtlCol="0" anchor="ctr"/>
-          <a:lstStyle/>
-          <a:p>
-            <a:pPr algn="ctr"/>
-          </a:p>
-        </p:txBody>
-      </p:sp>
-      <p:sp>
-        <p:nvSpPr>
-          <p:cNvPr id="43" name="TextBox 42"/>
-          <p:cNvSpPr txBox="1"/>
-          <p:nvPr/>
-        </p:nvSpPr>
-        <p:spPr>
-          <a:xfrm>
-            <a:off x="4427220" y="4488180"/>
-            <a:ext cx="2430780" cy="245745"/>
-          </a:xfrm>
-          <a:prstGeom prst="rect">
-            <a:avLst/>
-          </a:prstGeom>
-          <a:noFill/>
-        </p:spPr>
-        <p:txBody>
-          <a:bodyPr wrap="none" lIns="0" rIns="0" tIns="0" bIns="0">
-            <a:spAutoFit/>
-          </a:bodyPr>
-          <a:lstStyle/>
-          <a:p>
-            <a:pPr>
-              <a:lnSpc>
-                <a:spcPts val="1575"/>
-              </a:lnSpc>
-              <a:spcBef>
-                <a:spcPts val="0"/>
-              </a:spcBef>
-              <a:spcAft>
-                <a:spcPts val="0"/>
-              </a:spcAft>
-              <a:defRPr sz="1260" b="1">
-                <a:solidFill>
-                  <a:srgbClr val="7051E8"/>
-                </a:solidFill>
-                <a:latin typeface="DejaVu Sans"/>
-              </a:defRPr>
-            </a:pPr>
-            <a:r>
-              <a:t>Source / Severity</a:t>
-            </a:r>
-          </a:p>
-        </p:txBody>
-      </p:sp>
-      <p:sp>
-        <p:nvSpPr>
-          <p:cNvPr id="44" name="Rounded Rectangle 43"/>
-          <p:cNvSpPr/>
-          <p:nvPr/>
-        </p:nvSpPr>
-        <p:spPr>
-          <a:xfrm>
-            <a:off x="8077200" y="2636520"/>
-            <a:ext cx="3627120" cy="2667000"/>
+            <a:off x="8976360" y="2156460"/>
+            <a:ext cx="2727960" cy="2667000"/>
           </a:xfrm>
           <a:prstGeom prst="roundRect">
             <a:avLst>
@@ -12292,13 +11581,13 @@
       </p:sp>
       <p:sp>
         <p:nvSpPr>
-          <p:cNvPr id="45" name="Rounded Rectangle 44"/>
+          <p:cNvPr id="33" name="Rounded Rectangle 32"/>
           <p:cNvSpPr/>
           <p:nvPr/>
         </p:nvSpPr>
         <p:spPr>
           <a:xfrm>
-            <a:off x="8397240" y="2933700"/>
+            <a:off x="9265920" y="2453640"/>
             <a:ext cx="487680" cy="487680"/>
           </a:xfrm>
           <a:prstGeom prst="roundRect">
@@ -12339,14 +11628,434 @@
       </p:sp>
       <p:cxnSp>
         <p:nvCxnSpPr>
+          <p:cNvPr id="34" name="Connector 33"/>
+          <p:cNvCxnSpPr/>
+          <p:nvPr/>
+        </p:nvCxnSpPr>
+        <p:spPr>
+          <a:xfrm>
+            <a:off x="9357360" y="2377440"/>
+            <a:ext cx="0" cy="68580"/>
+          </a:xfrm>
+          <a:prstGeom prst="line">
+            <a:avLst/>
+          </a:prstGeom>
+          <a:ln w="30480">
+            <a:solidFill>
+              <a:srgbClr val="7051E8"/>
+            </a:solidFill>
+          </a:ln>
+        </p:spPr>
+        <p:style>
+          <a:lnRef idx="2">
+            <a:schemeClr val="accent1"/>
+          </a:lnRef>
+          <a:fillRef idx="0">
+            <a:schemeClr val="accent1"/>
+          </a:fillRef>
+          <a:effectRef idx="1">
+            <a:schemeClr val="accent1"/>
+          </a:effectRef>
+          <a:fontRef idx="minor">
+            <a:schemeClr val="tx1"/>
+          </a:fontRef>
+        </p:style>
+      </p:cxnSp>
+      <p:cxnSp>
+        <p:nvCxnSpPr>
+          <p:cNvPr id="35" name="Connector 34"/>
+          <p:cNvCxnSpPr/>
+          <p:nvPr/>
+        </p:nvCxnSpPr>
+        <p:spPr>
+          <a:xfrm>
+            <a:off x="9357360" y="2941320"/>
+            <a:ext cx="0" cy="76200"/>
+          </a:xfrm>
+          <a:prstGeom prst="line">
+            <a:avLst/>
+          </a:prstGeom>
+          <a:ln w="30480">
+            <a:solidFill>
+              <a:srgbClr val="7051E8"/>
+            </a:solidFill>
+          </a:ln>
+        </p:spPr>
+        <p:style>
+          <a:lnRef idx="2">
+            <a:schemeClr val="accent1"/>
+          </a:lnRef>
+          <a:fillRef idx="0">
+            <a:schemeClr val="accent1"/>
+          </a:fillRef>
+          <a:effectRef idx="1">
+            <a:schemeClr val="accent1"/>
+          </a:effectRef>
+          <a:fontRef idx="minor">
+            <a:schemeClr val="tx1"/>
+          </a:fontRef>
+        </p:style>
+      </p:cxnSp>
+      <p:cxnSp>
+        <p:nvCxnSpPr>
+          <p:cNvPr id="36" name="Connector 35"/>
+          <p:cNvCxnSpPr/>
+          <p:nvPr/>
+        </p:nvCxnSpPr>
+        <p:spPr>
+          <a:xfrm>
+            <a:off x="9182100" y="2575560"/>
+            <a:ext cx="83820" cy="0"/>
+          </a:xfrm>
+          <a:prstGeom prst="line">
+            <a:avLst/>
+          </a:prstGeom>
+          <a:ln w="30480">
+            <a:solidFill>
+              <a:srgbClr val="7051E8"/>
+            </a:solidFill>
+          </a:ln>
+        </p:spPr>
+        <p:style>
+          <a:lnRef idx="2">
+            <a:schemeClr val="accent1"/>
+          </a:lnRef>
+          <a:fillRef idx="0">
+            <a:schemeClr val="accent1"/>
+          </a:fillRef>
+          <a:effectRef idx="1">
+            <a:schemeClr val="accent1"/>
+          </a:effectRef>
+          <a:fontRef idx="minor">
+            <a:schemeClr val="tx1"/>
+          </a:fontRef>
+        </p:style>
+      </p:cxnSp>
+      <p:cxnSp>
+        <p:nvCxnSpPr>
+          <p:cNvPr id="37" name="Connector 36"/>
+          <p:cNvCxnSpPr/>
+          <p:nvPr/>
+        </p:nvCxnSpPr>
+        <p:spPr>
+          <a:xfrm>
+            <a:off x="9753600" y="2575560"/>
+            <a:ext cx="83820" cy="0"/>
+          </a:xfrm>
+          <a:prstGeom prst="line">
+            <a:avLst/>
+          </a:prstGeom>
+          <a:ln w="30480">
+            <a:solidFill>
+              <a:srgbClr val="7051E8"/>
+            </a:solidFill>
+          </a:ln>
+        </p:spPr>
+        <p:style>
+          <a:lnRef idx="2">
+            <a:schemeClr val="accent1"/>
+          </a:lnRef>
+          <a:fillRef idx="0">
+            <a:schemeClr val="accent1"/>
+          </a:fillRef>
+          <a:effectRef idx="1">
+            <a:schemeClr val="accent1"/>
+          </a:effectRef>
+          <a:fontRef idx="minor">
+            <a:schemeClr val="tx1"/>
+          </a:fontRef>
+        </p:style>
+      </p:cxnSp>
+      <p:cxnSp>
+        <p:nvCxnSpPr>
+          <p:cNvPr id="38" name="Connector 37"/>
+          <p:cNvCxnSpPr/>
+          <p:nvPr/>
+        </p:nvCxnSpPr>
+        <p:spPr>
+          <a:xfrm>
+            <a:off x="9509760" y="2377440"/>
+            <a:ext cx="0" cy="68580"/>
+          </a:xfrm>
+          <a:prstGeom prst="line">
+            <a:avLst/>
+          </a:prstGeom>
+          <a:ln w="30480">
+            <a:solidFill>
+              <a:srgbClr val="7051E8"/>
+            </a:solidFill>
+          </a:ln>
+        </p:spPr>
+        <p:style>
+          <a:lnRef idx="2">
+            <a:schemeClr val="accent1"/>
+          </a:lnRef>
+          <a:fillRef idx="0">
+            <a:schemeClr val="accent1"/>
+          </a:fillRef>
+          <a:effectRef idx="1">
+            <a:schemeClr val="accent1"/>
+          </a:effectRef>
+          <a:fontRef idx="minor">
+            <a:schemeClr val="tx1"/>
+          </a:fontRef>
+        </p:style>
+      </p:cxnSp>
+      <p:cxnSp>
+        <p:nvCxnSpPr>
+          <p:cNvPr id="39" name="Connector 38"/>
+          <p:cNvCxnSpPr/>
+          <p:nvPr/>
+        </p:nvCxnSpPr>
+        <p:spPr>
+          <a:xfrm>
+            <a:off x="9509760" y="2941320"/>
+            <a:ext cx="0" cy="76200"/>
+          </a:xfrm>
+          <a:prstGeom prst="line">
+            <a:avLst/>
+          </a:prstGeom>
+          <a:ln w="30480">
+            <a:solidFill>
+              <a:srgbClr val="7051E8"/>
+            </a:solidFill>
+          </a:ln>
+        </p:spPr>
+        <p:style>
+          <a:lnRef idx="2">
+            <a:schemeClr val="accent1"/>
+          </a:lnRef>
+          <a:fillRef idx="0">
+            <a:schemeClr val="accent1"/>
+          </a:fillRef>
+          <a:effectRef idx="1">
+            <a:schemeClr val="accent1"/>
+          </a:effectRef>
+          <a:fontRef idx="minor">
+            <a:schemeClr val="tx1"/>
+          </a:fontRef>
+        </p:style>
+      </p:cxnSp>
+      <p:cxnSp>
+        <p:nvCxnSpPr>
+          <p:cNvPr id="40" name="Connector 39"/>
+          <p:cNvCxnSpPr/>
+          <p:nvPr/>
+        </p:nvCxnSpPr>
+        <p:spPr>
+          <a:xfrm>
+            <a:off x="9182100" y="2727960"/>
+            <a:ext cx="83820" cy="0"/>
+          </a:xfrm>
+          <a:prstGeom prst="line">
+            <a:avLst/>
+          </a:prstGeom>
+          <a:ln w="30480">
+            <a:solidFill>
+              <a:srgbClr val="7051E8"/>
+            </a:solidFill>
+          </a:ln>
+        </p:spPr>
+        <p:style>
+          <a:lnRef idx="2">
+            <a:schemeClr val="accent1"/>
+          </a:lnRef>
+          <a:fillRef idx="0">
+            <a:schemeClr val="accent1"/>
+          </a:fillRef>
+          <a:effectRef idx="1">
+            <a:schemeClr val="accent1"/>
+          </a:effectRef>
+          <a:fontRef idx="minor">
+            <a:schemeClr val="tx1"/>
+          </a:fontRef>
+        </p:style>
+      </p:cxnSp>
+      <p:cxnSp>
+        <p:nvCxnSpPr>
+          <p:cNvPr id="41" name="Connector 40"/>
+          <p:cNvCxnSpPr/>
+          <p:nvPr/>
+        </p:nvCxnSpPr>
+        <p:spPr>
+          <a:xfrm>
+            <a:off x="9753600" y="2727960"/>
+            <a:ext cx="83820" cy="0"/>
+          </a:xfrm>
+          <a:prstGeom prst="line">
+            <a:avLst/>
+          </a:prstGeom>
+          <a:ln w="30480">
+            <a:solidFill>
+              <a:srgbClr val="7051E8"/>
+            </a:solidFill>
+          </a:ln>
+        </p:spPr>
+        <p:style>
+          <a:lnRef idx="2">
+            <a:schemeClr val="accent1"/>
+          </a:lnRef>
+          <a:fillRef idx="0">
+            <a:schemeClr val="accent1"/>
+          </a:fillRef>
+          <a:effectRef idx="1">
+            <a:schemeClr val="accent1"/>
+          </a:effectRef>
+          <a:fontRef idx="minor">
+            <a:schemeClr val="tx1"/>
+          </a:fontRef>
+        </p:style>
+      </p:cxnSp>
+      <p:cxnSp>
+        <p:nvCxnSpPr>
+          <p:cNvPr id="42" name="Connector 41"/>
+          <p:cNvCxnSpPr/>
+          <p:nvPr/>
+        </p:nvCxnSpPr>
+        <p:spPr>
+          <a:xfrm>
+            <a:off x="9662160" y="2377440"/>
+            <a:ext cx="0" cy="68580"/>
+          </a:xfrm>
+          <a:prstGeom prst="line">
+            <a:avLst/>
+          </a:prstGeom>
+          <a:ln w="30480">
+            <a:solidFill>
+              <a:srgbClr val="7051E8"/>
+            </a:solidFill>
+          </a:ln>
+        </p:spPr>
+        <p:style>
+          <a:lnRef idx="2">
+            <a:schemeClr val="accent1"/>
+          </a:lnRef>
+          <a:fillRef idx="0">
+            <a:schemeClr val="accent1"/>
+          </a:fillRef>
+          <a:effectRef idx="1">
+            <a:schemeClr val="accent1"/>
+          </a:effectRef>
+          <a:fontRef idx="minor">
+            <a:schemeClr val="tx1"/>
+          </a:fontRef>
+        </p:style>
+      </p:cxnSp>
+      <p:cxnSp>
+        <p:nvCxnSpPr>
+          <p:cNvPr id="43" name="Connector 42"/>
+          <p:cNvCxnSpPr/>
+          <p:nvPr/>
+        </p:nvCxnSpPr>
+        <p:spPr>
+          <a:xfrm>
+            <a:off x="9662160" y="2941320"/>
+            <a:ext cx="0" cy="76200"/>
+          </a:xfrm>
+          <a:prstGeom prst="line">
+            <a:avLst/>
+          </a:prstGeom>
+          <a:ln w="30480">
+            <a:solidFill>
+              <a:srgbClr val="7051E8"/>
+            </a:solidFill>
+          </a:ln>
+        </p:spPr>
+        <p:style>
+          <a:lnRef idx="2">
+            <a:schemeClr val="accent1"/>
+          </a:lnRef>
+          <a:fillRef idx="0">
+            <a:schemeClr val="accent1"/>
+          </a:fillRef>
+          <a:effectRef idx="1">
+            <a:schemeClr val="accent1"/>
+          </a:effectRef>
+          <a:fontRef idx="minor">
+            <a:schemeClr val="tx1"/>
+          </a:fontRef>
+        </p:style>
+      </p:cxnSp>
+      <p:cxnSp>
+        <p:nvCxnSpPr>
+          <p:cNvPr id="44" name="Connector 43"/>
+          <p:cNvCxnSpPr/>
+          <p:nvPr/>
+        </p:nvCxnSpPr>
+        <p:spPr>
+          <a:xfrm>
+            <a:off x="9182100" y="2880360"/>
+            <a:ext cx="83820" cy="0"/>
+          </a:xfrm>
+          <a:prstGeom prst="line">
+            <a:avLst/>
+          </a:prstGeom>
+          <a:ln w="30480">
+            <a:solidFill>
+              <a:srgbClr val="7051E8"/>
+            </a:solidFill>
+          </a:ln>
+        </p:spPr>
+        <p:style>
+          <a:lnRef idx="2">
+            <a:schemeClr val="accent1"/>
+          </a:lnRef>
+          <a:fillRef idx="0">
+            <a:schemeClr val="accent1"/>
+          </a:fillRef>
+          <a:effectRef idx="1">
+            <a:schemeClr val="accent1"/>
+          </a:effectRef>
+          <a:fontRef idx="minor">
+            <a:schemeClr val="tx1"/>
+          </a:fontRef>
+        </p:style>
+      </p:cxnSp>
+      <p:cxnSp>
+        <p:nvCxnSpPr>
+          <p:cNvPr id="45" name="Connector 44"/>
+          <p:cNvCxnSpPr/>
+          <p:nvPr/>
+        </p:nvCxnSpPr>
+        <p:spPr>
+          <a:xfrm>
+            <a:off x="9753600" y="2880360"/>
+            <a:ext cx="83820" cy="0"/>
+          </a:xfrm>
+          <a:prstGeom prst="line">
+            <a:avLst/>
+          </a:prstGeom>
+          <a:ln w="30480">
+            <a:solidFill>
+              <a:srgbClr val="7051E8"/>
+            </a:solidFill>
+          </a:ln>
+        </p:spPr>
+        <p:style>
+          <a:lnRef idx="2">
+            <a:schemeClr val="accent1"/>
+          </a:lnRef>
+          <a:fillRef idx="0">
+            <a:schemeClr val="accent1"/>
+          </a:fillRef>
+          <a:effectRef idx="1">
+            <a:schemeClr val="accent1"/>
+          </a:effectRef>
+          <a:fontRef idx="minor">
+            <a:schemeClr val="tx1"/>
+          </a:fontRef>
+        </p:style>
+      </p:cxnSp>
+      <p:cxnSp>
+        <p:nvCxnSpPr>
           <p:cNvPr id="46" name="Connector 45"/>
           <p:cNvCxnSpPr/>
           <p:nvPr/>
         </p:nvCxnSpPr>
         <p:spPr>
-          <a:xfrm>
-            <a:off x="8488680" y="2857500"/>
-            <a:ext cx="0" cy="68580"/>
+          <a:xfrm flipV="1">
+            <a:off x="9410700" y="2590800"/>
+            <a:ext cx="99060" cy="167640"/>
           </a:xfrm>
           <a:prstGeom prst="line">
             <a:avLst/>
@@ -12380,8 +12089,8 @@
         </p:nvCxnSpPr>
         <p:spPr>
           <a:xfrm>
-            <a:off x="8488680" y="3421380"/>
-            <a:ext cx="0" cy="76200"/>
+            <a:off x="9509760" y="2590800"/>
+            <a:ext cx="99060" cy="167640"/>
           </a:xfrm>
           <a:prstGeom prst="line">
             <a:avLst/>
@@ -12415,8 +12124,8 @@
         </p:nvCxnSpPr>
         <p:spPr>
           <a:xfrm>
-            <a:off x="8313420" y="3055620"/>
-            <a:ext cx="83820" cy="0"/>
+            <a:off x="9441180" y="2705100"/>
+            <a:ext cx="137160" cy="0"/>
           </a:xfrm>
           <a:prstGeom prst="line">
             <a:avLst/>
@@ -12442,436 +12151,16 @@
           </a:fontRef>
         </p:style>
       </p:cxnSp>
-      <p:cxnSp>
-        <p:nvCxnSpPr>
-          <p:cNvPr id="49" name="Connector 48"/>
-          <p:cNvCxnSpPr/>
-          <p:nvPr/>
-        </p:nvCxnSpPr>
-        <p:spPr>
-          <a:xfrm>
-            <a:off x="8884920" y="3055620"/>
-            <a:ext cx="83820" cy="0"/>
-          </a:xfrm>
-          <a:prstGeom prst="line">
-            <a:avLst/>
-          </a:prstGeom>
-          <a:ln w="30480">
-            <a:solidFill>
-              <a:srgbClr val="7051E8"/>
-            </a:solidFill>
-          </a:ln>
-        </p:spPr>
-        <p:style>
-          <a:lnRef idx="2">
-            <a:schemeClr val="accent1"/>
-          </a:lnRef>
-          <a:fillRef idx="0">
-            <a:schemeClr val="accent1"/>
-          </a:fillRef>
-          <a:effectRef idx="1">
-            <a:schemeClr val="accent1"/>
-          </a:effectRef>
-          <a:fontRef idx="minor">
-            <a:schemeClr val="tx1"/>
-          </a:fontRef>
-        </p:style>
-      </p:cxnSp>
-      <p:cxnSp>
-        <p:nvCxnSpPr>
-          <p:cNvPr id="50" name="Connector 49"/>
-          <p:cNvCxnSpPr/>
-          <p:nvPr/>
-        </p:nvCxnSpPr>
-        <p:spPr>
-          <a:xfrm>
-            <a:off x="8641080" y="2857500"/>
-            <a:ext cx="0" cy="68580"/>
-          </a:xfrm>
-          <a:prstGeom prst="line">
-            <a:avLst/>
-          </a:prstGeom>
-          <a:ln w="30480">
-            <a:solidFill>
-              <a:srgbClr val="7051E8"/>
-            </a:solidFill>
-          </a:ln>
-        </p:spPr>
-        <p:style>
-          <a:lnRef idx="2">
-            <a:schemeClr val="accent1"/>
-          </a:lnRef>
-          <a:fillRef idx="0">
-            <a:schemeClr val="accent1"/>
-          </a:fillRef>
-          <a:effectRef idx="1">
-            <a:schemeClr val="accent1"/>
-          </a:effectRef>
-          <a:fontRef idx="minor">
-            <a:schemeClr val="tx1"/>
-          </a:fontRef>
-        </p:style>
-      </p:cxnSp>
-      <p:cxnSp>
-        <p:nvCxnSpPr>
-          <p:cNvPr id="51" name="Connector 50"/>
-          <p:cNvCxnSpPr/>
-          <p:nvPr/>
-        </p:nvCxnSpPr>
-        <p:spPr>
-          <a:xfrm>
-            <a:off x="8641080" y="3421380"/>
-            <a:ext cx="0" cy="76200"/>
-          </a:xfrm>
-          <a:prstGeom prst="line">
-            <a:avLst/>
-          </a:prstGeom>
-          <a:ln w="30480">
-            <a:solidFill>
-              <a:srgbClr val="7051E8"/>
-            </a:solidFill>
-          </a:ln>
-        </p:spPr>
-        <p:style>
-          <a:lnRef idx="2">
-            <a:schemeClr val="accent1"/>
-          </a:lnRef>
-          <a:fillRef idx="0">
-            <a:schemeClr val="accent1"/>
-          </a:fillRef>
-          <a:effectRef idx="1">
-            <a:schemeClr val="accent1"/>
-          </a:effectRef>
-          <a:fontRef idx="minor">
-            <a:schemeClr val="tx1"/>
-          </a:fontRef>
-        </p:style>
-      </p:cxnSp>
-      <p:cxnSp>
-        <p:nvCxnSpPr>
-          <p:cNvPr id="52" name="Connector 51"/>
-          <p:cNvCxnSpPr/>
-          <p:nvPr/>
-        </p:nvCxnSpPr>
-        <p:spPr>
-          <a:xfrm>
-            <a:off x="8313420" y="3208020"/>
-            <a:ext cx="83820" cy="0"/>
-          </a:xfrm>
-          <a:prstGeom prst="line">
-            <a:avLst/>
-          </a:prstGeom>
-          <a:ln w="30480">
-            <a:solidFill>
-              <a:srgbClr val="7051E8"/>
-            </a:solidFill>
-          </a:ln>
-        </p:spPr>
-        <p:style>
-          <a:lnRef idx="2">
-            <a:schemeClr val="accent1"/>
-          </a:lnRef>
-          <a:fillRef idx="0">
-            <a:schemeClr val="accent1"/>
-          </a:fillRef>
-          <a:effectRef idx="1">
-            <a:schemeClr val="accent1"/>
-          </a:effectRef>
-          <a:fontRef idx="minor">
-            <a:schemeClr val="tx1"/>
-          </a:fontRef>
-        </p:style>
-      </p:cxnSp>
-      <p:cxnSp>
-        <p:nvCxnSpPr>
-          <p:cNvPr id="53" name="Connector 52"/>
-          <p:cNvCxnSpPr/>
-          <p:nvPr/>
-        </p:nvCxnSpPr>
-        <p:spPr>
-          <a:xfrm>
-            <a:off x="8884920" y="3208020"/>
-            <a:ext cx="83820" cy="0"/>
-          </a:xfrm>
-          <a:prstGeom prst="line">
-            <a:avLst/>
-          </a:prstGeom>
-          <a:ln w="30480">
-            <a:solidFill>
-              <a:srgbClr val="7051E8"/>
-            </a:solidFill>
-          </a:ln>
-        </p:spPr>
-        <p:style>
-          <a:lnRef idx="2">
-            <a:schemeClr val="accent1"/>
-          </a:lnRef>
-          <a:fillRef idx="0">
-            <a:schemeClr val="accent1"/>
-          </a:fillRef>
-          <a:effectRef idx="1">
-            <a:schemeClr val="accent1"/>
-          </a:effectRef>
-          <a:fontRef idx="minor">
-            <a:schemeClr val="tx1"/>
-          </a:fontRef>
-        </p:style>
-      </p:cxnSp>
-      <p:cxnSp>
-        <p:nvCxnSpPr>
-          <p:cNvPr id="54" name="Connector 53"/>
-          <p:cNvCxnSpPr/>
-          <p:nvPr/>
-        </p:nvCxnSpPr>
-        <p:spPr>
-          <a:xfrm>
-            <a:off x="8793480" y="2857500"/>
-            <a:ext cx="0" cy="68580"/>
-          </a:xfrm>
-          <a:prstGeom prst="line">
-            <a:avLst/>
-          </a:prstGeom>
-          <a:ln w="30480">
-            <a:solidFill>
-              <a:srgbClr val="7051E8"/>
-            </a:solidFill>
-          </a:ln>
-        </p:spPr>
-        <p:style>
-          <a:lnRef idx="2">
-            <a:schemeClr val="accent1"/>
-          </a:lnRef>
-          <a:fillRef idx="0">
-            <a:schemeClr val="accent1"/>
-          </a:fillRef>
-          <a:effectRef idx="1">
-            <a:schemeClr val="accent1"/>
-          </a:effectRef>
-          <a:fontRef idx="minor">
-            <a:schemeClr val="tx1"/>
-          </a:fontRef>
-        </p:style>
-      </p:cxnSp>
-      <p:cxnSp>
-        <p:nvCxnSpPr>
-          <p:cNvPr id="55" name="Connector 54"/>
-          <p:cNvCxnSpPr/>
-          <p:nvPr/>
-        </p:nvCxnSpPr>
-        <p:spPr>
-          <a:xfrm>
-            <a:off x="8793480" y="3421380"/>
-            <a:ext cx="0" cy="76200"/>
-          </a:xfrm>
-          <a:prstGeom prst="line">
-            <a:avLst/>
-          </a:prstGeom>
-          <a:ln w="30480">
-            <a:solidFill>
-              <a:srgbClr val="7051E8"/>
-            </a:solidFill>
-          </a:ln>
-        </p:spPr>
-        <p:style>
-          <a:lnRef idx="2">
-            <a:schemeClr val="accent1"/>
-          </a:lnRef>
-          <a:fillRef idx="0">
-            <a:schemeClr val="accent1"/>
-          </a:fillRef>
-          <a:effectRef idx="1">
-            <a:schemeClr val="accent1"/>
-          </a:effectRef>
-          <a:fontRef idx="minor">
-            <a:schemeClr val="tx1"/>
-          </a:fontRef>
-        </p:style>
-      </p:cxnSp>
-      <p:cxnSp>
-        <p:nvCxnSpPr>
-          <p:cNvPr id="56" name="Connector 55"/>
-          <p:cNvCxnSpPr/>
-          <p:nvPr/>
-        </p:nvCxnSpPr>
-        <p:spPr>
-          <a:xfrm>
-            <a:off x="8313420" y="3360420"/>
-            <a:ext cx="83820" cy="0"/>
-          </a:xfrm>
-          <a:prstGeom prst="line">
-            <a:avLst/>
-          </a:prstGeom>
-          <a:ln w="30480">
-            <a:solidFill>
-              <a:srgbClr val="7051E8"/>
-            </a:solidFill>
-          </a:ln>
-        </p:spPr>
-        <p:style>
-          <a:lnRef idx="2">
-            <a:schemeClr val="accent1"/>
-          </a:lnRef>
-          <a:fillRef idx="0">
-            <a:schemeClr val="accent1"/>
-          </a:fillRef>
-          <a:effectRef idx="1">
-            <a:schemeClr val="accent1"/>
-          </a:effectRef>
-          <a:fontRef idx="minor">
-            <a:schemeClr val="tx1"/>
-          </a:fontRef>
-        </p:style>
-      </p:cxnSp>
-      <p:cxnSp>
-        <p:nvCxnSpPr>
-          <p:cNvPr id="57" name="Connector 56"/>
-          <p:cNvCxnSpPr/>
-          <p:nvPr/>
-        </p:nvCxnSpPr>
-        <p:spPr>
-          <a:xfrm>
-            <a:off x="8884920" y="3360420"/>
-            <a:ext cx="83820" cy="0"/>
-          </a:xfrm>
-          <a:prstGeom prst="line">
-            <a:avLst/>
-          </a:prstGeom>
-          <a:ln w="30480">
-            <a:solidFill>
-              <a:srgbClr val="7051E8"/>
-            </a:solidFill>
-          </a:ln>
-        </p:spPr>
-        <p:style>
-          <a:lnRef idx="2">
-            <a:schemeClr val="accent1"/>
-          </a:lnRef>
-          <a:fillRef idx="0">
-            <a:schemeClr val="accent1"/>
-          </a:fillRef>
-          <a:effectRef idx="1">
-            <a:schemeClr val="accent1"/>
-          </a:effectRef>
-          <a:fontRef idx="minor">
-            <a:schemeClr val="tx1"/>
-          </a:fontRef>
-        </p:style>
-      </p:cxnSp>
-      <p:cxnSp>
-        <p:nvCxnSpPr>
-          <p:cNvPr id="58" name="Connector 57"/>
-          <p:cNvCxnSpPr/>
-          <p:nvPr/>
-        </p:nvCxnSpPr>
-        <p:spPr>
-          <a:xfrm flipV="1">
-            <a:off x="8542020" y="3070860"/>
-            <a:ext cx="99060" cy="167640"/>
-          </a:xfrm>
-          <a:prstGeom prst="line">
-            <a:avLst/>
-          </a:prstGeom>
-          <a:ln w="30480">
-            <a:solidFill>
-              <a:srgbClr val="7051E8"/>
-            </a:solidFill>
-          </a:ln>
-        </p:spPr>
-        <p:style>
-          <a:lnRef idx="2">
-            <a:schemeClr val="accent1"/>
-          </a:lnRef>
-          <a:fillRef idx="0">
-            <a:schemeClr val="accent1"/>
-          </a:fillRef>
-          <a:effectRef idx="1">
-            <a:schemeClr val="accent1"/>
-          </a:effectRef>
-          <a:fontRef idx="minor">
-            <a:schemeClr val="tx1"/>
-          </a:fontRef>
-        </p:style>
-      </p:cxnSp>
-      <p:cxnSp>
-        <p:nvCxnSpPr>
-          <p:cNvPr id="59" name="Connector 58"/>
-          <p:cNvCxnSpPr/>
-          <p:nvPr/>
-        </p:nvCxnSpPr>
-        <p:spPr>
-          <a:xfrm>
-            <a:off x="8641080" y="3070860"/>
-            <a:ext cx="99060" cy="167640"/>
-          </a:xfrm>
-          <a:prstGeom prst="line">
-            <a:avLst/>
-          </a:prstGeom>
-          <a:ln w="30480">
-            <a:solidFill>
-              <a:srgbClr val="7051E8"/>
-            </a:solidFill>
-          </a:ln>
-        </p:spPr>
-        <p:style>
-          <a:lnRef idx="2">
-            <a:schemeClr val="accent1"/>
-          </a:lnRef>
-          <a:fillRef idx="0">
-            <a:schemeClr val="accent1"/>
-          </a:fillRef>
-          <a:effectRef idx="1">
-            <a:schemeClr val="accent1"/>
-          </a:effectRef>
-          <a:fontRef idx="minor">
-            <a:schemeClr val="tx1"/>
-          </a:fontRef>
-        </p:style>
-      </p:cxnSp>
-      <p:cxnSp>
-        <p:nvCxnSpPr>
-          <p:cNvPr id="60" name="Connector 59"/>
-          <p:cNvCxnSpPr/>
-          <p:nvPr/>
-        </p:nvCxnSpPr>
-        <p:spPr>
-          <a:xfrm>
-            <a:off x="8572500" y="3185160"/>
-            <a:ext cx="137160" cy="0"/>
-          </a:xfrm>
-          <a:prstGeom prst="line">
-            <a:avLst/>
-          </a:prstGeom>
-          <a:ln w="30480">
-            <a:solidFill>
-              <a:srgbClr val="7051E8"/>
-            </a:solidFill>
-          </a:ln>
-        </p:spPr>
-        <p:style>
-          <a:lnRef idx="2">
-            <a:schemeClr val="accent1"/>
-          </a:lnRef>
-          <a:fillRef idx="0">
-            <a:schemeClr val="accent1"/>
-          </a:fillRef>
-          <a:effectRef idx="1">
-            <a:schemeClr val="accent1"/>
-          </a:effectRef>
-          <a:fontRef idx="minor">
-            <a:schemeClr val="tx1"/>
-          </a:fontRef>
-        </p:style>
-      </p:cxnSp>
-      <p:sp>
-        <p:nvSpPr>
-          <p:cNvPr id="61" name="TextBox 60"/>
+      <p:sp>
+        <p:nvSpPr>
+          <p:cNvPr id="49" name="TextBox 48"/>
           <p:cNvSpPr txBox="1"/>
           <p:nvPr/>
         </p:nvSpPr>
         <p:spPr>
           <a:xfrm>
-            <a:off x="9144000" y="2994660"/>
-            <a:ext cx="2415540" cy="426720"/>
+            <a:off x="9204960" y="3268980"/>
+            <a:ext cx="2400300" cy="379095"/>
           </a:xfrm>
           <a:prstGeom prst="rect">
             <a:avLst/>
@@ -12886,7 +12175,7 @@
           <a:p>
             <a:pPr>
               <a:lnSpc>
-                <a:spcPts val="3000"/>
+                <a:spcPts val="2625"/>
               </a:lnSpc>
               <a:spcBef>
                 <a:spcPts val="0"/>
@@ -12894,7 +12183,7 @@
               <a:spcAft>
                 <a:spcPts val="0"/>
               </a:spcAft>
-              <a:defRPr sz="2400" b="1">
+              <a:defRPr sz="2100" b="1">
                 <a:solidFill>
                   <a:srgbClr val="14213B"/>
                 </a:solidFill>
@@ -12909,14 +12198,14 @@
       </p:sp>
       <p:sp>
         <p:nvSpPr>
-          <p:cNvPr id="62" name="TextBox 61"/>
+          <p:cNvPr id="50" name="TextBox 49"/>
           <p:cNvSpPr txBox="1"/>
           <p:nvPr/>
         </p:nvSpPr>
         <p:spPr>
           <a:xfrm>
-            <a:off x="8336280" y="3848099"/>
-            <a:ext cx="3177540" cy="340995"/>
+            <a:off x="9204960" y="3756660"/>
+            <a:ext cx="2400300" cy="283845"/>
           </a:xfrm>
           <a:prstGeom prst="rect">
             <a:avLst/>
@@ -12931,7 +12220,7 @@
           <a:p>
             <a:pPr>
               <a:lnSpc>
-                <a:spcPts val="2325"/>
+                <a:spcPts val="1875"/>
               </a:lnSpc>
               <a:spcBef>
                 <a:spcPts val="0"/>
@@ -12939,7 +12228,7 @@
               <a:spcAft>
                 <a:spcPts val="0"/>
               </a:spcAft>
-              <a:defRPr sz="1859" b="0">
+              <a:defRPr sz="1500" b="0">
                 <a:solidFill>
                   <a:srgbClr val="21314A"/>
                 </a:solidFill>
@@ -12947,66 +12236,21 @@
               </a:defRPr>
             </a:pPr>
             <a:r>
-              <a:t>Observed facts</a:t>
-            </a:r>
-          </a:p>
-        </p:txBody>
-      </p:sp>
-      <p:sp>
-        <p:nvSpPr>
-          <p:cNvPr id="63" name="TextBox 62"/>
-          <p:cNvSpPr txBox="1"/>
-          <p:nvPr/>
-        </p:nvSpPr>
-        <p:spPr>
-          <a:xfrm>
-            <a:off x="8336280" y="4282440"/>
-            <a:ext cx="3177540" cy="321945"/>
-          </a:xfrm>
-          <a:prstGeom prst="rect">
-            <a:avLst/>
-          </a:prstGeom>
-          <a:noFill/>
-        </p:spPr>
-        <p:txBody>
-          <a:bodyPr wrap="none" lIns="0" rIns="0" tIns="0" bIns="0">
-            <a:spAutoFit/>
-          </a:bodyPr>
-          <a:lstStyle/>
-          <a:p>
-            <a:pPr>
-              <a:lnSpc>
-                <a:spcPts val="2175"/>
-              </a:lnSpc>
-              <a:spcBef>
-                <a:spcPts val="0"/>
-              </a:spcBef>
-              <a:spcAft>
-                <a:spcPts val="0"/>
-              </a:spcAft>
-              <a:defRPr sz="1739" b="0">
-                <a:solidFill>
-                  <a:srgbClr val="21314A"/>
-                </a:solidFill>
-                <a:latin typeface="DejaVu Sans"/>
-              </a:defRPr>
-            </a:pPr>
-            <a:r>
-              <a:t>Hypotheses (unconfirmed)</a:t>
-            </a:r>
-          </a:p>
-        </p:txBody>
-      </p:sp>
-      <p:sp>
-        <p:nvSpPr>
-          <p:cNvPr id="64" name="Rounded Rectangle 63"/>
+              <a:t>Facts + hypotheses</a:t>
+            </a:r>
+          </a:p>
+        </p:txBody>
+      </p:sp>
+      <p:sp>
+        <p:nvSpPr>
+          <p:cNvPr id="51" name="Rounded Rectangle 50"/>
           <p:cNvSpPr/>
           <p:nvPr/>
         </p:nvSpPr>
         <p:spPr>
           <a:xfrm>
-            <a:off x="8336280" y="4747260"/>
-            <a:ext cx="3032760" cy="335280"/>
+            <a:off x="9204960" y="4221480"/>
+            <a:ext cx="2270760" cy="335280"/>
           </a:xfrm>
           <a:prstGeom prst="roundRect">
             <a:avLst>
@@ -13044,14 +12288,14 @@
       </p:sp>
       <p:sp>
         <p:nvSpPr>
-          <p:cNvPr id="65" name="TextBox 64"/>
+          <p:cNvPr id="52" name="TextBox 51"/>
           <p:cNvSpPr txBox="1"/>
           <p:nvPr/>
         </p:nvSpPr>
         <p:spPr>
           <a:xfrm>
-            <a:off x="8473440" y="4808220"/>
-            <a:ext cx="2857500" cy="245745"/>
+            <a:off x="9342120" y="4282440"/>
+            <a:ext cx="2095499" cy="245745"/>
           </a:xfrm>
           <a:prstGeom prst="rect">
             <a:avLst/>
@@ -13089,14 +12333,14 @@
       </p:sp>
       <p:cxnSp>
         <p:nvCxnSpPr>
-          <p:cNvPr id="66" name="Connector 65"/>
+          <p:cNvPr id="53" name="Connector 52"/>
           <p:cNvCxnSpPr/>
           <p:nvPr/>
         </p:nvCxnSpPr>
         <p:spPr>
           <a:xfrm>
-            <a:off x="3139440" y="2895600"/>
-            <a:ext cx="556260" cy="0"/>
+            <a:off x="3154680" y="3489960"/>
+            <a:ext cx="1249680" cy="0"/>
           </a:xfrm>
           <a:prstGeom prst="line">
             <a:avLst/>
@@ -13124,13 +12368,13 @@
       </p:cxnSp>
       <p:sp>
         <p:nvSpPr>
-          <p:cNvPr id="67" name="Freeform 66"/>
+          <p:cNvPr id="54" name="Freeform 53"/>
           <p:cNvSpPr/>
           <p:nvPr/>
         </p:nvSpPr>
         <p:spPr>
           <a:xfrm>
-            <a:off x="3589020" y="2834640"/>
+            <a:off x="4297680" y="3429000"/>
             <a:ext cx="106680" cy="121920"/>
           </a:xfrm>
           <a:custGeom>
@@ -13185,14 +12429,14 @@
       </p:sp>
       <p:cxnSp>
         <p:nvCxnSpPr>
-          <p:cNvPr id="68" name="Connector 67"/>
+          <p:cNvPr id="55" name="Connector 54"/>
           <p:cNvCxnSpPr/>
           <p:nvPr/>
         </p:nvCxnSpPr>
         <p:spPr>
           <a:xfrm>
-            <a:off x="3695700" y="2895600"/>
-            <a:ext cx="0" cy="1059180"/>
+            <a:off x="7673340" y="3489960"/>
+            <a:ext cx="1226820" cy="0"/>
           </a:xfrm>
           <a:prstGeom prst="line">
             <a:avLst/>
@@ -13218,50 +12462,15 @@
           </a:fontRef>
         </p:style>
       </p:cxnSp>
-      <p:cxnSp>
-        <p:nvCxnSpPr>
-          <p:cNvPr id="69" name="Connector 68"/>
-          <p:cNvCxnSpPr/>
-          <p:nvPr/>
-        </p:nvCxnSpPr>
-        <p:spPr>
-          <a:xfrm>
-            <a:off x="3695700" y="3954780"/>
-            <a:ext cx="266699" cy="0"/>
-          </a:xfrm>
-          <a:prstGeom prst="line">
-            <a:avLst/>
-          </a:prstGeom>
-          <a:ln w="45719">
-            <a:solidFill>
-              <a:srgbClr val="7051E8"/>
-            </a:solidFill>
-          </a:ln>
-        </p:spPr>
-        <p:style>
-          <a:lnRef idx="2">
-            <a:schemeClr val="accent1"/>
-          </a:lnRef>
-          <a:fillRef idx="0">
-            <a:schemeClr val="accent1"/>
-          </a:fillRef>
-          <a:effectRef idx="1">
-            <a:schemeClr val="accent1"/>
-          </a:effectRef>
-          <a:fontRef idx="minor">
-            <a:schemeClr val="tx1"/>
-          </a:fontRef>
-        </p:style>
-      </p:cxnSp>
-      <p:sp>
-        <p:nvSpPr>
-          <p:cNvPr id="70" name="Freeform 69"/>
+      <p:sp>
+        <p:nvSpPr>
+          <p:cNvPr id="56" name="Freeform 55"/>
           <p:cNvSpPr/>
           <p:nvPr/>
         </p:nvSpPr>
         <p:spPr>
           <a:xfrm>
-            <a:off x="3855720" y="3893820"/>
+            <a:off x="8793480" y="3429000"/>
             <a:ext cx="106680" cy="121920"/>
           </a:xfrm>
           <a:custGeom>
@@ -13314,145 +12523,24 @@
           </a:p>
         </p:txBody>
       </p:sp>
-      <p:cxnSp>
-        <p:nvCxnSpPr>
-          <p:cNvPr id="71" name="Connector 70"/>
-          <p:cNvCxnSpPr/>
-          <p:nvPr/>
-        </p:nvCxnSpPr>
-        <p:spPr>
-          <a:xfrm>
-            <a:off x="3139440" y="4937760"/>
-            <a:ext cx="556260" cy="0"/>
-          </a:xfrm>
-          <a:prstGeom prst="line">
-            <a:avLst/>
-          </a:prstGeom>
-          <a:ln w="45719">
-            <a:solidFill>
-              <a:srgbClr val="7051E8"/>
-            </a:solidFill>
-          </a:ln>
-        </p:spPr>
-        <p:style>
-          <a:lnRef idx="2">
-            <a:schemeClr val="accent1"/>
-          </a:lnRef>
-          <a:fillRef idx="0">
-            <a:schemeClr val="accent1"/>
-          </a:fillRef>
-          <a:effectRef idx="1">
-            <a:schemeClr val="accent1"/>
-          </a:effectRef>
-          <a:fontRef idx="minor">
-            <a:schemeClr val="tx1"/>
-          </a:fontRef>
-        </p:style>
-      </p:cxnSp>
-      <p:cxnSp>
-        <p:nvCxnSpPr>
-          <p:cNvPr id="72" name="Connector 71"/>
-          <p:cNvCxnSpPr/>
-          <p:nvPr/>
-        </p:nvCxnSpPr>
-        <p:spPr>
-          <a:xfrm flipV="1">
-            <a:off x="3695700" y="3954780"/>
-            <a:ext cx="0" cy="982980"/>
-          </a:xfrm>
-          <a:prstGeom prst="line">
-            <a:avLst/>
-          </a:prstGeom>
-          <a:ln w="45719">
-            <a:solidFill>
-              <a:srgbClr val="7051E8"/>
-            </a:solidFill>
-          </a:ln>
-        </p:spPr>
-        <p:style>
-          <a:lnRef idx="2">
-            <a:schemeClr val="accent1"/>
-          </a:lnRef>
-          <a:fillRef idx="0">
-            <a:schemeClr val="accent1"/>
-          </a:fillRef>
-          <a:effectRef idx="1">
-            <a:schemeClr val="accent1"/>
-          </a:effectRef>
-          <a:fontRef idx="minor">
-            <a:schemeClr val="tx1"/>
-          </a:fontRef>
-        </p:style>
-      </p:cxnSp>
-      <p:cxnSp>
-        <p:nvCxnSpPr>
-          <p:cNvPr id="73" name="Connector 72"/>
-          <p:cNvCxnSpPr/>
-          <p:nvPr/>
-        </p:nvCxnSpPr>
-        <p:spPr>
-          <a:xfrm>
-            <a:off x="7170420" y="3954780"/>
-            <a:ext cx="853440" cy="0"/>
-          </a:xfrm>
-          <a:prstGeom prst="line">
-            <a:avLst/>
-          </a:prstGeom>
-          <a:ln w="45719">
-            <a:solidFill>
-              <a:srgbClr val="7051E8"/>
-            </a:solidFill>
-          </a:ln>
-        </p:spPr>
-        <p:style>
-          <a:lnRef idx="2">
-            <a:schemeClr val="accent1"/>
-          </a:lnRef>
-          <a:fillRef idx="0">
-            <a:schemeClr val="accent1"/>
-          </a:fillRef>
-          <a:effectRef idx="1">
-            <a:schemeClr val="accent1"/>
-          </a:effectRef>
-          <a:fontRef idx="minor">
-            <a:schemeClr val="tx1"/>
-          </a:fontRef>
-        </p:style>
-      </p:cxnSp>
-      <p:sp>
-        <p:nvSpPr>
-          <p:cNvPr id="74" name="Freeform 73"/>
+      <p:sp>
+        <p:nvSpPr>
+          <p:cNvPr id="57" name="Rounded Rectangle 56"/>
           <p:cNvSpPr/>
           <p:nvPr/>
         </p:nvSpPr>
         <p:spPr>
           <a:xfrm>
-            <a:off x="7917180" y="3893820"/>
-            <a:ext cx="106680" cy="121920"/>
-          </a:xfrm>
-          <a:custGeom>
-            <a:avLst/>
-            <a:gdLst/>
-            <a:ahLst/>
-            <a:cxnLst/>
-            <a:rect l="l" t="t" r="r" b="b"/>
-            <a:pathLst>
-              <a:path w="14" h="16">
-                <a:moveTo>
-                  <a:pt x="14" y="8"/>
-                </a:moveTo>
-                <a:lnTo>
-                  <a:pt x="0" y="16"/>
-                </a:lnTo>
-                <a:lnTo>
-                  <a:pt x="0" y="0"/>
-                </a:lnTo>
-                <a:close/>
-              </a:path>
-            </a:pathLst>
-          </a:custGeom>
+            <a:off x="487680" y="5204460"/>
+            <a:ext cx="11216640" cy="723900"/>
+          </a:xfrm>
+          <a:prstGeom prst="roundRect">
+            <a:avLst>
+              <a:gd name="adj" fmla="val 23157"/>
+            </a:avLst>
+          </a:prstGeom>
           <a:solidFill>
-            <a:srgbClr val="7051E8"/>
+            <a:srgbClr val="E9E4FF"/>
           </a:solidFill>
           <a:ln>
             <a:noFill/>
@@ -13482,14 +12570,14 @@
       </p:sp>
       <p:sp>
         <p:nvSpPr>
-          <p:cNvPr id="75" name="TextBox 74"/>
+          <p:cNvPr id="58" name="TextBox 57"/>
           <p:cNvSpPr txBox="1"/>
           <p:nvPr/>
         </p:nvSpPr>
         <p:spPr>
           <a:xfrm>
-            <a:off x="4038600" y="5654040"/>
-            <a:ext cx="7673340" cy="312420"/>
+            <a:off x="701040" y="5356860"/>
+            <a:ext cx="10797540" cy="302895"/>
           </a:xfrm>
           <a:prstGeom prst="rect">
             <a:avLst/>
@@ -13504,7 +12592,7 @@
           <a:p>
             <a:pPr>
               <a:lnSpc>
-                <a:spcPts val="2100"/>
+                <a:spcPts val="2025"/>
               </a:lnSpc>
               <a:spcBef>
                 <a:spcPts val="0"/>
@@ -13512,15 +12600,60 @@
               <a:spcAft>
                 <a:spcPts val="0"/>
               </a:spcAft>
-              <a:defRPr sz="1680" b="1">
+              <a:defRPr sz="1620" b="1">
                 <a:solidFill>
-                  <a:srgbClr val="168575"/>
+                  <a:srgbClr val="7051E8"/>
                 </a:solidFill>
                 <a:latin typeface="DejaVu Sans"/>
               </a:defRPr>
             </a:pPr>
             <a:r>
-              <a:t>Evidence supports review. The operator decides.</a:t>
+              <a:t>GitHub adapter is available separately.</a:t>
+            </a:r>
+          </a:p>
+        </p:txBody>
+      </p:sp>
+      <p:sp>
+        <p:nvSpPr>
+          <p:cNvPr id="59" name="TextBox 58"/>
+          <p:cNvSpPr txBox="1"/>
+          <p:nvPr/>
+        </p:nvSpPr>
+        <p:spPr>
+          <a:xfrm>
+            <a:off x="701040" y="5669280"/>
+            <a:ext cx="10797540" cy="274320"/>
+          </a:xfrm>
+          <a:prstGeom prst="rect">
+            <a:avLst/>
+          </a:prstGeom>
+          <a:noFill/>
+        </p:spPr>
+        <p:txBody>
+          <a:bodyPr wrap="none" lIns="0" rIns="0" tIns="0" bIns="0">
+            <a:spAutoFit/>
+          </a:bodyPr>
+          <a:lstStyle/>
+          <a:p>
+            <a:pPr>
+              <a:lnSpc>
+                <a:spcPts val="1800"/>
+              </a:lnSpc>
+              <a:spcBef>
+                <a:spcPts val="0"/>
+              </a:spcBef>
+              <a:spcAft>
+                <a:spcPts val="0"/>
+              </a:spcAft>
+              <a:defRPr sz="1439" b="0">
+                <a:solidFill>
+                  <a:srgbClr val="65738C"/>
+                </a:solidFill>
+                <a:latin typeface="DejaVu Sans"/>
+              </a:defRPr>
+            </a:pPr>
+            <a:r>
+              <a:t>Software-to-device mapping is not implemented.</a:t>
             </a:r>
           </a:p>
         </p:txBody>
@@ -13669,104 +12802,14 @@
               </a:defRPr>
             </a:pPr>
             <a:r>
-              <a:t>OPSREPLAY / HACKATHON PROTOTYPE</a:t>
-            </a:r>
-          </a:p>
-        </p:txBody>
-      </p:sp>
-      <p:sp>
-        <p:nvSpPr>
-          <p:cNvPr id="5" name="Rounded Rectangle 4"/>
-          <p:cNvSpPr/>
-          <p:nvPr/>
-        </p:nvSpPr>
-        <p:spPr>
-          <a:xfrm>
-            <a:off x="9982200" y="327660"/>
-            <a:ext cx="1714500" cy="335280"/>
-          </a:xfrm>
-          <a:prstGeom prst="roundRect">
-            <a:avLst>
-              <a:gd name="adj" fmla="val 25000"/>
-            </a:avLst>
-          </a:prstGeom>
-          <a:solidFill>
-            <a:srgbClr val="14213B"/>
-          </a:solidFill>
-          <a:ln>
-            <a:noFill/>
-          </a:ln>
-        </p:spPr>
-        <p:style>
-          <a:lnRef idx="1">
-            <a:schemeClr val="accent1"/>
-          </a:lnRef>
-          <a:fillRef idx="3">
-            <a:schemeClr val="accent1"/>
-          </a:fillRef>
-          <a:effectRef idx="2">
-            <a:schemeClr val="accent1"/>
-          </a:effectRef>
-          <a:fontRef idx="minor">
-            <a:schemeClr val="lt1"/>
-          </a:fontRef>
-        </p:style>
-        <p:txBody>
-          <a:bodyPr rtlCol="0" anchor="ctr"/>
-          <a:lstStyle/>
-          <a:p>
-            <a:pPr algn="ctr"/>
-          </a:p>
-        </p:txBody>
-      </p:sp>
-      <p:sp>
-        <p:nvSpPr>
-          <p:cNvPr id="6" name="TextBox 5"/>
-          <p:cNvSpPr txBox="1"/>
-          <p:nvPr/>
-        </p:nvSpPr>
-        <p:spPr>
-          <a:xfrm>
-            <a:off x="10119360" y="388620"/>
-            <a:ext cx="1539240" cy="245745"/>
-          </a:xfrm>
-          <a:prstGeom prst="rect">
-            <a:avLst/>
-          </a:prstGeom>
-          <a:noFill/>
-        </p:spPr>
-        <p:txBody>
-          <a:bodyPr wrap="none" lIns="0" rIns="0" tIns="0" bIns="0">
-            <a:spAutoFit/>
-          </a:bodyPr>
-          <a:lstStyle/>
-          <a:p>
-            <a:pPr>
-              <a:lnSpc>
-                <a:spcPts val="1575"/>
-              </a:lnSpc>
-              <a:spcBef>
-                <a:spcPts val="0"/>
-              </a:spcBef>
-              <a:spcAft>
-                <a:spcPts val="0"/>
-              </a:spcAft>
-              <a:defRPr sz="1260" b="1">
-                <a:solidFill>
-                  <a:srgbClr val="FFFFFF"/>
-                </a:solidFill>
-                <a:latin typeface="DejaVu Sans"/>
-              </a:defRPr>
-            </a:pPr>
-            <a:r>
-              <a:t>SOLO PROJECT</a:t>
-            </a:r>
-          </a:p>
-        </p:txBody>
-      </p:sp>
-      <p:sp>
-        <p:nvSpPr>
-          <p:cNvPr id="7" name="TextBox 6"/>
+              <a:t>OPSREPLAY / INCIDENT REPLAY</a:t>
+            </a:r>
+          </a:p>
+        </p:txBody>
+      </p:sp>
+      <p:sp>
+        <p:nvSpPr>
+          <p:cNvPr id="5" name="TextBox 4"/>
           <p:cNvSpPr txBox="1"/>
           <p:nvPr/>
         </p:nvSpPr>
@@ -13804,14 +12847,14 @@
               </a:defRPr>
             </a:pPr>
             <a:r>
-              <a:t>Built as a solo hackathon prototype.</a:t>
-            </a:r>
-          </a:p>
-        </p:txBody>
-      </p:sp>
-      <p:sp>
-        <p:nvSpPr>
-          <p:cNvPr id="8" name="TextBox 7"/>
+              <a:t>What the prototype implements.</a:t>
+            </a:r>
+          </a:p>
+        </p:txBody>
+      </p:sp>
+      <p:sp>
+        <p:nvSpPr>
+          <p:cNvPr id="6" name="TextBox 5"/>
           <p:cNvSpPr txBox="1"/>
           <p:nvPr/>
         </p:nvSpPr>
@@ -13856,7 +12899,7 @@
       </p:sp>
       <p:cxnSp>
         <p:nvCxnSpPr>
-          <p:cNvPr id="9" name="Connector 8"/>
+          <p:cNvPr id="7" name="Connector 6"/>
           <p:cNvCxnSpPr/>
           <p:nvPr/>
         </p:nvCxnSpPr>
@@ -13891,7 +12934,7 @@
       </p:cxnSp>
       <p:sp>
         <p:nvSpPr>
-          <p:cNvPr id="10" name="TextBox 9"/>
+          <p:cNvPr id="8" name="TextBox 7"/>
           <p:cNvSpPr txBox="1"/>
           <p:nvPr/>
         </p:nvSpPr>
@@ -13929,14 +12972,14 @@
               </a:defRPr>
             </a:pPr>
             <a:r>
-              <a:t>SIMULATED IoT · Public GitHub API · Gemini</a:t>
-            </a:r>
-          </a:p>
-        </p:txBody>
-      </p:sp>
-      <p:sp>
-        <p:nvSpPr>
-          <p:cNvPr id="11" name="TextBox 10"/>
+              <a:t>SIMULATED IoT · Replay · Evidence</a:t>
+            </a:r>
+          </a:p>
+        </p:txBody>
+      </p:sp>
+      <p:sp>
+        <p:nvSpPr>
+          <p:cNvPr id="9" name="TextBox 8"/>
           <p:cNvSpPr txBox="1"/>
           <p:nvPr/>
         </p:nvSpPr>
@@ -13981,7 +13024,7 @@
       </p:sp>
       <p:sp>
         <p:nvSpPr>
-          <p:cNvPr id="12" name="Rounded Rectangle 11"/>
+          <p:cNvPr id="10" name="Rounded Rectangle 9"/>
           <p:cNvSpPr/>
           <p:nvPr/>
         </p:nvSpPr>
@@ -14026,7 +13069,7 @@
       </p:sp>
       <p:sp>
         <p:nvSpPr>
-          <p:cNvPr id="13" name="Rounded Rectangle 12"/>
+          <p:cNvPr id="11" name="Rounded Rectangle 10"/>
           <p:cNvSpPr/>
           <p:nvPr/>
         </p:nvSpPr>
@@ -14073,14 +13116,84 @@
       </p:sp>
       <p:cxnSp>
         <p:nvCxnSpPr>
+          <p:cNvPr id="12" name="Connector 11"/>
+          <p:cNvCxnSpPr/>
+          <p:nvPr/>
+        </p:nvCxnSpPr>
+        <p:spPr>
+          <a:xfrm>
+            <a:off x="1036320" y="2529840"/>
+            <a:ext cx="0" cy="121920"/>
+          </a:xfrm>
+          <a:prstGeom prst="line">
+            <a:avLst/>
+          </a:prstGeom>
+          <a:ln w="30480">
+            <a:solidFill>
+              <a:srgbClr val="7051E8"/>
+            </a:solidFill>
+          </a:ln>
+        </p:spPr>
+        <p:style>
+          <a:lnRef idx="2">
+            <a:schemeClr val="accent1"/>
+          </a:lnRef>
+          <a:fillRef idx="0">
+            <a:schemeClr val="accent1"/>
+          </a:fillRef>
+          <a:effectRef idx="1">
+            <a:schemeClr val="accent1"/>
+          </a:effectRef>
+          <a:fontRef idx="minor">
+            <a:schemeClr val="tx1"/>
+          </a:fontRef>
+        </p:style>
+      </p:cxnSp>
+      <p:cxnSp>
+        <p:nvCxnSpPr>
+          <p:cNvPr id="13" name="Connector 12"/>
+          <p:cNvCxnSpPr/>
+          <p:nvPr/>
+        </p:nvCxnSpPr>
+        <p:spPr>
+          <a:xfrm>
+            <a:off x="853440" y="2651760"/>
+            <a:ext cx="365760" cy="0"/>
+          </a:xfrm>
+          <a:prstGeom prst="line">
+            <a:avLst/>
+          </a:prstGeom>
+          <a:ln w="30480">
+            <a:solidFill>
+              <a:srgbClr val="7051E8"/>
+            </a:solidFill>
+          </a:ln>
+        </p:spPr>
+        <p:style>
+          <a:lnRef idx="2">
+            <a:schemeClr val="accent1"/>
+          </a:lnRef>
+          <a:fillRef idx="0">
+            <a:schemeClr val="accent1"/>
+          </a:fillRef>
+          <a:effectRef idx="1">
+            <a:schemeClr val="accent1"/>
+          </a:effectRef>
+          <a:fontRef idx="minor">
+            <a:schemeClr val="tx1"/>
+          </a:fontRef>
+        </p:style>
+      </p:cxnSp>
+      <p:cxnSp>
+        <p:nvCxnSpPr>
           <p:cNvPr id="14" name="Connector 13"/>
           <p:cNvCxnSpPr/>
           <p:nvPr/>
         </p:nvCxnSpPr>
         <p:spPr>
           <a:xfrm>
-            <a:off x="1036320" y="2529840"/>
-            <a:ext cx="0" cy="121920"/>
+            <a:off x="861060" y="2301240"/>
+            <a:ext cx="114300" cy="0"/>
           </a:xfrm>
           <a:prstGeom prst="line">
             <a:avLst/>
@@ -14113,9 +13226,9 @@
           <p:nvPr/>
         </p:nvCxnSpPr>
         <p:spPr>
-          <a:xfrm>
-            <a:off x="853440" y="2651760"/>
-            <a:ext cx="365760" cy="0"/>
+          <a:xfrm flipV="1">
+            <a:off x="975360" y="2202180"/>
+            <a:ext cx="68580" cy="99060"/>
           </a:xfrm>
           <a:prstGeom prst="line">
             <a:avLst/>
@@ -14149,8 +13262,8 @@
         </p:nvCxnSpPr>
         <p:spPr>
           <a:xfrm>
-            <a:off x="861060" y="2301240"/>
-            <a:ext cx="114300" cy="0"/>
+            <a:off x="1043940" y="2202180"/>
+            <a:ext cx="83820" cy="205740"/>
           </a:xfrm>
           <a:prstGeom prst="line">
             <a:avLst/>
@@ -14184,8 +13297,8 @@
         </p:nvCxnSpPr>
         <p:spPr>
           <a:xfrm flipV="1">
-            <a:off x="975360" y="2202180"/>
-            <a:ext cx="68580" cy="99060"/>
+            <a:off x="1127760" y="2293620"/>
+            <a:ext cx="99060" cy="114300"/>
           </a:xfrm>
           <a:prstGeom prst="line">
             <a:avLst/>
@@ -14211,79 +13324,9 @@
           </a:fontRef>
         </p:style>
       </p:cxnSp>
-      <p:cxnSp>
-        <p:nvCxnSpPr>
-          <p:cNvPr id="18" name="Connector 17"/>
-          <p:cNvCxnSpPr/>
-          <p:nvPr/>
-        </p:nvCxnSpPr>
-        <p:spPr>
-          <a:xfrm>
-            <a:off x="1043940" y="2202180"/>
-            <a:ext cx="83820" cy="205740"/>
-          </a:xfrm>
-          <a:prstGeom prst="line">
-            <a:avLst/>
-          </a:prstGeom>
-          <a:ln w="30480">
-            <a:solidFill>
-              <a:srgbClr val="7051E8"/>
-            </a:solidFill>
-          </a:ln>
-        </p:spPr>
-        <p:style>
-          <a:lnRef idx="2">
-            <a:schemeClr val="accent1"/>
-          </a:lnRef>
-          <a:fillRef idx="0">
-            <a:schemeClr val="accent1"/>
-          </a:fillRef>
-          <a:effectRef idx="1">
-            <a:schemeClr val="accent1"/>
-          </a:effectRef>
-          <a:fontRef idx="minor">
-            <a:schemeClr val="tx1"/>
-          </a:fontRef>
-        </p:style>
-      </p:cxnSp>
-      <p:cxnSp>
-        <p:nvCxnSpPr>
-          <p:cNvPr id="19" name="Connector 18"/>
-          <p:cNvCxnSpPr/>
-          <p:nvPr/>
-        </p:nvCxnSpPr>
-        <p:spPr>
-          <a:xfrm flipV="1">
-            <a:off x="1127760" y="2293620"/>
-            <a:ext cx="99060" cy="114300"/>
-          </a:xfrm>
-          <a:prstGeom prst="line">
-            <a:avLst/>
-          </a:prstGeom>
-          <a:ln w="30480">
-            <a:solidFill>
-              <a:srgbClr val="7051E8"/>
-            </a:solidFill>
-          </a:ln>
-        </p:spPr>
-        <p:style>
-          <a:lnRef idx="2">
-            <a:schemeClr val="accent1"/>
-          </a:lnRef>
-          <a:fillRef idx="0">
-            <a:schemeClr val="accent1"/>
-          </a:fillRef>
-          <a:effectRef idx="1">
-            <a:schemeClr val="accent1"/>
-          </a:effectRef>
-          <a:fontRef idx="minor">
-            <a:schemeClr val="tx1"/>
-          </a:fontRef>
-        </p:style>
-      </p:cxnSp>
-      <p:sp>
-        <p:nvSpPr>
-          <p:cNvPr id="20" name="TextBox 19"/>
+      <p:sp>
+        <p:nvSpPr>
+          <p:cNvPr id="18" name="TextBox 17"/>
           <p:cNvSpPr txBox="1"/>
           <p:nvPr/>
         </p:nvSpPr>
@@ -14328,7 +13371,7 @@
       </p:sp>
       <p:sp>
         <p:nvSpPr>
-          <p:cNvPr id="21" name="TextBox 20"/>
+          <p:cNvPr id="19" name="TextBox 18"/>
           <p:cNvSpPr txBox="1"/>
           <p:nvPr/>
         </p:nvSpPr>
@@ -14373,7 +13416,7 @@
       </p:sp>
       <p:cxnSp>
         <p:nvCxnSpPr>
-          <p:cNvPr id="22" name="Connector 21"/>
+          <p:cNvPr id="20" name="Connector 19"/>
           <p:cNvCxnSpPr/>
           <p:nvPr/>
         </p:nvCxnSpPr>
@@ -14408,7 +13451,7 @@
       </p:cxnSp>
       <p:sp>
         <p:nvSpPr>
-          <p:cNvPr id="23" name="Rounded Rectangle 22"/>
+          <p:cNvPr id="21" name="Rounded Rectangle 20"/>
           <p:cNvSpPr/>
           <p:nvPr/>
         </p:nvSpPr>
@@ -14453,7 +13496,7 @@
       </p:sp>
       <p:sp>
         <p:nvSpPr>
-          <p:cNvPr id="24" name="Oval 23"/>
+          <p:cNvPr id="22" name="Oval 21"/>
           <p:cNvSpPr/>
           <p:nvPr/>
         </p:nvSpPr>
@@ -14498,7 +13541,7 @@
       </p:sp>
       <p:cxnSp>
         <p:nvCxnSpPr>
-          <p:cNvPr id="25" name="Connector 24"/>
+          <p:cNvPr id="23" name="Connector 22"/>
           <p:cNvCxnSpPr/>
           <p:nvPr/>
         </p:nvCxnSpPr>
@@ -14506,6 +13549,76 @@
           <a:xfrm flipH="1" flipV="1">
             <a:off x="4671060" y="2103120"/>
             <a:ext cx="22860" cy="129540"/>
+          </a:xfrm>
+          <a:prstGeom prst="line">
+            <a:avLst/>
+          </a:prstGeom>
+          <a:ln w="30480">
+            <a:solidFill>
+              <a:srgbClr val="7051E8"/>
+            </a:solidFill>
+          </a:ln>
+        </p:spPr>
+        <p:style>
+          <a:lnRef idx="2">
+            <a:schemeClr val="accent1"/>
+          </a:lnRef>
+          <a:fillRef idx="0">
+            <a:schemeClr val="accent1"/>
+          </a:fillRef>
+          <a:effectRef idx="1">
+            <a:schemeClr val="accent1"/>
+          </a:effectRef>
+          <a:fontRef idx="minor">
+            <a:schemeClr val="tx1"/>
+          </a:fontRef>
+        </p:style>
+      </p:cxnSp>
+      <p:cxnSp>
+        <p:nvCxnSpPr>
+          <p:cNvPr id="24" name="Connector 23"/>
+          <p:cNvCxnSpPr/>
+          <p:nvPr/>
+        </p:nvCxnSpPr>
+        <p:spPr>
+          <a:xfrm>
+            <a:off x="4671060" y="2103120"/>
+            <a:ext cx="129540" cy="68580"/>
+          </a:xfrm>
+          <a:prstGeom prst="line">
+            <a:avLst/>
+          </a:prstGeom>
+          <a:ln w="30480">
+            <a:solidFill>
+              <a:srgbClr val="7051E8"/>
+            </a:solidFill>
+          </a:ln>
+        </p:spPr>
+        <p:style>
+          <a:lnRef idx="2">
+            <a:schemeClr val="accent1"/>
+          </a:lnRef>
+          <a:fillRef idx="0">
+            <a:schemeClr val="accent1"/>
+          </a:fillRef>
+          <a:effectRef idx="1">
+            <a:schemeClr val="accent1"/>
+          </a:effectRef>
+          <a:fontRef idx="minor">
+            <a:schemeClr val="tx1"/>
+          </a:fontRef>
+        </p:style>
+      </p:cxnSp>
+      <p:cxnSp>
+        <p:nvCxnSpPr>
+          <p:cNvPr id="25" name="Connector 24"/>
+          <p:cNvCxnSpPr/>
+          <p:nvPr/>
+        </p:nvCxnSpPr>
+        <p:spPr>
+          <a:xfrm flipV="1">
+            <a:off x="4907280" y="2103120"/>
+            <a:ext cx="129540" cy="68580"/>
           </a:xfrm>
           <a:prstGeom prst="line">
             <a:avLst/>
@@ -14538,9 +13651,9 @@
           <p:nvPr/>
         </p:nvCxnSpPr>
         <p:spPr>
-          <a:xfrm>
-            <a:off x="4671060" y="2103120"/>
-            <a:ext cx="129540" cy="68580"/>
+          <a:xfrm flipH="1">
+            <a:off x="5013960" y="2103120"/>
+            <a:ext cx="22860" cy="129540"/>
           </a:xfrm>
           <a:prstGeom prst="line">
             <a:avLst/>
@@ -14573,9 +13686,9 @@
           <p:nvPr/>
         </p:nvCxnSpPr>
         <p:spPr>
-          <a:xfrm flipV="1">
-            <a:off x="4907280" y="2103120"/>
-            <a:ext cx="129540" cy="68580"/>
+          <a:xfrm>
+            <a:off x="4846320" y="2606040"/>
+            <a:ext cx="0" cy="106680"/>
           </a:xfrm>
           <a:prstGeom prst="line">
             <a:avLst/>
@@ -14601,79 +13714,9 @@
           </a:fontRef>
         </p:style>
       </p:cxnSp>
-      <p:cxnSp>
-        <p:nvCxnSpPr>
-          <p:cNvPr id="28" name="Connector 27"/>
-          <p:cNvCxnSpPr/>
-          <p:nvPr/>
-        </p:nvCxnSpPr>
-        <p:spPr>
-          <a:xfrm flipH="1">
-            <a:off x="5013960" y="2103120"/>
-            <a:ext cx="22860" cy="129540"/>
-          </a:xfrm>
-          <a:prstGeom prst="line">
-            <a:avLst/>
-          </a:prstGeom>
-          <a:ln w="30480">
-            <a:solidFill>
-              <a:srgbClr val="7051E8"/>
-            </a:solidFill>
-          </a:ln>
-        </p:spPr>
-        <p:style>
-          <a:lnRef idx="2">
-            <a:schemeClr val="accent1"/>
-          </a:lnRef>
-          <a:fillRef idx="0">
-            <a:schemeClr val="accent1"/>
-          </a:fillRef>
-          <a:effectRef idx="1">
-            <a:schemeClr val="accent1"/>
-          </a:effectRef>
-          <a:fontRef idx="minor">
-            <a:schemeClr val="tx1"/>
-          </a:fontRef>
-        </p:style>
-      </p:cxnSp>
-      <p:cxnSp>
-        <p:nvCxnSpPr>
-          <p:cNvPr id="29" name="Connector 28"/>
-          <p:cNvCxnSpPr/>
-          <p:nvPr/>
-        </p:nvCxnSpPr>
-        <p:spPr>
-          <a:xfrm>
-            <a:off x="4846320" y="2606040"/>
-            <a:ext cx="0" cy="106680"/>
-          </a:xfrm>
-          <a:prstGeom prst="line">
-            <a:avLst/>
-          </a:prstGeom>
-          <a:ln w="30480">
-            <a:solidFill>
-              <a:srgbClr val="7051E8"/>
-            </a:solidFill>
-          </a:ln>
-        </p:spPr>
-        <p:style>
-          <a:lnRef idx="2">
-            <a:schemeClr val="accent1"/>
-          </a:lnRef>
-          <a:fillRef idx="0">
-            <a:schemeClr val="accent1"/>
-          </a:fillRef>
-          <a:effectRef idx="1">
-            <a:schemeClr val="accent1"/>
-          </a:effectRef>
-          <a:fontRef idx="minor">
-            <a:schemeClr val="tx1"/>
-          </a:fontRef>
-        </p:style>
-      </p:cxnSp>
-      <p:sp>
-        <p:nvSpPr>
-          <p:cNvPr id="30" name="TextBox 29"/>
+      <p:sp>
+        <p:nvSpPr>
+          <p:cNvPr id="28" name="TextBox 27"/>
           <p:cNvSpPr txBox="1"/>
           <p:nvPr/>
         </p:nvSpPr>
@@ -14718,7 +13761,7 @@
       </p:sp>
       <p:sp>
         <p:nvSpPr>
-          <p:cNvPr id="31" name="TextBox 30"/>
+          <p:cNvPr id="29" name="TextBox 28"/>
           <p:cNvSpPr txBox="1"/>
           <p:nvPr/>
         </p:nvSpPr>
@@ -14756,14 +13799,14 @@
               </a:defRPr>
             </a:pPr>
             <a:r>
-              <a:t>Public repository activity</a:t>
+              <a:t>Optional software context</a:t>
             </a:r>
           </a:p>
         </p:txBody>
       </p:sp>
       <p:cxnSp>
         <p:nvCxnSpPr>
-          <p:cNvPr id="32" name="Connector 31"/>
+          <p:cNvPr id="30" name="Connector 29"/>
           <p:cNvCxnSpPr/>
           <p:nvPr/>
         </p:nvCxnSpPr>
@@ -14798,7 +13841,7 @@
       </p:cxnSp>
       <p:sp>
         <p:nvSpPr>
-          <p:cNvPr id="33" name="Rounded Rectangle 32"/>
+          <p:cNvPr id="31" name="Rounded Rectangle 30"/>
           <p:cNvSpPr/>
           <p:nvPr/>
         </p:nvSpPr>
@@ -14843,7 +13886,7 @@
       </p:sp>
       <p:cxnSp>
         <p:nvCxnSpPr>
-          <p:cNvPr id="34" name="Connector 33"/>
+          <p:cNvPr id="32" name="Connector 31"/>
           <p:cNvCxnSpPr/>
           <p:nvPr/>
         </p:nvCxnSpPr>
@@ -14878,7 +13921,7 @@
       </p:cxnSp>
       <p:sp>
         <p:nvSpPr>
-          <p:cNvPr id="35" name="Oval 34"/>
+          <p:cNvPr id="33" name="Oval 32"/>
           <p:cNvSpPr/>
           <p:nvPr/>
         </p:nvSpPr>
@@ -14921,7 +13964,7 @@
       </p:sp>
       <p:cxnSp>
         <p:nvCxnSpPr>
-          <p:cNvPr id="36" name="Connector 35"/>
+          <p:cNvPr id="34" name="Connector 33"/>
           <p:cNvCxnSpPr/>
           <p:nvPr/>
         </p:nvCxnSpPr>
@@ -14956,7 +13999,7 @@
       </p:cxnSp>
       <p:sp>
         <p:nvSpPr>
-          <p:cNvPr id="37" name="Oval 36"/>
+          <p:cNvPr id="35" name="Oval 34"/>
           <p:cNvSpPr/>
           <p:nvPr/>
         </p:nvSpPr>
@@ -14999,7 +14042,7 @@
       </p:sp>
       <p:cxnSp>
         <p:nvCxnSpPr>
-          <p:cNvPr id="38" name="Connector 37"/>
+          <p:cNvPr id="36" name="Connector 35"/>
           <p:cNvCxnSpPr/>
           <p:nvPr/>
         </p:nvCxnSpPr>
@@ -15034,7 +14077,7 @@
       </p:cxnSp>
       <p:sp>
         <p:nvSpPr>
-          <p:cNvPr id="39" name="Oval 38"/>
+          <p:cNvPr id="37" name="Oval 36"/>
           <p:cNvSpPr/>
           <p:nvPr/>
         </p:nvSpPr>
@@ -15077,7 +14120,7 @@
       </p:sp>
       <p:cxnSp>
         <p:nvCxnSpPr>
-          <p:cNvPr id="40" name="Connector 39"/>
+          <p:cNvPr id="38" name="Connector 37"/>
           <p:cNvCxnSpPr/>
           <p:nvPr/>
         </p:nvCxnSpPr>
@@ -15112,7 +14155,7 @@
       </p:cxnSp>
       <p:sp>
         <p:nvSpPr>
-          <p:cNvPr id="41" name="TextBox 40"/>
+          <p:cNvPr id="39" name="TextBox 38"/>
           <p:cNvSpPr txBox="1"/>
           <p:nvPr/>
         </p:nvSpPr>
@@ -15157,7 +14200,7 @@
       </p:sp>
       <p:sp>
         <p:nvSpPr>
-          <p:cNvPr id="42" name="TextBox 41"/>
+          <p:cNvPr id="40" name="TextBox 39"/>
           <p:cNvSpPr txBox="1"/>
           <p:nvPr/>
         </p:nvSpPr>
@@ -15202,7 +14245,7 @@
       </p:sp>
       <p:cxnSp>
         <p:nvCxnSpPr>
-          <p:cNvPr id="43" name="Connector 42"/>
+          <p:cNvPr id="41" name="Connector 40"/>
           <p:cNvCxnSpPr/>
           <p:nvPr/>
         </p:nvCxnSpPr>
@@ -15237,7 +14280,7 @@
       </p:cxnSp>
       <p:sp>
         <p:nvSpPr>
-          <p:cNvPr id="44" name="Rounded Rectangle 43"/>
+          <p:cNvPr id="42" name="Rounded Rectangle 41"/>
           <p:cNvSpPr/>
           <p:nvPr/>
         </p:nvSpPr>
@@ -15282,7 +14325,7 @@
       </p:sp>
       <p:sp>
         <p:nvSpPr>
-          <p:cNvPr id="45" name="Rounded Rectangle 44"/>
+          <p:cNvPr id="43" name="Rounded Rectangle 42"/>
           <p:cNvSpPr/>
           <p:nvPr/>
         </p:nvSpPr>
@@ -15329,14 +14372,84 @@
       </p:sp>
       <p:cxnSp>
         <p:nvCxnSpPr>
+          <p:cNvPr id="44" name="Connector 43"/>
+          <p:cNvCxnSpPr/>
+          <p:nvPr/>
+        </p:nvCxnSpPr>
+        <p:spPr>
+          <a:xfrm>
+            <a:off x="868680" y="4130040"/>
+            <a:ext cx="0" cy="68580"/>
+          </a:xfrm>
+          <a:prstGeom prst="line">
+            <a:avLst/>
+          </a:prstGeom>
+          <a:ln w="30480">
+            <a:solidFill>
+              <a:srgbClr val="7051E8"/>
+            </a:solidFill>
+          </a:ln>
+        </p:spPr>
+        <p:style>
+          <a:lnRef idx="2">
+            <a:schemeClr val="accent1"/>
+          </a:lnRef>
+          <a:fillRef idx="0">
+            <a:schemeClr val="accent1"/>
+          </a:fillRef>
+          <a:effectRef idx="1">
+            <a:schemeClr val="accent1"/>
+          </a:effectRef>
+          <a:fontRef idx="minor">
+            <a:schemeClr val="tx1"/>
+          </a:fontRef>
+        </p:style>
+      </p:cxnSp>
+      <p:cxnSp>
+        <p:nvCxnSpPr>
+          <p:cNvPr id="45" name="Connector 44"/>
+          <p:cNvCxnSpPr/>
+          <p:nvPr/>
+        </p:nvCxnSpPr>
+        <p:spPr>
+          <a:xfrm>
+            <a:off x="868680" y="4693920"/>
+            <a:ext cx="0" cy="76200"/>
+          </a:xfrm>
+          <a:prstGeom prst="line">
+            <a:avLst/>
+          </a:prstGeom>
+          <a:ln w="30480">
+            <a:solidFill>
+              <a:srgbClr val="7051E8"/>
+            </a:solidFill>
+          </a:ln>
+        </p:spPr>
+        <p:style>
+          <a:lnRef idx="2">
+            <a:schemeClr val="accent1"/>
+          </a:lnRef>
+          <a:fillRef idx="0">
+            <a:schemeClr val="accent1"/>
+          </a:fillRef>
+          <a:effectRef idx="1">
+            <a:schemeClr val="accent1"/>
+          </a:effectRef>
+          <a:fontRef idx="minor">
+            <a:schemeClr val="tx1"/>
+          </a:fontRef>
+        </p:style>
+      </p:cxnSp>
+      <p:cxnSp>
+        <p:nvCxnSpPr>
           <p:cNvPr id="46" name="Connector 45"/>
           <p:cNvCxnSpPr/>
           <p:nvPr/>
         </p:nvCxnSpPr>
         <p:spPr>
           <a:xfrm>
-            <a:off x="868680" y="4130040"/>
-            <a:ext cx="0" cy="68580"/>
+            <a:off x="693420" y="4328160"/>
+            <a:ext cx="83820" cy="0"/>
           </a:xfrm>
           <a:prstGeom prst="line">
             <a:avLst/>
@@ -15370,8 +14483,8 @@
         </p:nvCxnSpPr>
         <p:spPr>
           <a:xfrm>
-            <a:off x="868680" y="4693920"/>
-            <a:ext cx="0" cy="76200"/>
+            <a:off x="1264920" y="4328160"/>
+            <a:ext cx="83820" cy="0"/>
           </a:xfrm>
           <a:prstGeom prst="line">
             <a:avLst/>
@@ -15405,8 +14518,8 @@
         </p:nvCxnSpPr>
         <p:spPr>
           <a:xfrm>
-            <a:off x="693420" y="4328160"/>
-            <a:ext cx="83820" cy="0"/>
+            <a:off x="1021080" y="4130040"/>
+            <a:ext cx="0" cy="68580"/>
           </a:xfrm>
           <a:prstGeom prst="line">
             <a:avLst/>
@@ -15440,8 +14553,8 @@
         </p:nvCxnSpPr>
         <p:spPr>
           <a:xfrm>
-            <a:off x="1264920" y="4328160"/>
-            <a:ext cx="83820" cy="0"/>
+            <a:off x="1021080" y="4693920"/>
+            <a:ext cx="0" cy="76200"/>
           </a:xfrm>
           <a:prstGeom prst="line">
             <a:avLst/>
@@ -15475,8 +14588,8 @@
         </p:nvCxnSpPr>
         <p:spPr>
           <a:xfrm>
-            <a:off x="1021080" y="4130040"/>
-            <a:ext cx="0" cy="68580"/>
+            <a:off x="693420" y="4480560"/>
+            <a:ext cx="83820" cy="0"/>
           </a:xfrm>
           <a:prstGeom prst="line">
             <a:avLst/>
@@ -15510,8 +14623,8 @@
         </p:nvCxnSpPr>
         <p:spPr>
           <a:xfrm>
-            <a:off x="1021080" y="4693920"/>
-            <a:ext cx="0" cy="76200"/>
+            <a:off x="1264920" y="4480560"/>
+            <a:ext cx="83820" cy="0"/>
           </a:xfrm>
           <a:prstGeom prst="line">
             <a:avLst/>
@@ -15545,8 +14658,8 @@
         </p:nvCxnSpPr>
         <p:spPr>
           <a:xfrm>
-            <a:off x="693420" y="4480560"/>
-            <a:ext cx="83820" cy="0"/>
+            <a:off x="1173480" y="4130040"/>
+            <a:ext cx="0" cy="68580"/>
           </a:xfrm>
           <a:prstGeom prst="line">
             <a:avLst/>
@@ -15580,8 +14693,8 @@
         </p:nvCxnSpPr>
         <p:spPr>
           <a:xfrm>
-            <a:off x="1264920" y="4480560"/>
-            <a:ext cx="83820" cy="0"/>
+            <a:off x="1173480" y="4693920"/>
+            <a:ext cx="0" cy="76200"/>
           </a:xfrm>
           <a:prstGeom prst="line">
             <a:avLst/>
@@ -15615,8 +14728,8 @@
         </p:nvCxnSpPr>
         <p:spPr>
           <a:xfrm>
-            <a:off x="1173480" y="4130040"/>
-            <a:ext cx="0" cy="68580"/>
+            <a:off x="693420" y="4632960"/>
+            <a:ext cx="83820" cy="0"/>
           </a:xfrm>
           <a:prstGeom prst="line">
             <a:avLst/>
@@ -15650,8 +14763,8 @@
         </p:nvCxnSpPr>
         <p:spPr>
           <a:xfrm>
-            <a:off x="1173480" y="4693920"/>
-            <a:ext cx="0" cy="76200"/>
+            <a:off x="1264920" y="4632960"/>
+            <a:ext cx="83820" cy="0"/>
           </a:xfrm>
           <a:prstGeom prst="line">
             <a:avLst/>
@@ -15684,9 +14797,9 @@
           <p:nvPr/>
         </p:nvCxnSpPr>
         <p:spPr>
-          <a:xfrm>
-            <a:off x="693420" y="4632960"/>
-            <a:ext cx="83820" cy="0"/>
+          <a:xfrm flipV="1">
+            <a:off x="922020" y="4343400"/>
+            <a:ext cx="99060" cy="167640"/>
           </a:xfrm>
           <a:prstGeom prst="line">
             <a:avLst/>
@@ -15720,8 +14833,8 @@
         </p:nvCxnSpPr>
         <p:spPr>
           <a:xfrm>
-            <a:off x="1264920" y="4632960"/>
-            <a:ext cx="83820" cy="0"/>
+            <a:off x="1021080" y="4343400"/>
+            <a:ext cx="99060" cy="167640"/>
           </a:xfrm>
           <a:prstGeom prst="line">
             <a:avLst/>
@@ -15754,9 +14867,9 @@
           <p:nvPr/>
         </p:nvCxnSpPr>
         <p:spPr>
-          <a:xfrm flipV="1">
-            <a:off x="922020" y="4343400"/>
-            <a:ext cx="99060" cy="167640"/>
+          <a:xfrm>
+            <a:off x="952500" y="4457700"/>
+            <a:ext cx="137160" cy="0"/>
           </a:xfrm>
           <a:prstGeom prst="line">
             <a:avLst/>
@@ -15782,79 +14895,9 @@
           </a:fontRef>
         </p:style>
       </p:cxnSp>
-      <p:cxnSp>
-        <p:nvCxnSpPr>
-          <p:cNvPr id="59" name="Connector 58"/>
-          <p:cNvCxnSpPr/>
-          <p:nvPr/>
-        </p:nvCxnSpPr>
-        <p:spPr>
-          <a:xfrm>
-            <a:off x="1021080" y="4343400"/>
-            <a:ext cx="99060" cy="167640"/>
-          </a:xfrm>
-          <a:prstGeom prst="line">
-            <a:avLst/>
-          </a:prstGeom>
-          <a:ln w="30480">
-            <a:solidFill>
-              <a:srgbClr val="7051E8"/>
-            </a:solidFill>
-          </a:ln>
-        </p:spPr>
-        <p:style>
-          <a:lnRef idx="2">
-            <a:schemeClr val="accent1"/>
-          </a:lnRef>
-          <a:fillRef idx="0">
-            <a:schemeClr val="accent1"/>
-          </a:fillRef>
-          <a:effectRef idx="1">
-            <a:schemeClr val="accent1"/>
-          </a:effectRef>
-          <a:fontRef idx="minor">
-            <a:schemeClr val="tx1"/>
-          </a:fontRef>
-        </p:style>
-      </p:cxnSp>
-      <p:cxnSp>
-        <p:nvCxnSpPr>
-          <p:cNvPr id="60" name="Connector 59"/>
-          <p:cNvCxnSpPr/>
-          <p:nvPr/>
-        </p:nvCxnSpPr>
-        <p:spPr>
-          <a:xfrm>
-            <a:off x="952500" y="4457700"/>
-            <a:ext cx="137160" cy="0"/>
-          </a:xfrm>
-          <a:prstGeom prst="line">
-            <a:avLst/>
-          </a:prstGeom>
-          <a:ln w="30480">
-            <a:solidFill>
-              <a:srgbClr val="7051E8"/>
-            </a:solidFill>
-          </a:ln>
-        </p:spPr>
-        <p:style>
-          <a:lnRef idx="2">
-            <a:schemeClr val="accent1"/>
-          </a:lnRef>
-          <a:fillRef idx="0">
-            <a:schemeClr val="accent1"/>
-          </a:fillRef>
-          <a:effectRef idx="1">
-            <a:schemeClr val="accent1"/>
-          </a:effectRef>
-          <a:fontRef idx="minor">
-            <a:schemeClr val="tx1"/>
-          </a:fontRef>
-        </p:style>
-      </p:cxnSp>
-      <p:sp>
-        <p:nvSpPr>
-          <p:cNvPr id="61" name="TextBox 60"/>
+      <p:sp>
+        <p:nvSpPr>
+          <p:cNvPr id="59" name="TextBox 58"/>
           <p:cNvSpPr txBox="1"/>
           <p:nvPr/>
         </p:nvSpPr>
@@ -15899,7 +14942,7 @@
       </p:sp>
       <p:sp>
         <p:nvSpPr>
-          <p:cNvPr id="62" name="TextBox 61"/>
+          <p:cNvPr id="60" name="TextBox 59"/>
           <p:cNvSpPr txBox="1"/>
           <p:nvPr/>
         </p:nvSpPr>
@@ -15944,7 +14987,7 @@
       </p:sp>
       <p:cxnSp>
         <p:nvCxnSpPr>
-          <p:cNvPr id="63" name="Connector 62"/>
+          <p:cNvPr id="61" name="Connector 60"/>
           <p:cNvCxnSpPr/>
           <p:nvPr/>
         </p:nvCxnSpPr>
@@ -15979,7 +15022,7 @@
       </p:cxnSp>
       <p:sp>
         <p:nvSpPr>
-          <p:cNvPr id="64" name="Rounded Rectangle 63"/>
+          <p:cNvPr id="62" name="Rounded Rectangle 61"/>
           <p:cNvSpPr/>
           <p:nvPr/>
         </p:nvSpPr>
@@ -16024,7 +15067,7 @@
       </p:sp>
       <p:sp>
         <p:nvSpPr>
-          <p:cNvPr id="65" name="Freeform 64"/>
+          <p:cNvPr id="63" name="Freeform 62"/>
           <p:cNvSpPr/>
           <p:nvPr/>
         </p:nvSpPr>
@@ -16096,7 +15139,7 @@
       </p:sp>
       <p:cxnSp>
         <p:nvCxnSpPr>
-          <p:cNvPr id="66" name="Connector 65"/>
+          <p:cNvPr id="64" name="Connector 63"/>
           <p:cNvCxnSpPr/>
           <p:nvPr/>
         </p:nvCxnSpPr>
@@ -16131,7 +15174,7 @@
       </p:cxnSp>
       <p:cxnSp>
         <p:nvCxnSpPr>
-          <p:cNvPr id="67" name="Connector 66"/>
+          <p:cNvPr id="65" name="Connector 64"/>
           <p:cNvCxnSpPr/>
           <p:nvPr/>
         </p:nvCxnSpPr>
@@ -16166,7 +15209,7 @@
       </p:cxnSp>
       <p:sp>
         <p:nvSpPr>
-          <p:cNvPr id="68" name="TextBox 67"/>
+          <p:cNvPr id="66" name="TextBox 65"/>
           <p:cNvSpPr txBox="1"/>
           <p:nvPr/>
         </p:nvSpPr>
@@ -16211,7 +15254,7 @@
       </p:sp>
       <p:sp>
         <p:nvSpPr>
-          <p:cNvPr id="69" name="TextBox 68"/>
+          <p:cNvPr id="67" name="TextBox 66"/>
           <p:cNvSpPr txBox="1"/>
           <p:nvPr/>
         </p:nvSpPr>
@@ -16256,7 +15299,7 @@
       </p:sp>
       <p:cxnSp>
         <p:nvCxnSpPr>
-          <p:cNvPr id="70" name="Connector 69"/>
+          <p:cNvPr id="68" name="Connector 67"/>
           <p:cNvCxnSpPr/>
           <p:nvPr/>
         </p:nvCxnSpPr>
@@ -16291,7 +15334,7 @@
       </p:cxnSp>
       <p:sp>
         <p:nvSpPr>
-          <p:cNvPr id="71" name="Rounded Rectangle 70"/>
+          <p:cNvPr id="69" name="Rounded Rectangle 68"/>
           <p:cNvSpPr/>
           <p:nvPr/>
         </p:nvSpPr>
@@ -16336,7 +15379,7 @@
       </p:sp>
       <p:sp>
         <p:nvSpPr>
-          <p:cNvPr id="72" name="Oval 71"/>
+          <p:cNvPr id="70" name="Oval 69"/>
           <p:cNvSpPr/>
           <p:nvPr/>
         </p:nvSpPr>
@@ -16381,7 +15424,7 @@
       </p:sp>
       <p:cxnSp>
         <p:nvCxnSpPr>
-          <p:cNvPr id="73" name="Connector 72"/>
+          <p:cNvPr id="71" name="Connector 70"/>
           <p:cNvCxnSpPr/>
           <p:nvPr/>
         </p:nvCxnSpPr>
@@ -16416,7 +15459,7 @@
       </p:cxnSp>
       <p:cxnSp>
         <p:nvCxnSpPr>
-          <p:cNvPr id="74" name="Connector 73"/>
+          <p:cNvPr id="72" name="Connector 71"/>
           <p:cNvCxnSpPr/>
           <p:nvPr/>
         </p:nvCxnSpPr>
@@ -16451,7 +15494,7 @@
       </p:cxnSp>
       <p:sp>
         <p:nvSpPr>
-          <p:cNvPr id="75" name="TextBox 74"/>
+          <p:cNvPr id="73" name="TextBox 72"/>
           <p:cNvSpPr txBox="1"/>
           <p:nvPr/>
         </p:nvSpPr>
@@ -16496,7 +15539,7 @@
       </p:sp>
       <p:sp>
         <p:nvSpPr>
-          <p:cNvPr id="76" name="TextBox 75"/>
+          <p:cNvPr id="74" name="TextBox 73"/>
           <p:cNvSpPr txBox="1"/>
           <p:nvPr/>
         </p:nvSpPr>
@@ -16541,7 +15584,7 @@
       </p:sp>
       <p:cxnSp>
         <p:nvCxnSpPr>
-          <p:cNvPr id="77" name="Connector 76"/>
+          <p:cNvPr id="75" name="Connector 74"/>
           <p:cNvCxnSpPr/>
           <p:nvPr/>
         </p:nvCxnSpPr>
@@ -16718,104 +15761,14 @@
               </a:defRPr>
             </a:pPr>
             <a:r>
-              <a:t>OPSREPLAY / HACKATHON PROTOTYPE</a:t>
-            </a:r>
-          </a:p>
-        </p:txBody>
-      </p:sp>
-      <p:sp>
-        <p:nvSpPr>
-          <p:cNvPr id="5" name="Rounded Rectangle 4"/>
-          <p:cNvSpPr/>
-          <p:nvPr/>
-        </p:nvSpPr>
-        <p:spPr>
-          <a:xfrm>
-            <a:off x="9982200" y="327660"/>
-            <a:ext cx="1714500" cy="335280"/>
-          </a:xfrm>
-          <a:prstGeom prst="roundRect">
-            <a:avLst>
-              <a:gd name="adj" fmla="val 25000"/>
-            </a:avLst>
-          </a:prstGeom>
-          <a:solidFill>
-            <a:srgbClr val="14213B"/>
-          </a:solidFill>
-          <a:ln>
-            <a:noFill/>
-          </a:ln>
-        </p:spPr>
-        <p:style>
-          <a:lnRef idx="1">
-            <a:schemeClr val="accent1"/>
-          </a:lnRef>
-          <a:fillRef idx="3">
-            <a:schemeClr val="accent1"/>
-          </a:fillRef>
-          <a:effectRef idx="2">
-            <a:schemeClr val="accent1"/>
-          </a:effectRef>
-          <a:fontRef idx="minor">
-            <a:schemeClr val="lt1"/>
-          </a:fontRef>
-        </p:style>
-        <p:txBody>
-          <a:bodyPr rtlCol="0" anchor="ctr"/>
-          <a:lstStyle/>
-          <a:p>
-            <a:pPr algn="ctr"/>
-          </a:p>
-        </p:txBody>
-      </p:sp>
-      <p:sp>
-        <p:nvSpPr>
-          <p:cNvPr id="6" name="TextBox 5"/>
-          <p:cNvSpPr txBox="1"/>
-          <p:nvPr/>
-        </p:nvSpPr>
-        <p:spPr>
-          <a:xfrm>
-            <a:off x="10119360" y="388620"/>
-            <a:ext cx="1539240" cy="245745"/>
-          </a:xfrm>
-          <a:prstGeom prst="rect">
-            <a:avLst/>
-          </a:prstGeom>
-          <a:noFill/>
-        </p:spPr>
-        <p:txBody>
-          <a:bodyPr wrap="none" lIns="0" rIns="0" tIns="0" bIns="0">
-            <a:spAutoFit/>
-          </a:bodyPr>
-          <a:lstStyle/>
-          <a:p>
-            <a:pPr>
-              <a:lnSpc>
-                <a:spcPts val="1575"/>
-              </a:lnSpc>
-              <a:spcBef>
-                <a:spcPts val="0"/>
-              </a:spcBef>
-              <a:spcAft>
-                <a:spcPts val="0"/>
-              </a:spcAft>
-              <a:defRPr sz="1260" b="1">
-                <a:solidFill>
-                  <a:srgbClr val="FFFFFF"/>
-                </a:solidFill>
-                <a:latin typeface="DejaVu Sans"/>
-              </a:defRPr>
-            </a:pPr>
-            <a:r>
-              <a:t>SOLO PROJECT</a:t>
-            </a:r>
-          </a:p>
-        </p:txBody>
-      </p:sp>
-      <p:sp>
-        <p:nvSpPr>
-          <p:cNvPr id="7" name="TextBox 6"/>
+              <a:t>OPSREPLAY / INCIDENT REPLAY</a:t>
+            </a:r>
+          </a:p>
+        </p:txBody>
+      </p:sp>
+      <p:sp>
+        <p:nvSpPr>
+          <p:cNvPr id="5" name="TextBox 4"/>
           <p:cNvSpPr txBox="1"/>
           <p:nvPr/>
         </p:nvSpPr>
@@ -16860,7 +15813,7 @@
       </p:sp>
       <p:sp>
         <p:nvSpPr>
-          <p:cNvPr id="8" name="TextBox 7"/>
+          <p:cNvPr id="6" name="TextBox 5"/>
           <p:cNvSpPr txBox="1"/>
           <p:nvPr/>
         </p:nvSpPr>
@@ -16905,7 +15858,7 @@
       </p:sp>
       <p:cxnSp>
         <p:nvCxnSpPr>
-          <p:cNvPr id="9" name="Connector 8"/>
+          <p:cNvPr id="7" name="Connector 6"/>
           <p:cNvCxnSpPr/>
           <p:nvPr/>
         </p:nvCxnSpPr>
@@ -16940,7 +15893,7 @@
       </p:cxnSp>
       <p:sp>
         <p:nvSpPr>
-          <p:cNvPr id="10" name="TextBox 9"/>
+          <p:cNvPr id="8" name="TextBox 7"/>
           <p:cNvSpPr txBox="1"/>
           <p:nvPr/>
         </p:nvSpPr>
@@ -16978,14 +15931,14 @@
               </a:defRPr>
             </a:pPr>
             <a:r>
-              <a:t>SIMULATED IoT · Public GitHub API · Gemini</a:t>
-            </a:r>
-          </a:p>
-        </p:txBody>
-      </p:sp>
-      <p:sp>
-        <p:nvSpPr>
-          <p:cNvPr id="11" name="TextBox 10"/>
+              <a:t>SIMULATED IoT · Replay · Evidence</a:t>
+            </a:r>
+          </a:p>
+        </p:txBody>
+      </p:sp>
+      <p:sp>
+        <p:nvSpPr>
+          <p:cNvPr id="9" name="TextBox 8"/>
           <p:cNvSpPr txBox="1"/>
           <p:nvPr/>
         </p:nvSpPr>
@@ -17030,7 +15983,7 @@
       </p:sp>
       <p:sp>
         <p:nvSpPr>
-          <p:cNvPr id="12" name="Rounded Rectangle 11"/>
+          <p:cNvPr id="10" name="Rounded Rectangle 9"/>
           <p:cNvSpPr/>
           <p:nvPr/>
         </p:nvSpPr>
@@ -17075,7 +16028,7 @@
       </p:sp>
       <p:sp>
         <p:nvSpPr>
-          <p:cNvPr id="13" name="Rounded Rectangle 12"/>
+          <p:cNvPr id="11" name="Rounded Rectangle 10"/>
           <p:cNvSpPr/>
           <p:nvPr/>
         </p:nvSpPr>
@@ -17120,7 +16073,7 @@
       </p:sp>
       <p:sp>
         <p:nvSpPr>
-          <p:cNvPr id="14" name="TextBox 13"/>
+          <p:cNvPr id="12" name="TextBox 11"/>
           <p:cNvSpPr txBox="1"/>
           <p:nvPr/>
         </p:nvSpPr>
@@ -17165,7 +16118,7 @@
       </p:sp>
       <p:sp>
         <p:nvSpPr>
-          <p:cNvPr id="15" name="TextBox 14"/>
+          <p:cNvPr id="13" name="TextBox 12"/>
           <p:cNvSpPr txBox="1"/>
           <p:nvPr/>
         </p:nvSpPr>
@@ -17210,7 +16163,7 @@
       </p:sp>
       <p:cxnSp>
         <p:nvCxnSpPr>
-          <p:cNvPr id="16" name="Connector 15"/>
+          <p:cNvPr id="14" name="Connector 13"/>
           <p:cNvCxnSpPr/>
           <p:nvPr/>
         </p:nvCxnSpPr>
@@ -17245,7 +16198,7 @@
       </p:cxnSp>
       <p:sp>
         <p:nvSpPr>
-          <p:cNvPr id="17" name="Oval 16"/>
+          <p:cNvPr id="15" name="Oval 14"/>
           <p:cNvSpPr/>
           <p:nvPr/>
         </p:nvSpPr>
@@ -17288,7 +16241,7 @@
       </p:sp>
       <p:sp>
         <p:nvSpPr>
-          <p:cNvPr id="18" name="TextBox 17"/>
+          <p:cNvPr id="16" name="TextBox 15"/>
           <p:cNvSpPr txBox="1"/>
           <p:nvPr/>
         </p:nvSpPr>
@@ -17333,7 +16286,7 @@
       </p:sp>
       <p:sp>
         <p:nvSpPr>
-          <p:cNvPr id="19" name="TextBox 18"/>
+          <p:cNvPr id="17" name="TextBox 16"/>
           <p:cNvSpPr txBox="1"/>
           <p:nvPr/>
         </p:nvSpPr>
@@ -17378,7 +16331,7 @@
       </p:sp>
       <p:sp>
         <p:nvSpPr>
-          <p:cNvPr id="20" name="Oval 19"/>
+          <p:cNvPr id="18" name="Oval 17"/>
           <p:cNvSpPr/>
           <p:nvPr/>
         </p:nvSpPr>
@@ -17421,7 +16374,7 @@
       </p:sp>
       <p:sp>
         <p:nvSpPr>
-          <p:cNvPr id="21" name="TextBox 20"/>
+          <p:cNvPr id="19" name="TextBox 18"/>
           <p:cNvSpPr txBox="1"/>
           <p:nvPr/>
         </p:nvSpPr>
@@ -17466,7 +16419,7 @@
       </p:sp>
       <p:sp>
         <p:nvSpPr>
-          <p:cNvPr id="22" name="TextBox 21"/>
+          <p:cNvPr id="20" name="TextBox 19"/>
           <p:cNvSpPr txBox="1"/>
           <p:nvPr/>
         </p:nvSpPr>
@@ -17511,7 +16464,7 @@
       </p:sp>
       <p:sp>
         <p:nvSpPr>
-          <p:cNvPr id="23" name="Oval 22"/>
+          <p:cNvPr id="21" name="Oval 20"/>
           <p:cNvSpPr/>
           <p:nvPr/>
         </p:nvSpPr>
@@ -17554,7 +16507,7 @@
       </p:sp>
       <p:sp>
         <p:nvSpPr>
-          <p:cNvPr id="24" name="TextBox 23"/>
+          <p:cNvPr id="22" name="TextBox 21"/>
           <p:cNvSpPr txBox="1"/>
           <p:nvPr/>
         </p:nvSpPr>
@@ -17599,7 +16552,7 @@
       </p:sp>
       <p:sp>
         <p:nvSpPr>
-          <p:cNvPr id="25" name="TextBox 24"/>
+          <p:cNvPr id="23" name="TextBox 22"/>
           <p:cNvSpPr txBox="1"/>
           <p:nvPr/>
         </p:nvSpPr>
@@ -17644,7 +16597,7 @@
       </p:sp>
       <p:sp>
         <p:nvSpPr>
-          <p:cNvPr id="26" name="Rounded Rectangle 25"/>
+          <p:cNvPr id="24" name="Rounded Rectangle 23"/>
           <p:cNvSpPr/>
           <p:nvPr/>
         </p:nvSpPr>
@@ -17689,7 +16642,7 @@
       </p:sp>
       <p:sp>
         <p:nvSpPr>
-          <p:cNvPr id="27" name="TextBox 26"/>
+          <p:cNvPr id="25" name="TextBox 24"/>
           <p:cNvSpPr txBox="1"/>
           <p:nvPr/>
         </p:nvSpPr>
@@ -17734,7 +16687,7 @@
       </p:sp>
       <p:sp>
         <p:nvSpPr>
-          <p:cNvPr id="28" name="Rounded Rectangle 27"/>
+          <p:cNvPr id="26" name="Rounded Rectangle 25"/>
           <p:cNvSpPr/>
           <p:nvPr/>
         </p:nvSpPr>
@@ -17779,7 +16732,7 @@
       </p:sp>
       <p:sp>
         <p:nvSpPr>
-          <p:cNvPr id="29" name="TextBox 28"/>
+          <p:cNvPr id="27" name="TextBox 26"/>
           <p:cNvSpPr txBox="1"/>
           <p:nvPr/>
         </p:nvSpPr>
@@ -17824,7 +16777,7 @@
       </p:sp>
       <p:sp>
         <p:nvSpPr>
-          <p:cNvPr id="30" name="Rounded Rectangle 29"/>
+          <p:cNvPr id="28" name="Rounded Rectangle 27"/>
           <p:cNvSpPr/>
           <p:nvPr/>
         </p:nvSpPr>
@@ -17869,7 +16822,7 @@
       </p:sp>
       <p:sp>
         <p:nvSpPr>
-          <p:cNvPr id="31" name="TextBox 30"/>
+          <p:cNvPr id="29" name="TextBox 28"/>
           <p:cNvSpPr txBox="1"/>
           <p:nvPr/>
         </p:nvSpPr>
@@ -18056,104 +17009,14 @@
               </a:defRPr>
             </a:pPr>
             <a:r>
-              <a:t>OPSREPLAY / HACKATHON PROTOTYPE</a:t>
-            </a:r>
-          </a:p>
-        </p:txBody>
-      </p:sp>
-      <p:sp>
-        <p:nvSpPr>
-          <p:cNvPr id="5" name="Rounded Rectangle 4"/>
-          <p:cNvSpPr/>
-          <p:nvPr/>
-        </p:nvSpPr>
-        <p:spPr>
-          <a:xfrm>
-            <a:off x="9982200" y="327660"/>
-            <a:ext cx="1714500" cy="335280"/>
-          </a:xfrm>
-          <a:prstGeom prst="roundRect">
-            <a:avLst>
-              <a:gd name="adj" fmla="val 25000"/>
-            </a:avLst>
-          </a:prstGeom>
-          <a:solidFill>
-            <a:srgbClr val="14213B"/>
-          </a:solidFill>
-          <a:ln>
-            <a:noFill/>
-          </a:ln>
-        </p:spPr>
-        <p:style>
-          <a:lnRef idx="1">
-            <a:schemeClr val="accent1"/>
-          </a:lnRef>
-          <a:fillRef idx="3">
-            <a:schemeClr val="accent1"/>
-          </a:fillRef>
-          <a:effectRef idx="2">
-            <a:schemeClr val="accent1"/>
-          </a:effectRef>
-          <a:fontRef idx="minor">
-            <a:schemeClr val="lt1"/>
-          </a:fontRef>
-        </p:style>
-        <p:txBody>
-          <a:bodyPr rtlCol="0" anchor="ctr"/>
-          <a:lstStyle/>
-          <a:p>
-            <a:pPr algn="ctr"/>
-          </a:p>
-        </p:txBody>
-      </p:sp>
-      <p:sp>
-        <p:nvSpPr>
-          <p:cNvPr id="6" name="TextBox 5"/>
-          <p:cNvSpPr txBox="1"/>
-          <p:nvPr/>
-        </p:nvSpPr>
-        <p:spPr>
-          <a:xfrm>
-            <a:off x="10119360" y="388620"/>
-            <a:ext cx="1539240" cy="245745"/>
-          </a:xfrm>
-          <a:prstGeom prst="rect">
-            <a:avLst/>
-          </a:prstGeom>
-          <a:noFill/>
-        </p:spPr>
-        <p:txBody>
-          <a:bodyPr wrap="none" lIns="0" rIns="0" tIns="0" bIns="0">
-            <a:spAutoFit/>
-          </a:bodyPr>
-          <a:lstStyle/>
-          <a:p>
-            <a:pPr>
-              <a:lnSpc>
-                <a:spcPts val="1575"/>
-              </a:lnSpc>
-              <a:spcBef>
-                <a:spcPts val="0"/>
-              </a:spcBef>
-              <a:spcAft>
-                <a:spcPts val="0"/>
-              </a:spcAft>
-              <a:defRPr sz="1260" b="1">
-                <a:solidFill>
-                  <a:srgbClr val="FFFFFF"/>
-                </a:solidFill>
-                <a:latin typeface="DejaVu Sans"/>
-              </a:defRPr>
-            </a:pPr>
-            <a:r>
-              <a:t>SOLO PROJECT</a:t>
-            </a:r>
-          </a:p>
-        </p:txBody>
-      </p:sp>
-      <p:sp>
-        <p:nvSpPr>
-          <p:cNvPr id="7" name="TextBox 6"/>
+              <a:t>OPSREPLAY / INCIDENT REPLAY</a:t>
+            </a:r>
+          </a:p>
+        </p:txBody>
+      </p:sp>
+      <p:sp>
+        <p:nvSpPr>
+          <p:cNvPr id="5" name="TextBox 4"/>
           <p:cNvSpPr txBox="1"/>
           <p:nvPr/>
         </p:nvSpPr>
@@ -18198,7 +17061,7 @@
       </p:sp>
       <p:sp>
         <p:nvSpPr>
-          <p:cNvPr id="8" name="TextBox 7"/>
+          <p:cNvPr id="6" name="TextBox 5"/>
           <p:cNvSpPr txBox="1"/>
           <p:nvPr/>
         </p:nvSpPr>
@@ -18243,7 +17106,7 @@
       </p:sp>
       <p:cxnSp>
         <p:nvCxnSpPr>
-          <p:cNvPr id="9" name="Connector 8"/>
+          <p:cNvPr id="7" name="Connector 6"/>
           <p:cNvCxnSpPr/>
           <p:nvPr/>
         </p:nvCxnSpPr>
@@ -18278,7 +17141,7 @@
       </p:cxnSp>
       <p:sp>
         <p:nvSpPr>
-          <p:cNvPr id="10" name="TextBox 9"/>
+          <p:cNvPr id="8" name="TextBox 7"/>
           <p:cNvSpPr txBox="1"/>
           <p:nvPr/>
         </p:nvSpPr>
@@ -18316,14 +17179,14 @@
               </a:defRPr>
             </a:pPr>
             <a:r>
-              <a:t>SIMULATED IoT · Public GitHub API · Gemini</a:t>
-            </a:r>
-          </a:p>
-        </p:txBody>
-      </p:sp>
-      <p:sp>
-        <p:nvSpPr>
-          <p:cNvPr id="11" name="TextBox 10"/>
+              <a:t>SIMULATED IoT · Replay · Evidence</a:t>
+            </a:r>
+          </a:p>
+        </p:txBody>
+      </p:sp>
+      <p:sp>
+        <p:nvSpPr>
+          <p:cNvPr id="9" name="TextBox 8"/>
           <p:cNvSpPr txBox="1"/>
           <p:nvPr/>
         </p:nvSpPr>
@@ -18368,7 +17231,7 @@
       </p:sp>
       <p:sp>
         <p:nvSpPr>
-          <p:cNvPr id="12" name="Rounded Rectangle 11"/>
+          <p:cNvPr id="10" name="Rounded Rectangle 9"/>
           <p:cNvSpPr/>
           <p:nvPr/>
         </p:nvSpPr>
@@ -18413,7 +17276,7 @@
       </p:sp>
       <p:sp>
         <p:nvSpPr>
-          <p:cNvPr id="13" name="Rounded Rectangle 12"/>
+          <p:cNvPr id="11" name="Rounded Rectangle 10"/>
           <p:cNvSpPr/>
           <p:nvPr/>
         </p:nvSpPr>
@@ -18458,7 +17321,7 @@
       </p:sp>
       <p:sp>
         <p:nvSpPr>
-          <p:cNvPr id="14" name="TextBox 13"/>
+          <p:cNvPr id="12" name="TextBox 11"/>
           <p:cNvSpPr txBox="1"/>
           <p:nvPr/>
         </p:nvSpPr>
@@ -18503,7 +17366,7 @@
       </p:sp>
       <p:sp>
         <p:nvSpPr>
-          <p:cNvPr id="15" name="TextBox 14"/>
+          <p:cNvPr id="13" name="TextBox 12"/>
           <p:cNvSpPr txBox="1"/>
           <p:nvPr/>
         </p:nvSpPr>
@@ -18548,7 +17411,7 @@
       </p:sp>
       <p:sp>
         <p:nvSpPr>
-          <p:cNvPr id="16" name="TextBox 15"/>
+          <p:cNvPr id="14" name="TextBox 13"/>
           <p:cNvSpPr txBox="1"/>
           <p:nvPr/>
         </p:nvSpPr>
@@ -18593,7 +17456,7 @@
       </p:sp>
       <p:sp>
         <p:nvSpPr>
-          <p:cNvPr id="17" name="TextBox 16"/>
+          <p:cNvPr id="15" name="TextBox 14"/>
           <p:cNvSpPr txBox="1"/>
           <p:nvPr/>
         </p:nvSpPr>
@@ -18638,7 +17501,7 @@
       </p:sp>
       <p:sp>
         <p:nvSpPr>
-          <p:cNvPr id="18" name="TextBox 17"/>
+          <p:cNvPr id="16" name="TextBox 15"/>
           <p:cNvSpPr txBox="1"/>
           <p:nvPr/>
         </p:nvSpPr>
@@ -18683,7 +17546,7 @@
       </p:sp>
       <p:sp>
         <p:nvSpPr>
-          <p:cNvPr id="19" name="TextBox 18"/>
+          <p:cNvPr id="17" name="TextBox 16"/>
           <p:cNvSpPr txBox="1"/>
           <p:nvPr/>
         </p:nvSpPr>
@@ -18728,7 +17591,7 @@
       </p:sp>
       <p:sp>
         <p:nvSpPr>
-          <p:cNvPr id="20" name="Rounded Rectangle 19"/>
+          <p:cNvPr id="18" name="Rounded Rectangle 17"/>
           <p:cNvSpPr/>
           <p:nvPr/>
         </p:nvSpPr>
@@ -18773,7 +17636,7 @@
       </p:sp>
       <p:sp>
         <p:nvSpPr>
-          <p:cNvPr id="21" name="Rounded Rectangle 20"/>
+          <p:cNvPr id="19" name="Rounded Rectangle 18"/>
           <p:cNvSpPr/>
           <p:nvPr/>
         </p:nvSpPr>
@@ -18818,7 +17681,7 @@
       </p:sp>
       <p:sp>
         <p:nvSpPr>
-          <p:cNvPr id="22" name="TextBox 21"/>
+          <p:cNvPr id="20" name="TextBox 19"/>
           <p:cNvSpPr txBox="1"/>
           <p:nvPr/>
         </p:nvSpPr>
@@ -18863,7 +17726,7 @@
       </p:sp>
       <p:sp>
         <p:nvSpPr>
-          <p:cNvPr id="23" name="TextBox 22"/>
+          <p:cNvPr id="21" name="TextBox 20"/>
           <p:cNvSpPr txBox="1"/>
           <p:nvPr/>
         </p:nvSpPr>
@@ -18908,7 +17771,7 @@
       </p:sp>
       <p:sp>
         <p:nvSpPr>
-          <p:cNvPr id="24" name="Rounded Rectangle 23"/>
+          <p:cNvPr id="22" name="Rounded Rectangle 21"/>
           <p:cNvSpPr/>
           <p:nvPr/>
         </p:nvSpPr>
@@ -18953,7 +17816,7 @@
       </p:sp>
       <p:sp>
         <p:nvSpPr>
-          <p:cNvPr id="25" name="TextBox 24"/>
+          <p:cNvPr id="23" name="TextBox 22"/>
           <p:cNvSpPr txBox="1"/>
           <p:nvPr/>
         </p:nvSpPr>
@@ -18998,7 +17861,7 @@
       </p:sp>
       <p:sp>
         <p:nvSpPr>
-          <p:cNvPr id="26" name="Rounded Rectangle 25"/>
+          <p:cNvPr id="24" name="Rounded Rectangle 23"/>
           <p:cNvSpPr/>
           <p:nvPr/>
         </p:nvSpPr>
@@ -19043,7 +17906,7 @@
       </p:sp>
       <p:sp>
         <p:nvSpPr>
-          <p:cNvPr id="27" name="TextBox 26"/>
+          <p:cNvPr id="25" name="TextBox 24"/>
           <p:cNvSpPr txBox="1"/>
           <p:nvPr/>
         </p:nvSpPr>
@@ -19088,7 +17951,7 @@
       </p:sp>
       <p:sp>
         <p:nvSpPr>
-          <p:cNvPr id="28" name="Rounded Rectangle 27"/>
+          <p:cNvPr id="26" name="Rounded Rectangle 25"/>
           <p:cNvSpPr/>
           <p:nvPr/>
         </p:nvSpPr>
@@ -19133,7 +17996,7 @@
       </p:sp>
       <p:sp>
         <p:nvSpPr>
-          <p:cNvPr id="29" name="TextBox 28"/>
+          <p:cNvPr id="27" name="TextBox 26"/>
           <p:cNvSpPr txBox="1"/>
           <p:nvPr/>
         </p:nvSpPr>
@@ -19178,7 +18041,7 @@
       </p:sp>
       <p:sp>
         <p:nvSpPr>
-          <p:cNvPr id="30" name="TextBox 29"/>
+          <p:cNvPr id="28" name="TextBox 27"/>
           <p:cNvSpPr txBox="1"/>
           <p:nvPr/>
         </p:nvSpPr>
@@ -19223,7 +18086,7 @@
       </p:sp>
       <p:sp>
         <p:nvSpPr>
-          <p:cNvPr id="31" name="Freeform 30"/>
+          <p:cNvPr id="29" name="Freeform 28"/>
           <p:cNvSpPr/>
           <p:nvPr/>
         </p:nvSpPr>
@@ -19295,7 +18158,7 @@
       </p:sp>
       <p:cxnSp>
         <p:nvCxnSpPr>
-          <p:cNvPr id="32" name="Connector 31"/>
+          <p:cNvPr id="30" name="Connector 29"/>
           <p:cNvCxnSpPr/>
           <p:nvPr/>
         </p:nvCxnSpPr>
@@ -19330,7 +18193,7 @@
       </p:cxnSp>
       <p:cxnSp>
         <p:nvCxnSpPr>
-          <p:cNvPr id="33" name="Connector 32"/>
+          <p:cNvPr id="31" name="Connector 30"/>
           <p:cNvCxnSpPr/>
           <p:nvPr/>
         </p:nvCxnSpPr>
@@ -19365,7 +18228,7 @@
       </p:cxnSp>
       <p:sp>
         <p:nvSpPr>
-          <p:cNvPr id="34" name="TextBox 33"/>
+          <p:cNvPr id="32" name="TextBox 31"/>
           <p:cNvSpPr txBox="1"/>
           <p:nvPr/>
         </p:nvSpPr>
@@ -19410,7 +18273,7 @@
       </p:sp>
       <p:sp>
         <p:nvSpPr>
-          <p:cNvPr id="35" name="TextBox 34"/>
+          <p:cNvPr id="33" name="TextBox 32"/>
           <p:cNvSpPr txBox="1"/>
           <p:nvPr/>
         </p:nvSpPr>
@@ -19455,7 +18318,7 @@
       </p:sp>
       <p:sp>
         <p:nvSpPr>
-          <p:cNvPr id="36" name="TextBox 35"/>
+          <p:cNvPr id="34" name="TextBox 33"/>
           <p:cNvSpPr txBox="1"/>
           <p:nvPr/>
         </p:nvSpPr>
@@ -19522,7 +18385,7 @@
       </p:sp>
       <p:sp>
         <p:nvSpPr>
-          <p:cNvPr id="37" name="TextBox 36"/>
+          <p:cNvPr id="35" name="TextBox 34"/>
           <p:cNvSpPr txBox="1"/>
           <p:nvPr/>
         </p:nvSpPr>
@@ -19731,104 +18594,14 @@
               </a:defRPr>
             </a:pPr>
             <a:r>
-              <a:t>OPSREPLAY / HACKATHON PROTOTYPE</a:t>
-            </a:r>
-          </a:p>
-        </p:txBody>
-      </p:sp>
-      <p:sp>
-        <p:nvSpPr>
-          <p:cNvPr id="5" name="Rounded Rectangle 4"/>
-          <p:cNvSpPr/>
-          <p:nvPr/>
-        </p:nvSpPr>
-        <p:spPr>
-          <a:xfrm>
-            <a:off x="9982200" y="327660"/>
-            <a:ext cx="1714500" cy="335280"/>
-          </a:xfrm>
-          <a:prstGeom prst="roundRect">
-            <a:avLst>
-              <a:gd name="adj" fmla="val 25000"/>
-            </a:avLst>
-          </a:prstGeom>
-          <a:solidFill>
-            <a:srgbClr val="14213B"/>
-          </a:solidFill>
-          <a:ln>
-            <a:noFill/>
-          </a:ln>
-        </p:spPr>
-        <p:style>
-          <a:lnRef idx="1">
-            <a:schemeClr val="accent1"/>
-          </a:lnRef>
-          <a:fillRef idx="3">
-            <a:schemeClr val="accent1"/>
-          </a:fillRef>
-          <a:effectRef idx="2">
-            <a:schemeClr val="accent1"/>
-          </a:effectRef>
-          <a:fontRef idx="minor">
-            <a:schemeClr val="lt1"/>
-          </a:fontRef>
-        </p:style>
-        <p:txBody>
-          <a:bodyPr rtlCol="0" anchor="ctr"/>
-          <a:lstStyle/>
-          <a:p>
-            <a:pPr algn="ctr"/>
-          </a:p>
-        </p:txBody>
-      </p:sp>
-      <p:sp>
-        <p:nvSpPr>
-          <p:cNvPr id="6" name="TextBox 5"/>
-          <p:cNvSpPr txBox="1"/>
-          <p:nvPr/>
-        </p:nvSpPr>
-        <p:spPr>
-          <a:xfrm>
-            <a:off x="10119360" y="388620"/>
-            <a:ext cx="1539240" cy="245745"/>
-          </a:xfrm>
-          <a:prstGeom prst="rect">
-            <a:avLst/>
-          </a:prstGeom>
-          <a:noFill/>
-        </p:spPr>
-        <p:txBody>
-          <a:bodyPr wrap="none" lIns="0" rIns="0" tIns="0" bIns="0">
-            <a:spAutoFit/>
-          </a:bodyPr>
-          <a:lstStyle/>
-          <a:p>
-            <a:pPr>
-              <a:lnSpc>
-                <a:spcPts val="1575"/>
-              </a:lnSpc>
-              <a:spcBef>
-                <a:spcPts val="0"/>
-              </a:spcBef>
-              <a:spcAft>
-                <a:spcPts val="0"/>
-              </a:spcAft>
-              <a:defRPr sz="1260" b="1">
-                <a:solidFill>
-                  <a:srgbClr val="FFFFFF"/>
-                </a:solidFill>
-                <a:latin typeface="DejaVu Sans"/>
-              </a:defRPr>
-            </a:pPr>
-            <a:r>
-              <a:t>SOLO PROJECT</a:t>
-            </a:r>
-          </a:p>
-        </p:txBody>
-      </p:sp>
-      <p:sp>
-        <p:nvSpPr>
-          <p:cNvPr id="7" name="TextBox 6"/>
+              <a:t>OPSREPLAY / INCIDENT REPLAY</a:t>
+            </a:r>
+          </a:p>
+        </p:txBody>
+      </p:sp>
+      <p:sp>
+        <p:nvSpPr>
+          <p:cNvPr id="5" name="TextBox 4"/>
           <p:cNvSpPr txBox="1"/>
           <p:nvPr/>
         </p:nvSpPr>
@@ -19873,7 +18646,7 @@
       </p:sp>
       <p:sp>
         <p:nvSpPr>
-          <p:cNvPr id="8" name="TextBox 7"/>
+          <p:cNvPr id="6" name="TextBox 5"/>
           <p:cNvSpPr txBox="1"/>
           <p:nvPr/>
         </p:nvSpPr>
@@ -19918,7 +18691,7 @@
       </p:sp>
       <p:cxnSp>
         <p:nvCxnSpPr>
-          <p:cNvPr id="9" name="Connector 8"/>
+          <p:cNvPr id="7" name="Connector 6"/>
           <p:cNvCxnSpPr/>
           <p:nvPr/>
         </p:nvCxnSpPr>
@@ -19953,7 +18726,7 @@
       </p:cxnSp>
       <p:sp>
         <p:nvSpPr>
-          <p:cNvPr id="10" name="TextBox 9"/>
+          <p:cNvPr id="8" name="TextBox 7"/>
           <p:cNvSpPr txBox="1"/>
           <p:nvPr/>
         </p:nvSpPr>
@@ -19991,14 +18764,14 @@
               </a:defRPr>
             </a:pPr>
             <a:r>
-              <a:t>SIMULATED IoT · Public GitHub API · Gemini</a:t>
-            </a:r>
-          </a:p>
-        </p:txBody>
-      </p:sp>
-      <p:sp>
-        <p:nvSpPr>
-          <p:cNvPr id="11" name="TextBox 10"/>
+              <a:t>SIMULATED IoT · Replay · Evidence</a:t>
+            </a:r>
+          </a:p>
+        </p:txBody>
+      </p:sp>
+      <p:sp>
+        <p:nvSpPr>
+          <p:cNvPr id="9" name="TextBox 8"/>
           <p:cNvSpPr txBox="1"/>
           <p:nvPr/>
         </p:nvSpPr>
@@ -20043,7 +18816,7 @@
       </p:sp>
       <p:sp>
         <p:nvSpPr>
-          <p:cNvPr id="12" name="Rounded Rectangle 11"/>
+          <p:cNvPr id="10" name="Rounded Rectangle 9"/>
           <p:cNvSpPr/>
           <p:nvPr/>
         </p:nvSpPr>
@@ -20088,7 +18861,7 @@
       </p:sp>
       <p:sp>
         <p:nvSpPr>
-          <p:cNvPr id="13" name="Rounded Rectangle 12"/>
+          <p:cNvPr id="11" name="Rounded Rectangle 10"/>
           <p:cNvSpPr/>
           <p:nvPr/>
         </p:nvSpPr>
@@ -20133,7 +18906,7 @@
       </p:sp>
       <p:sp>
         <p:nvSpPr>
-          <p:cNvPr id="14" name="TextBox 13"/>
+          <p:cNvPr id="12" name="TextBox 11"/>
           <p:cNvSpPr txBox="1"/>
           <p:nvPr/>
         </p:nvSpPr>
@@ -20178,7 +18951,7 @@
       </p:sp>
       <p:sp>
         <p:nvSpPr>
-          <p:cNvPr id="15" name="TextBox 14"/>
+          <p:cNvPr id="13" name="TextBox 12"/>
           <p:cNvSpPr txBox="1"/>
           <p:nvPr/>
         </p:nvSpPr>
@@ -20223,7 +18996,7 @@
       </p:sp>
       <p:sp>
         <p:nvSpPr>
-          <p:cNvPr id="16" name="TextBox 15"/>
+          <p:cNvPr id="14" name="TextBox 13"/>
           <p:cNvSpPr txBox="1"/>
           <p:nvPr/>
         </p:nvSpPr>
@@ -20268,7 +19041,7 @@
       </p:sp>
       <p:sp>
         <p:nvSpPr>
-          <p:cNvPr id="17" name="TextBox 16"/>
+          <p:cNvPr id="15" name="TextBox 14"/>
           <p:cNvSpPr txBox="1"/>
           <p:nvPr/>
         </p:nvSpPr>
@@ -20313,7 +19086,7 @@
       </p:sp>
       <p:sp>
         <p:nvSpPr>
-          <p:cNvPr id="18" name="TextBox 17"/>
+          <p:cNvPr id="16" name="TextBox 15"/>
           <p:cNvSpPr txBox="1"/>
           <p:nvPr/>
         </p:nvSpPr>
@@ -20358,7 +19131,7 @@
       </p:sp>
       <p:sp>
         <p:nvSpPr>
-          <p:cNvPr id="19" name="TextBox 18"/>
+          <p:cNvPr id="17" name="TextBox 16"/>
           <p:cNvSpPr txBox="1"/>
           <p:nvPr/>
         </p:nvSpPr>
@@ -20403,7 +19176,7 @@
       </p:sp>
       <p:sp>
         <p:nvSpPr>
-          <p:cNvPr id="20" name="TextBox 19"/>
+          <p:cNvPr id="18" name="TextBox 17"/>
           <p:cNvSpPr txBox="1"/>
           <p:nvPr/>
         </p:nvSpPr>
@@ -20448,7 +19221,7 @@
       </p:sp>
       <p:sp>
         <p:nvSpPr>
-          <p:cNvPr id="21" name="Rounded Rectangle 20"/>
+          <p:cNvPr id="19" name="Rounded Rectangle 18"/>
           <p:cNvSpPr/>
           <p:nvPr/>
         </p:nvSpPr>
@@ -20493,7 +19266,7 @@
       </p:sp>
       <p:sp>
         <p:nvSpPr>
-          <p:cNvPr id="22" name="Rounded Rectangle 21"/>
+          <p:cNvPr id="20" name="Rounded Rectangle 19"/>
           <p:cNvSpPr/>
           <p:nvPr/>
         </p:nvSpPr>
@@ -20538,7 +19311,7 @@
       </p:sp>
       <p:sp>
         <p:nvSpPr>
-          <p:cNvPr id="23" name="TextBox 22"/>
+          <p:cNvPr id="21" name="TextBox 20"/>
           <p:cNvSpPr txBox="1"/>
           <p:nvPr/>
         </p:nvSpPr>
@@ -20583,7 +19356,7 @@
       </p:sp>
       <p:sp>
         <p:nvSpPr>
-          <p:cNvPr id="24" name="TextBox 23"/>
+          <p:cNvPr id="22" name="TextBox 21"/>
           <p:cNvSpPr txBox="1"/>
           <p:nvPr/>
         </p:nvSpPr>
@@ -20628,7 +19401,7 @@
       </p:sp>
       <p:sp>
         <p:nvSpPr>
-          <p:cNvPr id="25" name="TextBox 24"/>
+          <p:cNvPr id="23" name="TextBox 22"/>
           <p:cNvSpPr txBox="1"/>
           <p:nvPr/>
         </p:nvSpPr>
@@ -20673,7 +19446,7 @@
       </p:sp>
       <p:sp>
         <p:nvSpPr>
-          <p:cNvPr id="26" name="TextBox 25"/>
+          <p:cNvPr id="24" name="TextBox 23"/>
           <p:cNvSpPr txBox="1"/>
           <p:nvPr/>
         </p:nvSpPr>
@@ -20711,14 +19484,14 @@
               </a:defRPr>
             </a:pPr>
             <a:r>
-              <a:t>Broader evaluation</a:t>
-            </a:r>
-          </a:p>
-        </p:txBody>
-      </p:sp>
-      <p:sp>
-        <p:nvSpPr>
-          <p:cNvPr id="27" name="TextBox 26"/>
+              <a:t>Relevant external context</a:t>
+            </a:r>
+          </a:p>
+        </p:txBody>
+      </p:sp>
+      <p:sp>
+        <p:nvSpPr>
+          <p:cNvPr id="25" name="TextBox 24"/>
           <p:cNvSpPr txBox="1"/>
           <p:nvPr/>
         </p:nvSpPr>
@@ -20756,14 +19529,14 @@
               </a:defRPr>
             </a:pPr>
             <a:r>
-              <a:t>Mixed-source cases</a:t>
-            </a:r>
-          </a:p>
-        </p:txBody>
-      </p:sp>
-      <p:sp>
-        <p:nvSpPr>
-          <p:cNvPr id="28" name="TextBox 27"/>
+              <a:t>Dependency mapping + adapter</a:t>
+            </a:r>
+          </a:p>
+        </p:txBody>
+      </p:sp>
+      <p:sp>
+        <p:nvSpPr>
+          <p:cNvPr id="26" name="TextBox 25"/>
           <p:cNvSpPr txBox="1"/>
           <p:nvPr/>
         </p:nvSpPr>
@@ -20808,7 +19581,7 @@
       </p:sp>
       <p:sp>
         <p:nvSpPr>
-          <p:cNvPr id="29" name="TextBox 28"/>
+          <p:cNvPr id="27" name="TextBox 26"/>
           <p:cNvSpPr txBox="1"/>
           <p:nvPr/>
         </p:nvSpPr>
@@ -20995,104 +19768,14 @@
               </a:defRPr>
             </a:pPr>
             <a:r>
-              <a:t>OPSREPLAY / HACKATHON PROTOTYPE</a:t>
-            </a:r>
-          </a:p>
-        </p:txBody>
-      </p:sp>
-      <p:sp>
-        <p:nvSpPr>
-          <p:cNvPr id="5" name="Rounded Rectangle 4"/>
-          <p:cNvSpPr/>
-          <p:nvPr/>
-        </p:nvSpPr>
-        <p:spPr>
-          <a:xfrm>
-            <a:off x="9982200" y="327660"/>
-            <a:ext cx="1714500" cy="335280"/>
-          </a:xfrm>
-          <a:prstGeom prst="roundRect">
-            <a:avLst>
-              <a:gd name="adj" fmla="val 25000"/>
-            </a:avLst>
-          </a:prstGeom>
-          <a:solidFill>
-            <a:srgbClr val="14213B"/>
-          </a:solidFill>
-          <a:ln>
-            <a:noFill/>
-          </a:ln>
-        </p:spPr>
-        <p:style>
-          <a:lnRef idx="1">
-            <a:schemeClr val="accent1"/>
-          </a:lnRef>
-          <a:fillRef idx="3">
-            <a:schemeClr val="accent1"/>
-          </a:fillRef>
-          <a:effectRef idx="2">
-            <a:schemeClr val="accent1"/>
-          </a:effectRef>
-          <a:fontRef idx="minor">
-            <a:schemeClr val="lt1"/>
-          </a:fontRef>
-        </p:style>
-        <p:txBody>
-          <a:bodyPr rtlCol="0" anchor="ctr"/>
-          <a:lstStyle/>
-          <a:p>
-            <a:pPr algn="ctr"/>
-          </a:p>
-        </p:txBody>
-      </p:sp>
-      <p:sp>
-        <p:nvSpPr>
-          <p:cNvPr id="6" name="TextBox 5"/>
-          <p:cNvSpPr txBox="1"/>
-          <p:nvPr/>
-        </p:nvSpPr>
-        <p:spPr>
-          <a:xfrm>
-            <a:off x="10119360" y="388620"/>
-            <a:ext cx="1539240" cy="245745"/>
-          </a:xfrm>
-          <a:prstGeom prst="rect">
-            <a:avLst/>
-          </a:prstGeom>
-          <a:noFill/>
-        </p:spPr>
-        <p:txBody>
-          <a:bodyPr wrap="none" lIns="0" rIns="0" tIns="0" bIns="0">
-            <a:spAutoFit/>
-          </a:bodyPr>
-          <a:lstStyle/>
-          <a:p>
-            <a:pPr>
-              <a:lnSpc>
-                <a:spcPts val="1575"/>
-              </a:lnSpc>
-              <a:spcBef>
-                <a:spcPts val="0"/>
-              </a:spcBef>
-              <a:spcAft>
-                <a:spcPts val="0"/>
-              </a:spcAft>
-              <a:defRPr sz="1260" b="1">
-                <a:solidFill>
-                  <a:srgbClr val="FFFFFF"/>
-                </a:solidFill>
-                <a:latin typeface="DejaVu Sans"/>
-              </a:defRPr>
-            </a:pPr>
-            <a:r>
-              <a:t>SOLO PROJECT</a:t>
-            </a:r>
-          </a:p>
-        </p:txBody>
-      </p:sp>
-      <p:sp>
-        <p:nvSpPr>
-          <p:cNvPr id="7" name="TextBox 6"/>
+              <a:t>OPSREPLAY / INCIDENT REPLAY</a:t>
+            </a:r>
+          </a:p>
+        </p:txBody>
+      </p:sp>
+      <p:sp>
+        <p:nvSpPr>
+          <p:cNvPr id="5" name="TextBox 4"/>
           <p:cNvSpPr txBox="1"/>
           <p:nvPr/>
         </p:nvSpPr>
@@ -21130,14 +19813,14 @@
               </a:defRPr>
             </a:pPr>
             <a:r>
-              <a:t>Next: strengthen the evidence, then the view.</a:t>
-            </a:r>
-          </a:p>
-        </p:txBody>
-      </p:sp>
-      <p:sp>
-        <p:nvSpPr>
-          <p:cNvPr id="8" name="TextBox 7"/>
+              <a:t>Next: connect the right operational context.</a:t>
+            </a:r>
+          </a:p>
+        </p:txBody>
+      </p:sp>
+      <p:sp>
+        <p:nvSpPr>
+          <p:cNvPr id="6" name="TextBox 5"/>
           <p:cNvSpPr txBox="1"/>
           <p:nvPr/>
         </p:nvSpPr>
@@ -21175,14 +19858,14 @@
               </a:defRPr>
             </a:pPr>
             <a:r>
-              <a:t>Small modules make the next experiment easier to change.</a:t>
+              <a:t>Add a relevant source, then verify the combined investigation.</a:t>
             </a:r>
           </a:p>
         </p:txBody>
       </p:sp>
       <p:cxnSp>
         <p:nvCxnSpPr>
-          <p:cNvPr id="9" name="Connector 8"/>
+          <p:cNvPr id="7" name="Connector 6"/>
           <p:cNvCxnSpPr/>
           <p:nvPr/>
         </p:nvCxnSpPr>
@@ -21217,7 +19900,7 @@
       </p:cxnSp>
       <p:sp>
         <p:nvSpPr>
-          <p:cNvPr id="10" name="TextBox 9"/>
+          <p:cNvPr id="8" name="TextBox 7"/>
           <p:cNvSpPr txBox="1"/>
           <p:nvPr/>
         </p:nvSpPr>
@@ -21255,14 +19938,14 @@
               </a:defRPr>
             </a:pPr>
             <a:r>
-              <a:t>SIMULATED IoT · Public GitHub API · Gemini</a:t>
-            </a:r>
-          </a:p>
-        </p:txBody>
-      </p:sp>
-      <p:sp>
-        <p:nvSpPr>
-          <p:cNvPr id="11" name="TextBox 10"/>
+              <a:t>SIMULATED IoT · Replay · Evidence</a:t>
+            </a:r>
+          </a:p>
+        </p:txBody>
+      </p:sp>
+      <p:sp>
+        <p:nvSpPr>
+          <p:cNvPr id="9" name="TextBox 8"/>
           <p:cNvSpPr txBox="1"/>
           <p:nvPr/>
         </p:nvSpPr>
@@ -21307,7 +19990,7 @@
       </p:sp>
       <p:sp>
         <p:nvSpPr>
-          <p:cNvPr id="12" name="Rounded Rectangle 11"/>
+          <p:cNvPr id="10" name="Rounded Rectangle 9"/>
           <p:cNvSpPr/>
           <p:nvPr/>
         </p:nvSpPr>
@@ -21352,7 +20035,7 @@
       </p:sp>
       <p:sp>
         <p:nvSpPr>
-          <p:cNvPr id="13" name="Rounded Rectangle 12"/>
+          <p:cNvPr id="11" name="Rounded Rectangle 10"/>
           <p:cNvSpPr/>
           <p:nvPr/>
         </p:nvSpPr>
@@ -21397,7 +20080,7 @@
       </p:sp>
       <p:sp>
         <p:nvSpPr>
-          <p:cNvPr id="14" name="TextBox 13"/>
+          <p:cNvPr id="12" name="TextBox 11"/>
           <p:cNvSpPr txBox="1"/>
           <p:nvPr/>
         </p:nvSpPr>
@@ -21442,19 +20125,17 @@
       </p:sp>
       <p:sp>
         <p:nvSpPr>
-          <p:cNvPr id="15" name="Rounded Rectangle 14"/>
+          <p:cNvPr id="13" name="Oval 12"/>
           <p:cNvSpPr/>
           <p:nvPr/>
         </p:nvSpPr>
         <p:spPr>
           <a:xfrm>
-            <a:off x="716280" y="2750820"/>
-            <a:ext cx="704088" cy="469392"/>
-          </a:xfrm>
-          <a:prstGeom prst="roundRect">
-            <a:avLst>
-              <a:gd name="adj" fmla="val 12987"/>
-            </a:avLst>
+            <a:off x="716280" y="2884932"/>
+            <a:ext cx="335280" cy="335280"/>
+          </a:xfrm>
+          <a:prstGeom prst="ellipse">
+            <a:avLst/>
           </a:prstGeom>
           <a:solidFill>
             <a:srgbClr val="E9E4FF"/>
@@ -21487,16 +20168,151 @@
           </a:p>
         </p:txBody>
       </p:sp>
+      <p:sp>
+        <p:nvSpPr>
+          <p:cNvPr id="14" name="Oval 13"/>
+          <p:cNvSpPr/>
+          <p:nvPr/>
+        </p:nvSpPr>
+        <p:spPr>
+          <a:xfrm>
+            <a:off x="858774" y="2725674"/>
+            <a:ext cx="452628" cy="452628"/>
+          </a:xfrm>
+          <a:prstGeom prst="ellipse">
+            <a:avLst/>
+          </a:prstGeom>
+          <a:solidFill>
+            <a:srgbClr val="E9E4FF"/>
+          </a:solidFill>
+          <a:ln w="22860">
+            <a:solidFill>
+              <a:srgbClr val="7051E8"/>
+            </a:solidFill>
+          </a:ln>
+        </p:spPr>
+        <p:style>
+          <a:lnRef idx="1">
+            <a:schemeClr val="accent1"/>
+          </a:lnRef>
+          <a:fillRef idx="3">
+            <a:schemeClr val="accent1"/>
+          </a:fillRef>
+          <a:effectRef idx="2">
+            <a:schemeClr val="accent1"/>
+          </a:effectRef>
+          <a:fontRef idx="minor">
+            <a:schemeClr val="lt1"/>
+          </a:fontRef>
+        </p:style>
+        <p:txBody>
+          <a:bodyPr rtlCol="0" anchor="ctr"/>
+          <a:lstStyle/>
+          <a:p>
+            <a:pPr algn="ctr"/>
+          </a:p>
+        </p:txBody>
+      </p:sp>
+      <p:sp>
+        <p:nvSpPr>
+          <p:cNvPr id="15" name="Oval 14"/>
+          <p:cNvSpPr/>
+          <p:nvPr/>
+        </p:nvSpPr>
+        <p:spPr>
+          <a:xfrm>
+            <a:off x="1110234" y="2884932"/>
+            <a:ext cx="352044" cy="352044"/>
+          </a:xfrm>
+          <a:prstGeom prst="ellipse">
+            <a:avLst/>
+          </a:prstGeom>
+          <a:solidFill>
+            <a:srgbClr val="E9E4FF"/>
+          </a:solidFill>
+          <a:ln w="22860">
+            <a:solidFill>
+              <a:srgbClr val="7051E8"/>
+            </a:solidFill>
+          </a:ln>
+        </p:spPr>
+        <p:style>
+          <a:lnRef idx="1">
+            <a:schemeClr val="accent1"/>
+          </a:lnRef>
+          <a:fillRef idx="3">
+            <a:schemeClr val="accent1"/>
+          </a:fillRef>
+          <a:effectRef idx="2">
+            <a:schemeClr val="accent1"/>
+          </a:effectRef>
+          <a:fontRef idx="minor">
+            <a:schemeClr val="lt1"/>
+          </a:fontRef>
+        </p:style>
+        <p:txBody>
+          <a:bodyPr rtlCol="0" anchor="ctr"/>
+          <a:lstStyle/>
+          <a:p>
+            <a:pPr algn="ctr"/>
+          </a:p>
+        </p:txBody>
+      </p:sp>
+      <p:sp>
+        <p:nvSpPr>
+          <p:cNvPr id="16" name="Rounded Rectangle 15"/>
+          <p:cNvSpPr/>
+          <p:nvPr/>
+        </p:nvSpPr>
+        <p:spPr>
+          <a:xfrm>
+            <a:off x="816864" y="3019044"/>
+            <a:ext cx="553212" cy="251460"/>
+          </a:xfrm>
+          <a:prstGeom prst="roundRect">
+            <a:avLst>
+              <a:gd name="adj" fmla="val 24242"/>
+            </a:avLst>
+          </a:prstGeom>
+          <a:solidFill>
+            <a:srgbClr val="E9E4FF"/>
+          </a:solidFill>
+          <a:ln>
+            <a:noFill/>
+          </a:ln>
+        </p:spPr>
+        <p:style>
+          <a:lnRef idx="1">
+            <a:schemeClr val="accent1"/>
+          </a:lnRef>
+          <a:fillRef idx="3">
+            <a:schemeClr val="accent1"/>
+          </a:fillRef>
+          <a:effectRef idx="2">
+            <a:schemeClr val="accent1"/>
+          </a:effectRef>
+          <a:fontRef idx="minor">
+            <a:schemeClr val="lt1"/>
+          </a:fontRef>
+        </p:style>
+        <p:txBody>
+          <a:bodyPr rtlCol="0" anchor="ctr"/>
+          <a:lstStyle/>
+          <a:p>
+            <a:pPr algn="ctr"/>
+          </a:p>
+        </p:txBody>
+      </p:sp>
       <p:cxnSp>
         <p:nvCxnSpPr>
-          <p:cNvPr id="16" name="Connector 15"/>
+          <p:cNvPr id="17" name="Connector 16"/>
           <p:cNvCxnSpPr/>
           <p:nvPr/>
         </p:nvCxnSpPr>
         <p:spPr>
           <a:xfrm>
-            <a:off x="1068324" y="3220212"/>
-            <a:ext cx="0" cy="134112"/>
+            <a:off x="1085088" y="3270504"/>
+            <a:ext cx="0" cy="150876"/>
           </a:xfrm>
           <a:prstGeom prst="line">
             <a:avLst/>
@@ -21522,184 +20338,9 @@
           </a:fontRef>
         </p:style>
       </p:cxnSp>
-      <p:cxnSp>
-        <p:nvCxnSpPr>
-          <p:cNvPr id="17" name="Connector 16"/>
-          <p:cNvCxnSpPr/>
-          <p:nvPr/>
-        </p:nvCxnSpPr>
-        <p:spPr>
-          <a:xfrm>
-            <a:off x="867156" y="3354324"/>
-            <a:ext cx="402336" cy="0"/>
-          </a:xfrm>
-          <a:prstGeom prst="line">
-            <a:avLst/>
-          </a:prstGeom>
-          <a:ln w="33528">
-            <a:solidFill>
-              <a:srgbClr val="7051E8"/>
-            </a:solidFill>
-          </a:ln>
-        </p:spPr>
-        <p:style>
-          <a:lnRef idx="2">
-            <a:schemeClr val="accent1"/>
-          </a:lnRef>
-          <a:fillRef idx="0">
-            <a:schemeClr val="accent1"/>
-          </a:fillRef>
-          <a:effectRef idx="1">
-            <a:schemeClr val="accent1"/>
-          </a:effectRef>
-          <a:fontRef idx="minor">
-            <a:schemeClr val="tx1"/>
-          </a:fontRef>
-        </p:style>
-      </p:cxnSp>
-      <p:cxnSp>
-        <p:nvCxnSpPr>
-          <p:cNvPr id="18" name="Connector 17"/>
-          <p:cNvCxnSpPr/>
-          <p:nvPr/>
-        </p:nvCxnSpPr>
-        <p:spPr>
-          <a:xfrm>
-            <a:off x="875538" y="2968752"/>
-            <a:ext cx="125730" cy="0"/>
-          </a:xfrm>
-          <a:prstGeom prst="line">
-            <a:avLst/>
-          </a:prstGeom>
-          <a:ln w="33528">
-            <a:solidFill>
-              <a:srgbClr val="7051E8"/>
-            </a:solidFill>
-          </a:ln>
-        </p:spPr>
-        <p:style>
-          <a:lnRef idx="2">
-            <a:schemeClr val="accent1"/>
-          </a:lnRef>
-          <a:fillRef idx="0">
-            <a:schemeClr val="accent1"/>
-          </a:fillRef>
-          <a:effectRef idx="1">
-            <a:schemeClr val="accent1"/>
-          </a:effectRef>
-          <a:fontRef idx="minor">
-            <a:schemeClr val="tx1"/>
-          </a:fontRef>
-        </p:style>
-      </p:cxnSp>
-      <p:cxnSp>
-        <p:nvCxnSpPr>
-          <p:cNvPr id="19" name="Connector 18"/>
-          <p:cNvCxnSpPr/>
-          <p:nvPr/>
-        </p:nvCxnSpPr>
-        <p:spPr>
-          <a:xfrm flipV="1">
-            <a:off x="1001268" y="2859786"/>
-            <a:ext cx="75438" cy="108966"/>
-          </a:xfrm>
-          <a:prstGeom prst="line">
-            <a:avLst/>
-          </a:prstGeom>
-          <a:ln w="33528">
-            <a:solidFill>
-              <a:srgbClr val="7051E8"/>
-            </a:solidFill>
-          </a:ln>
-        </p:spPr>
-        <p:style>
-          <a:lnRef idx="2">
-            <a:schemeClr val="accent1"/>
-          </a:lnRef>
-          <a:fillRef idx="0">
-            <a:schemeClr val="accent1"/>
-          </a:fillRef>
-          <a:effectRef idx="1">
-            <a:schemeClr val="accent1"/>
-          </a:effectRef>
-          <a:fontRef idx="minor">
-            <a:schemeClr val="tx1"/>
-          </a:fontRef>
-        </p:style>
-      </p:cxnSp>
-      <p:cxnSp>
-        <p:nvCxnSpPr>
-          <p:cNvPr id="20" name="Connector 19"/>
-          <p:cNvCxnSpPr/>
-          <p:nvPr/>
-        </p:nvCxnSpPr>
-        <p:spPr>
-          <a:xfrm>
-            <a:off x="1076706" y="2859786"/>
-            <a:ext cx="92202" cy="226314"/>
-          </a:xfrm>
-          <a:prstGeom prst="line">
-            <a:avLst/>
-          </a:prstGeom>
-          <a:ln w="33528">
-            <a:solidFill>
-              <a:srgbClr val="7051E8"/>
-            </a:solidFill>
-          </a:ln>
-        </p:spPr>
-        <p:style>
-          <a:lnRef idx="2">
-            <a:schemeClr val="accent1"/>
-          </a:lnRef>
-          <a:fillRef idx="0">
-            <a:schemeClr val="accent1"/>
-          </a:fillRef>
-          <a:effectRef idx="1">
-            <a:schemeClr val="accent1"/>
-          </a:effectRef>
-          <a:fontRef idx="minor">
-            <a:schemeClr val="tx1"/>
-          </a:fontRef>
-        </p:style>
-      </p:cxnSp>
-      <p:cxnSp>
-        <p:nvCxnSpPr>
-          <p:cNvPr id="21" name="Connector 20"/>
-          <p:cNvCxnSpPr/>
-          <p:nvPr/>
-        </p:nvCxnSpPr>
-        <p:spPr>
-          <a:xfrm flipV="1">
-            <a:off x="1168908" y="2960370"/>
-            <a:ext cx="108966" cy="125730"/>
-          </a:xfrm>
-          <a:prstGeom prst="line">
-            <a:avLst/>
-          </a:prstGeom>
-          <a:ln w="33528">
-            <a:solidFill>
-              <a:srgbClr val="7051E8"/>
-            </a:solidFill>
-          </a:ln>
-        </p:spPr>
-        <p:style>
-          <a:lnRef idx="2">
-            <a:schemeClr val="accent1"/>
-          </a:lnRef>
-          <a:fillRef idx="0">
-            <a:schemeClr val="accent1"/>
-          </a:fillRef>
-          <a:effectRef idx="1">
-            <a:schemeClr val="accent1"/>
-          </a:effectRef>
-          <a:fontRef idx="minor">
-            <a:schemeClr val="tx1"/>
-          </a:fontRef>
-        </p:style>
-      </p:cxnSp>
-      <p:sp>
-        <p:nvSpPr>
-          <p:cNvPr id="22" name="TextBox 21"/>
+      <p:sp>
+        <p:nvSpPr>
+          <p:cNvPr id="18" name="TextBox 17"/>
           <p:cNvSpPr txBox="1"/>
           <p:nvPr/>
         </p:nvSpPr>
@@ -21737,14 +20378,14 @@
               </a:defRPr>
             </a:pPr>
             <a:r>
-              <a:t>Real data</a:t>
-            </a:r>
-          </a:p>
-        </p:txBody>
-      </p:sp>
-      <p:sp>
-        <p:nvSpPr>
-          <p:cNvPr id="23" name="TextBox 22"/>
+              <a:t>Cloud status</a:t>
+            </a:r>
+          </a:p>
+        </p:txBody>
+      </p:sp>
+      <p:sp>
+        <p:nvSpPr>
+          <p:cNvPr id="19" name="TextBox 18"/>
           <p:cNvSpPr txBox="1"/>
           <p:nvPr/>
         </p:nvSpPr>
@@ -21782,14 +20423,14 @@
               </a:defRPr>
             </a:pPr>
             <a:r>
-              <a:t>Hardware adapter</a:t>
-            </a:r>
-          </a:p>
-        </p:txBody>
-      </p:sp>
-      <p:sp>
-        <p:nvSpPr>
-          <p:cNvPr id="24" name="Rounded Rectangle 23"/>
+              <a:t>Map device dependencies</a:t>
+            </a:r>
+          </a:p>
+        </p:txBody>
+      </p:sp>
+      <p:sp>
+        <p:nvSpPr>
+          <p:cNvPr id="20" name="Rounded Rectangle 19"/>
           <p:cNvSpPr/>
           <p:nvPr/>
         </p:nvSpPr>
@@ -21834,7 +20475,7 @@
       </p:sp>
       <p:sp>
         <p:nvSpPr>
-          <p:cNvPr id="25" name="Rounded Rectangle 24"/>
+          <p:cNvPr id="21" name="Rounded Rectangle 20"/>
           <p:cNvSpPr/>
           <p:nvPr/>
         </p:nvSpPr>
@@ -21879,7 +20520,7 @@
       </p:sp>
       <p:sp>
         <p:nvSpPr>
-          <p:cNvPr id="26" name="TextBox 25"/>
+          <p:cNvPr id="22" name="TextBox 21"/>
           <p:cNvSpPr txBox="1"/>
           <p:nvPr/>
         </p:nvSpPr>
@@ -21924,7 +20565,7 @@
       </p:sp>
       <p:sp>
         <p:nvSpPr>
-          <p:cNvPr id="27" name="Oval 26"/>
+          <p:cNvPr id="23" name="Oval 22"/>
           <p:cNvSpPr/>
           <p:nvPr/>
         </p:nvSpPr>
@@ -21969,7 +20610,7 @@
       </p:sp>
       <p:cxnSp>
         <p:nvCxnSpPr>
-          <p:cNvPr id="28" name="Connector 27"/>
+          <p:cNvPr id="24" name="Connector 23"/>
           <p:cNvCxnSpPr/>
           <p:nvPr/>
         </p:nvCxnSpPr>
@@ -22004,7 +20645,7 @@
       </p:cxnSp>
       <p:sp>
         <p:nvSpPr>
-          <p:cNvPr id="29" name="TextBox 28"/>
+          <p:cNvPr id="25" name="TextBox 24"/>
           <p:cNvSpPr txBox="1"/>
           <p:nvPr/>
         </p:nvSpPr>
@@ -22049,7 +20690,7 @@
       </p:sp>
       <p:sp>
         <p:nvSpPr>
-          <p:cNvPr id="30" name="TextBox 29"/>
+          <p:cNvPr id="26" name="TextBox 25"/>
           <p:cNvSpPr txBox="1"/>
           <p:nvPr/>
         </p:nvSpPr>
@@ -22094,7 +20735,7 @@
       </p:sp>
       <p:sp>
         <p:nvSpPr>
-          <p:cNvPr id="31" name="Rounded Rectangle 30"/>
+          <p:cNvPr id="27" name="Rounded Rectangle 26"/>
           <p:cNvSpPr/>
           <p:nvPr/>
         </p:nvSpPr>
@@ -22139,7 +20780,7 @@
       </p:sp>
       <p:sp>
         <p:nvSpPr>
-          <p:cNvPr id="32" name="Rounded Rectangle 31"/>
+          <p:cNvPr id="28" name="Rounded Rectangle 27"/>
           <p:cNvSpPr/>
           <p:nvPr/>
         </p:nvSpPr>
@@ -22184,7 +20825,7 @@
       </p:sp>
       <p:sp>
         <p:nvSpPr>
-          <p:cNvPr id="33" name="TextBox 32"/>
+          <p:cNvPr id="29" name="TextBox 28"/>
           <p:cNvSpPr txBox="1"/>
           <p:nvPr/>
         </p:nvSpPr>
@@ -22229,7 +20870,7 @@
       </p:sp>
       <p:sp>
         <p:nvSpPr>
-          <p:cNvPr id="34" name="Rounded Rectangle 33"/>
+          <p:cNvPr id="30" name="Rounded Rectangle 29"/>
           <p:cNvSpPr/>
           <p:nvPr/>
         </p:nvSpPr>
@@ -22276,14 +20917,154 @@
       </p:sp>
       <p:cxnSp>
         <p:nvCxnSpPr>
+          <p:cNvPr id="31" name="Connector 30"/>
+          <p:cNvCxnSpPr/>
+          <p:nvPr/>
+        </p:nvCxnSpPr>
+        <p:spPr>
+          <a:xfrm>
+            <a:off x="8718804" y="3220212"/>
+            <a:ext cx="0" cy="134112"/>
+          </a:xfrm>
+          <a:prstGeom prst="line">
+            <a:avLst/>
+          </a:prstGeom>
+          <a:ln w="33528">
+            <a:solidFill>
+              <a:srgbClr val="7051E8"/>
+            </a:solidFill>
+          </a:ln>
+        </p:spPr>
+        <p:style>
+          <a:lnRef idx="2">
+            <a:schemeClr val="accent1"/>
+          </a:lnRef>
+          <a:fillRef idx="0">
+            <a:schemeClr val="accent1"/>
+          </a:fillRef>
+          <a:effectRef idx="1">
+            <a:schemeClr val="accent1"/>
+          </a:effectRef>
+          <a:fontRef idx="minor">
+            <a:schemeClr val="tx1"/>
+          </a:fontRef>
+        </p:style>
+      </p:cxnSp>
+      <p:cxnSp>
+        <p:nvCxnSpPr>
+          <p:cNvPr id="32" name="Connector 31"/>
+          <p:cNvCxnSpPr/>
+          <p:nvPr/>
+        </p:nvCxnSpPr>
+        <p:spPr>
+          <a:xfrm>
+            <a:off x="8517636" y="3354324"/>
+            <a:ext cx="402336" cy="0"/>
+          </a:xfrm>
+          <a:prstGeom prst="line">
+            <a:avLst/>
+          </a:prstGeom>
+          <a:ln w="33528">
+            <a:solidFill>
+              <a:srgbClr val="7051E8"/>
+            </a:solidFill>
+          </a:ln>
+        </p:spPr>
+        <p:style>
+          <a:lnRef idx="2">
+            <a:schemeClr val="accent1"/>
+          </a:lnRef>
+          <a:fillRef idx="0">
+            <a:schemeClr val="accent1"/>
+          </a:fillRef>
+          <a:effectRef idx="1">
+            <a:schemeClr val="accent1"/>
+          </a:effectRef>
+          <a:fontRef idx="minor">
+            <a:schemeClr val="tx1"/>
+          </a:fontRef>
+        </p:style>
+      </p:cxnSp>
+      <p:cxnSp>
+        <p:nvCxnSpPr>
+          <p:cNvPr id="33" name="Connector 32"/>
+          <p:cNvCxnSpPr/>
+          <p:nvPr/>
+        </p:nvCxnSpPr>
+        <p:spPr>
+          <a:xfrm>
+            <a:off x="8526018" y="2968752"/>
+            <a:ext cx="125730" cy="0"/>
+          </a:xfrm>
+          <a:prstGeom prst="line">
+            <a:avLst/>
+          </a:prstGeom>
+          <a:ln w="33528">
+            <a:solidFill>
+              <a:srgbClr val="7051E8"/>
+            </a:solidFill>
+          </a:ln>
+        </p:spPr>
+        <p:style>
+          <a:lnRef idx="2">
+            <a:schemeClr val="accent1"/>
+          </a:lnRef>
+          <a:fillRef idx="0">
+            <a:schemeClr val="accent1"/>
+          </a:fillRef>
+          <a:effectRef idx="1">
+            <a:schemeClr val="accent1"/>
+          </a:effectRef>
+          <a:fontRef idx="minor">
+            <a:schemeClr val="tx1"/>
+          </a:fontRef>
+        </p:style>
+      </p:cxnSp>
+      <p:cxnSp>
+        <p:nvCxnSpPr>
+          <p:cNvPr id="34" name="Connector 33"/>
+          <p:cNvCxnSpPr/>
+          <p:nvPr/>
+        </p:nvCxnSpPr>
+        <p:spPr>
+          <a:xfrm flipV="1">
+            <a:off x="8651748" y="2859786"/>
+            <a:ext cx="75437" cy="108966"/>
+          </a:xfrm>
+          <a:prstGeom prst="line">
+            <a:avLst/>
+          </a:prstGeom>
+          <a:ln w="33528">
+            <a:solidFill>
+              <a:srgbClr val="7051E8"/>
+            </a:solidFill>
+          </a:ln>
+        </p:spPr>
+        <p:style>
+          <a:lnRef idx="2">
+            <a:schemeClr val="accent1"/>
+          </a:lnRef>
+          <a:fillRef idx="0">
+            <a:schemeClr val="accent1"/>
+          </a:fillRef>
+          <a:effectRef idx="1">
+            <a:schemeClr val="accent1"/>
+          </a:effectRef>
+          <a:fontRef idx="minor">
+            <a:schemeClr val="tx1"/>
+          </a:fontRef>
+        </p:style>
+      </p:cxnSp>
+      <p:cxnSp>
+        <p:nvCxnSpPr>
           <p:cNvPr id="35" name="Connector 34"/>
           <p:cNvCxnSpPr/>
           <p:nvPr/>
         </p:nvCxnSpPr>
         <p:spPr>
           <a:xfrm>
-            <a:off x="8718804" y="3220212"/>
-            <a:ext cx="0" cy="134112"/>
+            <a:off x="8727185" y="2859786"/>
+            <a:ext cx="92203" cy="226314"/>
           </a:xfrm>
           <a:prstGeom prst="line">
             <a:avLst/>
@@ -22316,9 +21097,9 @@
           <p:nvPr/>
         </p:nvCxnSpPr>
         <p:spPr>
-          <a:xfrm>
-            <a:off x="8517636" y="3354324"/>
-            <a:ext cx="402336" cy="0"/>
+          <a:xfrm flipV="1">
+            <a:off x="8819388" y="2960370"/>
+            <a:ext cx="108966" cy="125730"/>
           </a:xfrm>
           <a:prstGeom prst="line">
             <a:avLst/>
@@ -22344,149 +21125,9 @@
           </a:fontRef>
         </p:style>
       </p:cxnSp>
-      <p:cxnSp>
-        <p:nvCxnSpPr>
-          <p:cNvPr id="37" name="Connector 36"/>
-          <p:cNvCxnSpPr/>
-          <p:nvPr/>
-        </p:nvCxnSpPr>
-        <p:spPr>
-          <a:xfrm>
-            <a:off x="8526018" y="2968752"/>
-            <a:ext cx="125730" cy="0"/>
-          </a:xfrm>
-          <a:prstGeom prst="line">
-            <a:avLst/>
-          </a:prstGeom>
-          <a:ln w="33528">
-            <a:solidFill>
-              <a:srgbClr val="7051E8"/>
-            </a:solidFill>
-          </a:ln>
-        </p:spPr>
-        <p:style>
-          <a:lnRef idx="2">
-            <a:schemeClr val="accent1"/>
-          </a:lnRef>
-          <a:fillRef idx="0">
-            <a:schemeClr val="accent1"/>
-          </a:fillRef>
-          <a:effectRef idx="1">
-            <a:schemeClr val="accent1"/>
-          </a:effectRef>
-          <a:fontRef idx="minor">
-            <a:schemeClr val="tx1"/>
-          </a:fontRef>
-        </p:style>
-      </p:cxnSp>
-      <p:cxnSp>
-        <p:nvCxnSpPr>
-          <p:cNvPr id="38" name="Connector 37"/>
-          <p:cNvCxnSpPr/>
-          <p:nvPr/>
-        </p:nvCxnSpPr>
-        <p:spPr>
-          <a:xfrm flipV="1">
-            <a:off x="8651748" y="2859786"/>
-            <a:ext cx="75437" cy="108966"/>
-          </a:xfrm>
-          <a:prstGeom prst="line">
-            <a:avLst/>
-          </a:prstGeom>
-          <a:ln w="33528">
-            <a:solidFill>
-              <a:srgbClr val="7051E8"/>
-            </a:solidFill>
-          </a:ln>
-        </p:spPr>
-        <p:style>
-          <a:lnRef idx="2">
-            <a:schemeClr val="accent1"/>
-          </a:lnRef>
-          <a:fillRef idx="0">
-            <a:schemeClr val="accent1"/>
-          </a:fillRef>
-          <a:effectRef idx="1">
-            <a:schemeClr val="accent1"/>
-          </a:effectRef>
-          <a:fontRef idx="minor">
-            <a:schemeClr val="tx1"/>
-          </a:fontRef>
-        </p:style>
-      </p:cxnSp>
-      <p:cxnSp>
-        <p:nvCxnSpPr>
-          <p:cNvPr id="39" name="Connector 38"/>
-          <p:cNvCxnSpPr/>
-          <p:nvPr/>
-        </p:nvCxnSpPr>
-        <p:spPr>
-          <a:xfrm>
-            <a:off x="8727185" y="2859786"/>
-            <a:ext cx="92203" cy="226314"/>
-          </a:xfrm>
-          <a:prstGeom prst="line">
-            <a:avLst/>
-          </a:prstGeom>
-          <a:ln w="33528">
-            <a:solidFill>
-              <a:srgbClr val="7051E8"/>
-            </a:solidFill>
-          </a:ln>
-        </p:spPr>
-        <p:style>
-          <a:lnRef idx="2">
-            <a:schemeClr val="accent1"/>
-          </a:lnRef>
-          <a:fillRef idx="0">
-            <a:schemeClr val="accent1"/>
-          </a:fillRef>
-          <a:effectRef idx="1">
-            <a:schemeClr val="accent1"/>
-          </a:effectRef>
-          <a:fontRef idx="minor">
-            <a:schemeClr val="tx1"/>
-          </a:fontRef>
-        </p:style>
-      </p:cxnSp>
-      <p:cxnSp>
-        <p:nvCxnSpPr>
-          <p:cNvPr id="40" name="Connector 39"/>
-          <p:cNvCxnSpPr/>
-          <p:nvPr/>
-        </p:nvCxnSpPr>
-        <p:spPr>
-          <a:xfrm flipV="1">
-            <a:off x="8819388" y="2960370"/>
-            <a:ext cx="108966" cy="125730"/>
-          </a:xfrm>
-          <a:prstGeom prst="line">
-            <a:avLst/>
-          </a:prstGeom>
-          <a:ln w="33528">
-            <a:solidFill>
-              <a:srgbClr val="7051E8"/>
-            </a:solidFill>
-          </a:ln>
-        </p:spPr>
-        <p:style>
-          <a:lnRef idx="2">
-            <a:schemeClr val="accent1"/>
-          </a:lnRef>
-          <a:fillRef idx="0">
-            <a:schemeClr val="accent1"/>
-          </a:fillRef>
-          <a:effectRef idx="1">
-            <a:schemeClr val="accent1"/>
-          </a:effectRef>
-          <a:fontRef idx="minor">
-            <a:schemeClr val="tx1"/>
-          </a:fontRef>
-        </p:style>
-      </p:cxnSp>
-      <p:sp>
-        <p:nvSpPr>
-          <p:cNvPr id="41" name="TextBox 40"/>
+      <p:sp>
+        <p:nvSpPr>
+          <p:cNvPr id="37" name="TextBox 36"/>
           <p:cNvSpPr txBox="1"/>
           <p:nvPr/>
         </p:nvSpPr>
@@ -22524,14 +21165,14 @@
               </a:defRPr>
             </a:pPr>
             <a:r>
-              <a:t>Optional 3D</a:t>
-            </a:r>
-          </a:p>
-        </p:txBody>
-      </p:sp>
-      <p:sp>
-        <p:nvSpPr>
-          <p:cNvPr id="42" name="TextBox 41"/>
+              <a:t>Real devices</a:t>
+            </a:r>
+          </a:p>
+        </p:txBody>
+      </p:sp>
+      <p:sp>
+        <p:nvSpPr>
+          <p:cNvPr id="38" name="TextBox 37"/>
           <p:cNvSpPr txBox="1"/>
           <p:nvPr/>
         </p:nvSpPr>
@@ -22569,14 +21210,14 @@
               </a:defRPr>
             </a:pPr>
             <a:r>
-              <a:t>Device location + status</a:t>
-            </a:r>
-          </a:p>
-        </p:txBody>
-      </p:sp>
-      <p:sp>
-        <p:nvSpPr>
-          <p:cNvPr id="43" name="Rounded Rectangle 42"/>
+              <a:t>Hardware adapter</a:t>
+            </a:r>
+          </a:p>
+        </p:txBody>
+      </p:sp>
+      <p:sp>
+        <p:nvSpPr>
+          <p:cNvPr id="39" name="Rounded Rectangle 38"/>
           <p:cNvSpPr/>
           <p:nvPr/>
         </p:nvSpPr>
@@ -22621,7 +21262,7 @@
       </p:sp>
       <p:sp>
         <p:nvSpPr>
-          <p:cNvPr id="44" name="TextBox 43"/>
+          <p:cNvPr id="40" name="TextBox 39"/>
           <p:cNvSpPr txBox="1"/>
           <p:nvPr/>
         </p:nvSpPr>
@@ -22666,7 +21307,7 @@
       </p:sp>
       <p:sp>
         <p:nvSpPr>
-          <p:cNvPr id="45" name="TextBox 44"/>
+          <p:cNvPr id="41" name="TextBox 40"/>
           <p:cNvSpPr txBox="1"/>
           <p:nvPr/>
         </p:nvSpPr>
@@ -22704,7 +21345,7 @@
               </a:defRPr>
             </a:pPr>
             <a:r>
-              <a:t>Future direction · 3D is not implemented</a:t>
+              <a:t>Future work · external context and optional 3D are not implemented</a:t>
             </a:r>
           </a:p>
         </p:txBody>
